--- a/index/clientes/mkof/MOVA-Auth-Plan-Ejecucion.pptx
+++ b/index/clientes/mkof/MOVA-Auth-Plan-Ejecucion.pptx
@@ -17,13 +17,6 @@
     <p:sldId id="265" r:id="rId16"/>
     <p:sldId id="266" r:id="rId17"/>
     <p:sldId id="267" r:id="rId18"/>
-    <p:sldId id="268" r:id="rId19"/>
-    <p:sldId id="269" r:id="rId20"/>
-    <p:sldId id="270" r:id="rId21"/>
-    <p:sldId id="271" r:id="rId22"/>
-    <p:sldId id="272" r:id="rId23"/>
-    <p:sldId id="273" r:id="rId24"/>
-    <p:sldId id="274" r:id="rId25"/>
   </p:sldIdLst>
   <p:sldSz cx="12191695" cy="6858000" type="screen4x3"/>
   <p:notesSz cx="6858000" cy="9144000"/>
@@ -3122,8 +3115,8 @@
         </p:nvSpPr>
         <p:spPr>
           <a:xfrm>
-            <a:off x="731520" y="1463040"/>
-            <a:ext cx="10515600" cy="548640"/>
+            <a:off x="731520" y="1371600"/>
+            <a:ext cx="10515600" cy="457200"/>
           </a:xfrm>
           <a:prstGeom prst="rect">
             <a:avLst/>
@@ -3144,7 +3137,7 @@
               </a:defRPr>
             </a:pPr>
             <a:r>
-              <a:t>MOVA · Post-auditoría</a:t>
+              <a:t>MOVA · Login unificado</a:t>
             </a:r>
           </a:p>
         </p:txBody>
@@ -3157,7 +3150,7 @@
         </p:nvSpPr>
         <p:spPr>
           <a:xfrm>
-            <a:off x="731520" y="2011680"/>
+            <a:off x="731520" y="1920240"/>
             <a:ext cx="10515600" cy="914400"/>
           </a:xfrm>
           <a:prstGeom prst="rect">
@@ -3179,7 +3172,7 @@
               </a:defRPr>
             </a:pPr>
             <a:r>
-              <a:t>Plan de ejecución</a:t>
+              <a:t>Plan 7 días hábiles</a:t>
             </a:r>
           </a:p>
         </p:txBody>
@@ -3192,29 +3185,29 @@
         </p:nvSpPr>
         <p:spPr>
           <a:xfrm>
-            <a:off x="731520" y="3017520"/>
-            <a:ext cx="10515600" cy="822960"/>
-          </a:xfrm>
-          <a:prstGeom prst="rect">
-            <a:avLst/>
-          </a:prstGeom>
-          <a:noFill/>
-        </p:spPr>
-        <p:txBody>
-          <a:bodyPr wrap="square">
-            <a:spAutoFit/>
-          </a:bodyPr>
-          <a:lstStyle/>
-          <a:p>
-            <a:pPr algn="l">
-              <a:defRPr sz="3000" b="0">
+            <a:off x="731520" y="2926080"/>
+            <a:ext cx="10515600" cy="640080"/>
+          </a:xfrm>
+          <a:prstGeom prst="rect">
+            <a:avLst/>
+          </a:prstGeom>
+          <a:noFill/>
+        </p:spPr>
+        <p:txBody>
+          <a:bodyPr wrap="square">
+            <a:spAutoFit/>
+          </a:bodyPr>
+          <a:lstStyle/>
+          <a:p>
+            <a:pPr algn="l">
+              <a:defRPr sz="2800" b="0">
                 <a:solidFill>
                   <a:srgbClr val="E8F6F8"/>
                 </a:solidFill>
               </a:defRPr>
             </a:pPr>
             <a:r>
-              <a:t>Login unificado · mova_auth</a:t>
+              <a:t>mova_auth · acme-chile.cl</a:t>
             </a:r>
           </a:p>
         </p:txBody>
@@ -3227,7 +3220,7 @@
         </p:nvSpPr>
         <p:spPr>
           <a:xfrm>
-            <a:off x="731520" y="4023360"/>
+            <a:off x="731520" y="3749039"/>
             <a:ext cx="10515600" cy="457200"/>
           </a:xfrm>
           <a:prstGeom prst="rect">
@@ -3249,7 +3242,7 @@
               </a:defRPr>
             </a:pPr>
             <a:r>
-              <a:t>Hitos 2.1 + 2.2 · Semanas 1–2 del Gantt</a:t>
+              <a:t>6 jul 2026 → 14 jul 2026 · Hitos 2.1 + 2.2</a:t>
             </a:r>
           </a:p>
         </p:txBody>
@@ -3277,14 +3270,14 @@
           <a:lstStyle/>
           <a:p>
             <a:pPr algn="l">
-              <a:defRPr sz="1400" b="0">
+              <a:defRPr sz="1300" b="0">
                 <a:solidFill>
                   <a:srgbClr val="656D76"/>
                 </a:solidFill>
               </a:defRPr>
             </a:pPr>
             <a:r>
-              <a:t>GRUPO MAKING OF · Guía para el encargado · Jul 2026</a:t>
+              <a:t>GRUPO MAKING OF · Organizador: index.html?tarea=mkof/01</a:t>
             </a:r>
           </a:p>
         </p:txBody>
@@ -3388,7 +3381,7 @@
               </a:defRPr>
             </a:pPr>
             <a:r>
-              <a:t>Paso 7 de 12 · Fase C</a:t>
+              <a:t>Día 6 · lun 13 jul</a:t>
             </a:r>
           </a:p>
         </p:txBody>
@@ -3423,7 +3416,7 @@
               </a:defRPr>
             </a:pPr>
             <a:r>
-              <a:t>Token de sesión propio (cookie)</a:t>
+              <a:t>Migrar resto + quitar JWT</a:t>
             </a:r>
           </a:p>
         </p:txBody>
@@ -3475,7 +3468,7 @@
               </a:defRPr>
             </a:pPr>
             <a:r>
-              <a:t>7</a:t>
+              <a:t>6</a:t>
             </a:r>
           </a:p>
         </p:txBody>
@@ -3488,8 +3481,8 @@
         </p:nvSpPr>
         <p:spPr>
           <a:xfrm>
-            <a:off x="1143000" y="1143000"/>
-            <a:ext cx="10058400" cy="457200"/>
+            <a:off x="1143000" y="1188720"/>
+            <a:ext cx="9144000" cy="457200"/>
           </a:xfrm>
           <a:prstGeom prst="rect">
             <a:avLst/>
@@ -3510,7 +3503,7 @@
               </a:defRPr>
             </a:pPr>
             <a:r>
-              <a:t>Token de sesión propio (cookie)</a:t>
+              <a:t>Migrar resto + quitar JWT</a:t>
             </a:r>
           </a:p>
         </p:txBody>
@@ -3523,8 +3516,8 @@
         </p:nvSpPr>
         <p:spPr>
           <a:xfrm>
-            <a:off x="685800" y="1691640"/>
-            <a:ext cx="5669280" cy="1463040"/>
+            <a:off x="685800" y="1783080"/>
+            <a:ext cx="10515600" cy="1097280"/>
           </a:xfrm>
           <a:prstGeom prst="rect">
             <a:avLst/>
@@ -3545,7 +3538,7 @@
               </a:defRPr>
             </a:pPr>
             <a:r>
-              <a:t>session_start con cookie httpOnly + Secure. El navegador envía la cookie sola.</a:t>
+              <a:t>Un módulo a la vez. Eliminar validación duplicada y localStorage con tokens.</a:t>
             </a:r>
           </a:p>
         </p:txBody>
@@ -3558,8 +3551,8 @@
         </p:nvSpPr>
         <p:spPr>
           <a:xfrm>
-            <a:off x="6583680" y="1691640"/>
-            <a:ext cx="5029200" cy="914400"/>
+            <a:off x="640080" y="2971800"/>
+            <a:ext cx="10789920" cy="685800"/>
           </a:xfrm>
           <a:prstGeom prst="roundRect">
             <a:avLst/>
@@ -3603,8 +3596,8 @@
         </p:nvSpPr>
         <p:spPr>
           <a:xfrm>
-            <a:off x="6766560" y="1828800"/>
-            <a:ext cx="4663440" cy="685800"/>
+            <a:off x="822960" y="3108960"/>
+            <a:ext cx="10424160" cy="457200"/>
           </a:xfrm>
           <a:prstGeom prst="rect">
             <a:avLst/>
@@ -3625,53 +3618,43 @@
               </a:defRPr>
             </a:pPr>
             <a:r>
-              <a:t>👆 DevTools → Cookie HttpOnly ✓ — sin JWT en localStorage</a:t>
-            </a:r>
-          </a:p>
-        </p:txBody>
-      </p:sp>
-      <p:sp>
-        <p:nvSpPr>
-          <p:cNvPr id="10" name="Rounded Rectangle 9"/>
-          <p:cNvSpPr/>
-          <p:nvPr/>
-        </p:nvSpPr>
-        <p:spPr>
-          <a:xfrm>
-            <a:off x="640080" y="3337560"/>
-            <a:ext cx="10972800" cy="822960"/>
-          </a:xfrm>
-          <a:prstGeom prst="roundRect">
-            <a:avLst/>
-          </a:prstGeom>
-          <a:solidFill>
-            <a:srgbClr val="F6F8FA"/>
-          </a:solidFill>
-          <a:ln>
-            <a:solidFill>
-              <a:srgbClr val="D0D7DE"/>
-            </a:solidFill>
-          </a:ln>
-        </p:spPr>
-        <p:style>
-          <a:lnRef idx="1">
-            <a:schemeClr val="accent1"/>
-          </a:lnRef>
-          <a:fillRef idx="3">
-            <a:schemeClr val="accent1"/>
-          </a:fillRef>
-          <a:effectRef idx="2">
-            <a:schemeClr val="accent1"/>
-          </a:effectRef>
-          <a:fontRef idx="minor">
-            <a:schemeClr val="lt1"/>
-          </a:fontRef>
-        </p:style>
-        <p:txBody>
-          <a:bodyPr rtlCol="0" anchor="ctr"/>
-          <a:lstStyle/>
-          <a:p>
-            <a:pPr algn="ctr"/>
+              <a:t>👆 Sin bucles redirect infinito</a:t>
+            </a:r>
+          </a:p>
+        </p:txBody>
+      </p:sp>
+      <p:sp>
+        <p:nvSpPr>
+          <p:cNvPr id="10" name="TextBox 9"/>
+          <p:cNvSpPr txBox="1"/>
+          <p:nvPr/>
+        </p:nvSpPr>
+        <p:spPr>
+          <a:xfrm>
+            <a:off x="685800" y="3794760"/>
+            <a:ext cx="10515600" cy="365760"/>
+          </a:xfrm>
+          <a:prstGeom prst="rect">
+            <a:avLst/>
+          </a:prstGeom>
+          <a:noFill/>
+        </p:spPr>
+        <p:txBody>
+          <a:bodyPr wrap="square">
+            <a:spAutoFit/>
+          </a:bodyPr>
+          <a:lstStyle/>
+          <a:p>
+            <a:pPr algn="l">
+              <a:defRPr sz="1400" b="1">
+                <a:solidFill>
+                  <a:srgbClr val="1A7F37"/>
+                </a:solidFill>
+              </a:defRPr>
+            </a:pPr>
+            <a:r>
+              <a:t>Entregable: Entregable: todos los M con guard.php</a:t>
+            </a:r>
           </a:p>
         </p:txBody>
       </p:sp>
@@ -3683,8 +3666,8 @@
         </p:nvSpPr>
         <p:spPr>
           <a:xfrm>
-            <a:off x="822960" y="3474720"/>
-            <a:ext cx="10607040" cy="594360"/>
+            <a:off x="868680" y="4251960"/>
+            <a:ext cx="10058400" cy="320040"/>
           </a:xfrm>
           <a:prstGeom prst="rect">
             <a:avLst/>
@@ -3700,12 +3683,12 @@
             <a:pPr algn="l">
               <a:defRPr sz="1300" b="0">
                 <a:solidFill>
-                  <a:srgbClr val="656D76"/>
-                </a:solidFill>
-              </a:defRPr>
-            </a:pPr>
-            <a:r>
-              <a:t>💡 Tip: Requiere HTTPS (Cloudflare SSL Full).</a:t>
+                  <a:srgbClr val="1F2328"/>
+                </a:solidFill>
+              </a:defRPr>
+            </a:pPr>
+            <a:r>
+              <a:t>☐  Inventario 100% migrado</a:t>
             </a:r>
           </a:p>
         </p:txBody>
@@ -3718,29 +3701,29 @@
         </p:nvSpPr>
         <p:spPr>
           <a:xfrm>
-            <a:off x="685800" y="4343400"/>
-            <a:ext cx="10515600" cy="320040"/>
-          </a:xfrm>
-          <a:prstGeom prst="rect">
-            <a:avLst/>
-          </a:prstGeom>
-          <a:noFill/>
-        </p:spPr>
-        <p:txBody>
-          <a:bodyPr wrap="square">
-            <a:spAutoFit/>
-          </a:bodyPr>
-          <a:lstStyle/>
-          <a:p>
-            <a:pPr algn="l">
-              <a:defRPr sz="1400" b="1">
-                <a:solidFill>
-                  <a:srgbClr val="4A7A80"/>
-                </a:solidFill>
-              </a:defRPr>
-            </a:pPr>
-            <a:r>
-              <a:t>Checklist de este paso:</a:t>
+            <a:off x="868680" y="4599432"/>
+            <a:ext cx="10058400" cy="320040"/>
+          </a:xfrm>
+          <a:prstGeom prst="rect">
+            <a:avLst/>
+          </a:prstGeom>
+          <a:noFill/>
+        </p:spPr>
+        <p:txBody>
+          <a:bodyPr wrap="square">
+            <a:spAutoFit/>
+          </a:bodyPr>
+          <a:lstStyle/>
+          <a:p>
+            <a:pPr algn="l">
+              <a:defRPr sz="1300" b="0">
+                <a:solidFill>
+                  <a:srgbClr val="1F2328"/>
+                </a:solidFill>
+              </a:defRPr>
+            </a:pPr>
+            <a:r>
+              <a:t>☐  localStorage limpio</a:t>
             </a:r>
           </a:p>
         </p:txBody>
@@ -3753,7 +3736,7 @@
         </p:nvSpPr>
         <p:spPr>
           <a:xfrm>
-            <a:off x="868680" y="4709160"/>
+            <a:off x="868680" y="4946904"/>
             <a:ext cx="10058400" cy="320040"/>
           </a:xfrm>
           <a:prstGeom prst="rect">
@@ -3775,77 +3758,7 @@
               </a:defRPr>
             </a:pPr>
             <a:r>
-              <a:t>☐  Cookie HttpOnly activa</a:t>
-            </a:r>
-          </a:p>
-        </p:txBody>
-      </p:sp>
-      <p:sp>
-        <p:nvSpPr>
-          <p:cNvPr id="14" name="TextBox 13"/>
-          <p:cNvSpPr txBox="1"/>
-          <p:nvPr/>
-        </p:nvSpPr>
-        <p:spPr>
-          <a:xfrm>
-            <a:off x="868680" y="5056632"/>
-            <a:ext cx="10058400" cy="320040"/>
-          </a:xfrm>
-          <a:prstGeom prst="rect">
-            <a:avLst/>
-          </a:prstGeom>
-          <a:noFill/>
-        </p:spPr>
-        <p:txBody>
-          <a:bodyPr wrap="square">
-            <a:spAutoFit/>
-          </a:bodyPr>
-          <a:lstStyle/>
-          <a:p>
-            <a:pPr algn="l">
-              <a:defRPr sz="1300" b="0">
-                <a:solidFill>
-                  <a:srgbClr val="1F2328"/>
-                </a:solidFill>
-              </a:defRPr>
-            </a:pPr>
-            <a:r>
-              <a:t>☐  Sin JWT en localStorage</a:t>
-            </a:r>
-          </a:p>
-        </p:txBody>
-      </p:sp>
-      <p:sp>
-        <p:nvSpPr>
-          <p:cNvPr id="15" name="TextBox 14"/>
-          <p:cNvSpPr txBox="1"/>
-          <p:nvPr/>
-        </p:nvSpPr>
-        <p:spPr>
-          <a:xfrm>
-            <a:off x="868680" y="5404104"/>
-            <a:ext cx="10058400" cy="320040"/>
-          </a:xfrm>
-          <a:prstGeom prst="rect">
-            <a:avLst/>
-          </a:prstGeom>
-          <a:noFill/>
-        </p:spPr>
-        <p:txBody>
-          <a:bodyPr wrap="square">
-            <a:spAutoFit/>
-          </a:bodyPr>
-          <a:lstStyle/>
-          <a:p>
-            <a:pPr algn="l">
-              <a:defRPr sz="1300" b="0">
-                <a:solidFill>
-                  <a:srgbClr val="1F2328"/>
-                </a:solidFill>
-              </a:defRPr>
-            </a:pPr>
-            <a:r>
-              <a:t>☐  Sesión persiste al recargar</a:t>
+              <a:t>☐  Sin regresiones</a:t>
             </a:r>
           </a:p>
         </p:txBody>
@@ -3949,7 +3862,7 @@
               </a:defRPr>
             </a:pPr>
             <a:r>
-              <a:t>Paso 8 de 12 · Fase C</a:t>
+              <a:t>Día 7 · mar 14 jul</a:t>
             </a:r>
           </a:p>
         </p:txBody>
@@ -3984,7 +3897,7 @@
               </a:defRPr>
             </a:pPr>
             <a:r>
-              <a:t>Endpoint validate.php</a:t>
+              <a:t>Pruebas y cierre 2.1 + 2.2</a:t>
             </a:r>
           </a:p>
         </p:txBody>
@@ -4036,7 +3949,7 @@
               </a:defRPr>
             </a:pPr>
             <a:r>
-              <a:t>8</a:t>
+              <a:t>7</a:t>
             </a:r>
           </a:p>
         </p:txBody>
@@ -4049,8 +3962,8 @@
         </p:nvSpPr>
         <p:spPr>
           <a:xfrm>
-            <a:off x="1143000" y="1143000"/>
-            <a:ext cx="10058400" cy="457200"/>
+            <a:off x="1143000" y="1188720"/>
+            <a:ext cx="9144000" cy="457200"/>
           </a:xfrm>
           <a:prstGeom prst="rect">
             <a:avLst/>
@@ -4071,7 +3984,7 @@
               </a:defRPr>
             </a:pPr>
             <a:r>
-              <a:t>Endpoint validate.php</a:t>
+              <a:t>Pruebas y cierre 2.1 + 2.2</a:t>
             </a:r>
           </a:p>
         </p:txBody>
@@ -4084,8 +3997,8 @@
         </p:nvSpPr>
         <p:spPr>
           <a:xfrm>
-            <a:off x="685800" y="1691640"/>
-            <a:ext cx="5669280" cy="1463040"/>
+            <a:off x="685800" y="1783080"/>
+            <a:ext cx="10515600" cy="1097280"/>
           </a:xfrm>
           <a:prstGeom prst="rect">
             <a:avLst/>
@@ -4106,7 +4019,7 @@
               </a:defRPr>
             </a:pPr>
             <a:r>
-              <a:t>JSON { ok, usuario, permisos } si sesión válida. AJAX con credentials: include.</a:t>
+              <a:t>Por módulo: sin login→redirect, con login→entra, logout, incógnito. Actualizar ficha MOVA.</a:t>
             </a:r>
           </a:p>
         </p:txBody>
@@ -4119,8 +4032,8 @@
         </p:nvSpPr>
         <p:spPr>
           <a:xfrm>
-            <a:off x="6583680" y="1691640"/>
-            <a:ext cx="5029200" cy="914400"/>
+            <a:off x="640080" y="2971800"/>
+            <a:ext cx="10789920" cy="685800"/>
           </a:xfrm>
           <a:prstGeom prst="roundRect">
             <a:avLst/>
@@ -4164,8 +4077,8 @@
         </p:nvSpPr>
         <p:spPr>
           <a:xfrm>
-            <a:off x="6766560" y="1828800"/>
-            <a:ext cx="4663440" cy="685800"/>
+            <a:off x="822960" y="3108960"/>
+            <a:ext cx="10424160" cy="457200"/>
           </a:xfrm>
           <a:prstGeom prst="rect">
             <a:avLst/>
@@ -4186,53 +4099,43 @@
               </a:defRPr>
             </a:pPr>
             <a:r>
-              <a:t>👆 Cada petición AJAX → validate.php primero</a:t>
-            </a:r>
-          </a:p>
-        </p:txBody>
-      </p:sp>
-      <p:sp>
-        <p:nvSpPr>
-          <p:cNvPr id="10" name="Rounded Rectangle 9"/>
-          <p:cNvSpPr/>
-          <p:nvPr/>
-        </p:nvSpPr>
-        <p:spPr>
-          <a:xfrm>
-            <a:off x="640080" y="3337560"/>
-            <a:ext cx="10972800" cy="822960"/>
-          </a:xfrm>
-          <a:prstGeom prst="roundRect">
-            <a:avLst/>
-          </a:prstGeom>
-          <a:solidFill>
-            <a:srgbClr val="F6F8FA"/>
-          </a:solidFill>
-          <a:ln>
-            <a:solidFill>
-              <a:srgbClr val="D0D7DE"/>
-            </a:solidFill>
-          </a:ln>
-        </p:spPr>
-        <p:style>
-          <a:lnRef idx="1">
-            <a:schemeClr val="accent1"/>
-          </a:lnRef>
-          <a:fillRef idx="3">
-            <a:schemeClr val="accent1"/>
-          </a:fillRef>
-          <a:effectRef idx="2">
-            <a:schemeClr val="accent1"/>
-          </a:effectRef>
-          <a:fontRef idx="minor">
-            <a:schemeClr val="lt1"/>
-          </a:fontRef>
-        </p:style>
-        <p:txBody>
-          <a:bodyPr rtlCol="0" anchor="ctr"/>
-          <a:lstStyle/>
-          <a:p>
-            <a:pPr algn="ctr"/>
+              <a:t>👆 Cerrar hitos en Gantt</a:t>
+            </a:r>
+          </a:p>
+        </p:txBody>
+      </p:sp>
+      <p:sp>
+        <p:nvSpPr>
+          <p:cNvPr id="10" name="TextBox 9"/>
+          <p:cNvSpPr txBox="1"/>
+          <p:nvPr/>
+        </p:nvSpPr>
+        <p:spPr>
+          <a:xfrm>
+            <a:off x="685800" y="3794760"/>
+            <a:ext cx="10515600" cy="365760"/>
+          </a:xfrm>
+          <a:prstGeom prst="rect">
+            <a:avLst/>
+          </a:prstGeom>
+          <a:noFill/>
+        </p:spPr>
+        <p:txBody>
+          <a:bodyPr wrap="square">
+            <a:spAutoFit/>
+          </a:bodyPr>
+          <a:lstStyle/>
+          <a:p>
+            <a:pPr algn="l">
+              <a:defRPr sz="1400" b="1">
+                <a:solidFill>
+                  <a:srgbClr val="1A7F37"/>
+                </a:solidFill>
+              </a:defRPr>
+            </a:pPr>
+            <a:r>
+              <a:t>Entregable: Entregable: mova_auth operativo documentado</a:t>
+            </a:r>
           </a:p>
         </p:txBody>
       </p:sp>
@@ -4244,8 +4147,8 @@
         </p:nvSpPr>
         <p:spPr>
           <a:xfrm>
-            <a:off x="822960" y="3474720"/>
-            <a:ext cx="10607040" cy="594360"/>
+            <a:off x="868680" y="4251960"/>
+            <a:ext cx="10058400" cy="320040"/>
           </a:xfrm>
           <a:prstGeom prst="rect">
             <a:avLst/>
@@ -4261,12 +4164,12 @@
             <a:pPr algn="l">
               <a:defRPr sz="1300" b="0">
                 <a:solidFill>
-                  <a:srgbClr val="656D76"/>
-                </a:solidFill>
-              </a:defRPr>
-            </a:pPr>
-            <a:r>
-              <a:t>💡 Tip: 401 sin sesión; 200 con datos de usuario.</a:t>
+                  <a:srgbClr val="1F2328"/>
+                </a:solidFill>
+              </a:defRPr>
+            </a:pPr>
+            <a:r>
+              <a:t>☐  4 pruebas/módulo OK</a:t>
             </a:r>
           </a:p>
         </p:txBody>
@@ -4279,29 +4182,29 @@
         </p:nvSpPr>
         <p:spPr>
           <a:xfrm>
-            <a:off x="685800" y="4343400"/>
-            <a:ext cx="10515600" cy="320040"/>
-          </a:xfrm>
-          <a:prstGeom prst="rect">
-            <a:avLst/>
-          </a:prstGeom>
-          <a:noFill/>
-        </p:spPr>
-        <p:txBody>
-          <a:bodyPr wrap="square">
-            <a:spAutoFit/>
-          </a:bodyPr>
-          <a:lstStyle/>
-          <a:p>
-            <a:pPr algn="l">
-              <a:defRPr sz="1400" b="1">
-                <a:solidFill>
-                  <a:srgbClr val="4A7A80"/>
-                </a:solidFill>
-              </a:defRPr>
-            </a:pPr>
-            <a:r>
-              <a:t>Checklist de este paso:</a:t>
+            <a:off x="868680" y="4599432"/>
+            <a:ext cx="10058400" cy="320040"/>
+          </a:xfrm>
+          <a:prstGeom prst="rect">
+            <a:avLst/>
+          </a:prstGeom>
+          <a:noFill/>
+        </p:spPr>
+        <p:txBody>
+          <a:bodyPr wrap="square">
+            <a:spAutoFit/>
+          </a:bodyPr>
+          <a:lstStyle/>
+          <a:p>
+            <a:pPr algn="l">
+              <a:defRPr sz="1300" b="0">
+                <a:solidFill>
+                  <a:srgbClr val="1F2328"/>
+                </a:solidFill>
+              </a:defRPr>
+            </a:pPr>
+            <a:r>
+              <a:t>☐  Ficha MOVA actualizada</a:t>
             </a:r>
           </a:p>
         </p:txBody>
@@ -4314,7 +4217,7 @@
         </p:nvSpPr>
         <p:spPr>
           <a:xfrm>
-            <a:off x="868680" y="4709160"/>
+            <a:off x="868680" y="4946904"/>
             <a:ext cx="10058400" cy="320040"/>
           </a:xfrm>
           <a:prstGeom prst="rect">
@@ -4336,77 +4239,7 @@
               </a:defRPr>
             </a:pPr>
             <a:r>
-              <a:t>☐  validate.php 200 con sesión</a:t>
-            </a:r>
-          </a:p>
-        </p:txBody>
-      </p:sp>
-      <p:sp>
-        <p:nvSpPr>
-          <p:cNvPr id="14" name="TextBox 13"/>
-          <p:cNvSpPr txBox="1"/>
-          <p:nvPr/>
-        </p:nvSpPr>
-        <p:spPr>
-          <a:xfrm>
-            <a:off x="868680" y="5056632"/>
-            <a:ext cx="10058400" cy="320040"/>
-          </a:xfrm>
-          <a:prstGeom prst="rect">
-            <a:avLst/>
-          </a:prstGeom>
-          <a:noFill/>
-        </p:spPr>
-        <p:txBody>
-          <a:bodyPr wrap="square">
-            <a:spAutoFit/>
-          </a:bodyPr>
-          <a:lstStyle/>
-          <a:p>
-            <a:pPr algn="l">
-              <a:defRPr sz="1300" b="0">
-                <a:solidFill>
-                  <a:srgbClr val="1F2328"/>
-                </a:solidFill>
-              </a:defRPr>
-            </a:pPr>
-            <a:r>
-              <a:t>☐  401 sin sesión</a:t>
-            </a:r>
-          </a:p>
-        </p:txBody>
-      </p:sp>
-      <p:sp>
-        <p:nvSpPr>
-          <p:cNvPr id="15" name="TextBox 14"/>
-          <p:cNvSpPr txBox="1"/>
-          <p:nvPr/>
-        </p:nvSpPr>
-        <p:spPr>
-          <a:xfrm>
-            <a:off x="868680" y="5404104"/>
-            <a:ext cx="10058400" cy="320040"/>
-          </a:xfrm>
-          <a:prstGeom prst="rect">
-            <a:avLst/>
-          </a:prstGeom>
-          <a:noFill/>
-        </p:spPr>
-        <p:txBody>
-          <a:bodyPr wrap="square">
-            <a:spAutoFit/>
-          </a:bodyPr>
-          <a:lstStyle/>
-          <a:p>
-            <a:pPr algn="l">
-              <a:defRPr sz="1300" b="0">
-                <a:solidFill>
-                  <a:srgbClr val="1F2328"/>
-                </a:solidFill>
-              </a:defRPr>
-            </a:pPr>
-            <a:r>
-              <a:t>☐  Permisos por rol correctos</a:t>
+              <a:t>☐  Hitos 2.1 y 2.2 cerrados</a:t>
             </a:r>
           </a:p>
         </p:txBody>
@@ -4420,3703 +4253,6 @@
 </file>
 
 <file path=ppt/slides/slide12.xml><?xml version="1.0" encoding="utf-8"?>
-<p:sld xmlns:a="http://schemas.openxmlformats.org/drawingml/2006/main" xmlns:p="http://schemas.openxmlformats.org/presentationml/2006/main" xmlns:r="http://schemas.openxmlformats.org/officeDocument/2006/relationships">
-  <p:cSld>
-    <p:bg>
-      <p:bgPr>
-        <a:solidFill>
-          <a:srgbClr val="E8F6F8"/>
-        </a:solidFill>
-        <a:effectLst/>
-      </p:bgPr>
-    </p:bg>
-    <p:spTree>
-      <p:nvGrpSpPr>
-        <p:cNvPr id="1" name=""/>
-        <p:cNvGrpSpPr/>
-        <p:nvPr/>
-      </p:nvGrpSpPr>
-      <p:grpSpPr/>
-      <p:sp>
-        <p:nvSpPr>
-          <p:cNvPr id="2" name="Rectangle 1"/>
-          <p:cNvSpPr/>
-          <p:nvPr/>
-        </p:nvSpPr>
-        <p:spPr>
-          <a:xfrm>
-            <a:off x="0" y="0"/>
-            <a:ext cx="12191695" cy="960120"/>
-          </a:xfrm>
-          <a:prstGeom prst="rect">
-            <a:avLst/>
-          </a:prstGeom>
-          <a:solidFill>
-            <a:srgbClr val="4A7A80"/>
-          </a:solidFill>
-          <a:ln>
-            <a:noFill/>
-          </a:ln>
-        </p:spPr>
-        <p:style>
-          <a:lnRef idx="1">
-            <a:schemeClr val="accent1"/>
-          </a:lnRef>
-          <a:fillRef idx="3">
-            <a:schemeClr val="accent1"/>
-          </a:fillRef>
-          <a:effectRef idx="2">
-            <a:schemeClr val="accent1"/>
-          </a:effectRef>
-          <a:fontRef idx="minor">
-            <a:schemeClr val="lt1"/>
-          </a:fontRef>
-        </p:style>
-        <p:txBody>
-          <a:bodyPr rtlCol="0" anchor="ctr"/>
-          <a:lstStyle/>
-          <a:p>
-            <a:pPr algn="ctr"/>
-          </a:p>
-        </p:txBody>
-      </p:sp>
-      <p:sp>
-        <p:nvSpPr>
-          <p:cNvPr id="3" name="TextBox 2"/>
-          <p:cNvSpPr txBox="1"/>
-          <p:nvPr/>
-        </p:nvSpPr>
-        <p:spPr>
-          <a:xfrm>
-            <a:off x="502920" y="164592"/>
-            <a:ext cx="10058400" cy="457200"/>
-          </a:xfrm>
-          <a:prstGeom prst="rect">
-            <a:avLst/>
-          </a:prstGeom>
-          <a:noFill/>
-        </p:spPr>
-        <p:txBody>
-          <a:bodyPr wrap="square">
-            <a:spAutoFit/>
-          </a:bodyPr>
-          <a:lstStyle/>
-          <a:p>
-            <a:pPr algn="l">
-              <a:defRPr sz="2400" b="1">
-                <a:solidFill>
-                  <a:srgbClr val="FFFFFF"/>
-                </a:solidFill>
-              </a:defRPr>
-            </a:pPr>
-            <a:r>
-              <a:t>Paso 9 de 12 · Fase C</a:t>
-            </a:r>
-          </a:p>
-        </p:txBody>
-      </p:sp>
-      <p:sp>
-        <p:nvSpPr>
-          <p:cNvPr id="4" name="TextBox 3"/>
-          <p:cNvSpPr txBox="1"/>
-          <p:nvPr/>
-        </p:nvSpPr>
-        <p:spPr>
-          <a:xfrm>
-            <a:off x="502920" y="566928"/>
-            <a:ext cx="10058400" cy="320040"/>
-          </a:xfrm>
-          <a:prstGeom prst="rect">
-            <a:avLst/>
-          </a:prstGeom>
-          <a:noFill/>
-        </p:spPr>
-        <p:txBody>
-          <a:bodyPr wrap="square">
-            <a:spAutoFit/>
-          </a:bodyPr>
-          <a:lstStyle/>
-          <a:p>
-            <a:pPr algn="l">
-              <a:defRPr sz="1300" b="0">
-                <a:solidFill>
-                  <a:srgbClr val="E8F6F8"/>
-                </a:solidFill>
-              </a:defRPr>
-            </a:pPr>
-            <a:r>
-              <a:t>Migrar módulos uno por uno</a:t>
-            </a:r>
-          </a:p>
-        </p:txBody>
-      </p:sp>
-      <p:sp>
-        <p:nvSpPr>
-          <p:cNvPr id="5" name="Oval 4"/>
-          <p:cNvSpPr/>
-          <p:nvPr/>
-        </p:nvSpPr>
-        <p:spPr>
-          <a:xfrm>
-            <a:off x="502920" y="1234440"/>
-            <a:ext cx="502920" cy="502920"/>
-          </a:xfrm>
-          <a:prstGeom prst="ellipse">
-            <a:avLst/>
-          </a:prstGeom>
-          <a:solidFill>
-            <a:srgbClr val="4A7A80"/>
-          </a:solidFill>
-          <a:ln>
-            <a:noFill/>
-          </a:ln>
-        </p:spPr>
-        <p:style>
-          <a:lnRef idx="1">
-            <a:schemeClr val="accent1"/>
-          </a:lnRef>
-          <a:fillRef idx="3">
-            <a:schemeClr val="accent1"/>
-          </a:fillRef>
-          <a:effectRef idx="2">
-            <a:schemeClr val="accent1"/>
-          </a:effectRef>
-          <a:fontRef idx="minor">
-            <a:schemeClr val="lt1"/>
-          </a:fontRef>
-        </p:style>
-        <p:txBody>
-          <a:bodyPr rtlCol="0" anchor="ctr"/>
-          <a:lstStyle/>
-          <a:p>
-            <a:pPr algn="ctr">
-              <a:defRPr sz="2000" b="1">
-                <a:solidFill>
-                  <a:srgbClr val="FFFFFF"/>
-                </a:solidFill>
-              </a:defRPr>
-            </a:pPr>
-            <a:r>
-              <a:t>9</a:t>
-            </a:r>
-          </a:p>
-        </p:txBody>
-      </p:sp>
-      <p:sp>
-        <p:nvSpPr>
-          <p:cNvPr id="6" name="TextBox 5"/>
-          <p:cNvSpPr txBox="1"/>
-          <p:nvPr/>
-        </p:nvSpPr>
-        <p:spPr>
-          <a:xfrm>
-            <a:off x="1143000" y="1143000"/>
-            <a:ext cx="10058400" cy="457200"/>
-          </a:xfrm>
-          <a:prstGeom prst="rect">
-            <a:avLst/>
-          </a:prstGeom>
-          <a:noFill/>
-        </p:spPr>
-        <p:txBody>
-          <a:bodyPr wrap="square">
-            <a:spAutoFit/>
-          </a:bodyPr>
-          <a:lstStyle/>
-          <a:p>
-            <a:pPr algn="l">
-              <a:defRPr sz="2200" b="1">
-                <a:solidFill>
-                  <a:srgbClr val="2A4A4E"/>
-                </a:solidFill>
-              </a:defRPr>
-            </a:pPr>
-            <a:r>
-              <a:t>Migrar módulos uno por uno</a:t>
-            </a:r>
-          </a:p>
-        </p:txBody>
-      </p:sp>
-      <p:sp>
-        <p:nvSpPr>
-          <p:cNvPr id="7" name="TextBox 6"/>
-          <p:cNvSpPr txBox="1"/>
-          <p:nvPr/>
-        </p:nvSpPr>
-        <p:spPr>
-          <a:xfrm>
-            <a:off x="685800" y="1691640"/>
-            <a:ext cx="5669280" cy="1463040"/>
-          </a:xfrm>
-          <a:prstGeom prst="rect">
-            <a:avLst/>
-          </a:prstGeom>
-          <a:noFill/>
-        </p:spPr>
-        <p:txBody>
-          <a:bodyPr wrap="square">
-            <a:spAutoFit/>
-          </a:bodyPr>
-          <a:lstStyle/>
-          <a:p>
-            <a:pPr algn="l">
-              <a:defRPr sz="1600" b="0">
-                <a:solidFill>
-                  <a:srgbClr val="1F2328"/>
-                </a:solidFill>
-              </a:defRPr>
-            </a:pPr>
-            <a:r>
-              <a:t>Orden: sandbox primero, luego el resto. require guard.php al inicio de cada index.php.</a:t>
-            </a:r>
-          </a:p>
-        </p:txBody>
-      </p:sp>
-      <p:sp>
-        <p:nvSpPr>
-          <p:cNvPr id="8" name="Rounded Rectangle 7"/>
-          <p:cNvSpPr/>
-          <p:nvPr/>
-        </p:nvSpPr>
-        <p:spPr>
-          <a:xfrm>
-            <a:off x="6583680" y="1691640"/>
-            <a:ext cx="5029200" cy="914400"/>
-          </a:xfrm>
-          <a:prstGeom prst="roundRect">
-            <a:avLst/>
-          </a:prstGeom>
-          <a:solidFill>
-            <a:srgbClr val="FFF8C5"/>
-          </a:solidFill>
-          <a:ln>
-            <a:solidFill>
-              <a:srgbClr val="D4A72C"/>
-            </a:solidFill>
-          </a:ln>
-        </p:spPr>
-        <p:style>
-          <a:lnRef idx="1">
-            <a:schemeClr val="accent1"/>
-          </a:lnRef>
-          <a:fillRef idx="3">
-            <a:schemeClr val="accent1"/>
-          </a:fillRef>
-          <a:effectRef idx="2">
-            <a:schemeClr val="accent1"/>
-          </a:effectRef>
-          <a:fontRef idx="minor">
-            <a:schemeClr val="lt1"/>
-          </a:fontRef>
-        </p:style>
-        <p:txBody>
-          <a:bodyPr rtlCol="0" anchor="ctr"/>
-          <a:lstStyle/>
-          <a:p>
-            <a:pPr algn="ctr"/>
-          </a:p>
-        </p:txBody>
-      </p:sp>
-      <p:sp>
-        <p:nvSpPr>
-          <p:cNvPr id="9" name="TextBox 8"/>
-          <p:cNvSpPr txBox="1"/>
-          <p:nvPr/>
-        </p:nvSpPr>
-        <p:spPr>
-          <a:xfrm>
-            <a:off x="6766560" y="1828800"/>
-            <a:ext cx="4663440" cy="685800"/>
-          </a:xfrm>
-          <a:prstGeom prst="rect">
-            <a:avLst/>
-          </a:prstGeom>
-          <a:noFill/>
-        </p:spPr>
-        <p:txBody>
-          <a:bodyPr wrap="square">
-            <a:spAutoFit/>
-          </a:bodyPr>
-          <a:lstStyle/>
-          <a:p>
-            <a:pPr algn="l">
-              <a:defRPr sz="1300" b="1">
-                <a:solidFill>
-                  <a:srgbClr val="2A4A4E"/>
-                </a:solidFill>
-              </a:defRPr>
-            </a:pPr>
-            <a:r>
-              <a:t>👆 Un módulo a la vez — probar antes del siguiente</a:t>
-            </a:r>
-          </a:p>
-        </p:txBody>
-      </p:sp>
-      <p:sp>
-        <p:nvSpPr>
-          <p:cNvPr id="10" name="Rounded Rectangle 9"/>
-          <p:cNvSpPr/>
-          <p:nvPr/>
-        </p:nvSpPr>
-        <p:spPr>
-          <a:xfrm>
-            <a:off x="640080" y="3337560"/>
-            <a:ext cx="10972800" cy="822960"/>
-          </a:xfrm>
-          <a:prstGeom prst="roundRect">
-            <a:avLst/>
-          </a:prstGeom>
-          <a:solidFill>
-            <a:srgbClr val="F6F8FA"/>
-          </a:solidFill>
-          <a:ln>
-            <a:solidFill>
-              <a:srgbClr val="D0D7DE"/>
-            </a:solidFill>
-          </a:ln>
-        </p:spPr>
-        <p:style>
-          <a:lnRef idx="1">
-            <a:schemeClr val="accent1"/>
-          </a:lnRef>
-          <a:fillRef idx="3">
-            <a:schemeClr val="accent1"/>
-          </a:fillRef>
-          <a:effectRef idx="2">
-            <a:schemeClr val="accent1"/>
-          </a:effectRef>
-          <a:fontRef idx="minor">
-            <a:schemeClr val="lt1"/>
-          </a:fontRef>
-        </p:style>
-        <p:txBody>
-          <a:bodyPr rtlCol="0" anchor="ctr"/>
-          <a:lstStyle/>
-          <a:p>
-            <a:pPr algn="ctr"/>
-          </a:p>
-        </p:txBody>
-      </p:sp>
-      <p:sp>
-        <p:nvSpPr>
-          <p:cNvPr id="11" name="TextBox 10"/>
-          <p:cNvSpPr txBox="1"/>
-          <p:nvPr/>
-        </p:nvSpPr>
-        <p:spPr>
-          <a:xfrm>
-            <a:off x="822960" y="3474720"/>
-            <a:ext cx="10607040" cy="594360"/>
-          </a:xfrm>
-          <a:prstGeom prst="rect">
-            <a:avLst/>
-          </a:prstGeom>
-          <a:noFill/>
-        </p:spPr>
-        <p:txBody>
-          <a:bodyPr wrap="square">
-            <a:spAutoFit/>
-          </a:bodyPr>
-          <a:lstStyle/>
-          <a:p>
-            <a:pPr algn="l">
-              <a:defRPr sz="1300" b="0">
-                <a:solidFill>
-                  <a:srgbClr val="656D76"/>
-                </a:solidFill>
-              </a:defRPr>
-            </a:pPr>
-            <a:r>
-              <a:t>💡 Tip: Eliminar validación duplicada del módulo al migrar.</a:t>
-            </a:r>
-          </a:p>
-        </p:txBody>
-      </p:sp>
-      <p:sp>
-        <p:nvSpPr>
-          <p:cNvPr id="12" name="TextBox 11"/>
-          <p:cNvSpPr txBox="1"/>
-          <p:nvPr/>
-        </p:nvSpPr>
-        <p:spPr>
-          <a:xfrm>
-            <a:off x="685800" y="4343400"/>
-            <a:ext cx="10515600" cy="320040"/>
-          </a:xfrm>
-          <a:prstGeom prst="rect">
-            <a:avLst/>
-          </a:prstGeom>
-          <a:noFill/>
-        </p:spPr>
-        <p:txBody>
-          <a:bodyPr wrap="square">
-            <a:spAutoFit/>
-          </a:bodyPr>
-          <a:lstStyle/>
-          <a:p>
-            <a:pPr algn="l">
-              <a:defRPr sz="1400" b="1">
-                <a:solidFill>
-                  <a:srgbClr val="4A7A80"/>
-                </a:solidFill>
-              </a:defRPr>
-            </a:pPr>
-            <a:r>
-              <a:t>Checklist de este paso:</a:t>
-            </a:r>
-          </a:p>
-        </p:txBody>
-      </p:sp>
-      <p:sp>
-        <p:nvSpPr>
-          <p:cNvPr id="13" name="TextBox 12"/>
-          <p:cNvSpPr txBox="1"/>
-          <p:nvPr/>
-        </p:nvSpPr>
-        <p:spPr>
-          <a:xfrm>
-            <a:off x="868680" y="4709160"/>
-            <a:ext cx="10058400" cy="320040"/>
-          </a:xfrm>
-          <a:prstGeom prst="rect">
-            <a:avLst/>
-          </a:prstGeom>
-          <a:noFill/>
-        </p:spPr>
-        <p:txBody>
-          <a:bodyPr wrap="square">
-            <a:spAutoFit/>
-          </a:bodyPr>
-          <a:lstStyle/>
-          <a:p>
-            <a:pPr algn="l">
-              <a:defRPr sz="1300" b="0">
-                <a:solidFill>
-                  <a:srgbClr val="1F2328"/>
-                </a:solidFill>
-              </a:defRPr>
-            </a:pPr>
-            <a:r>
-              <a:t>☐  Sandbox migrado</a:t>
-            </a:r>
-          </a:p>
-        </p:txBody>
-      </p:sp>
-      <p:sp>
-        <p:nvSpPr>
-          <p:cNvPr id="14" name="TextBox 13"/>
-          <p:cNvSpPr txBox="1"/>
-          <p:nvPr/>
-        </p:nvSpPr>
-        <p:spPr>
-          <a:xfrm>
-            <a:off x="868680" y="5056632"/>
-            <a:ext cx="10058400" cy="320040"/>
-          </a:xfrm>
-          <a:prstGeom prst="rect">
-            <a:avLst/>
-          </a:prstGeom>
-          <a:noFill/>
-        </p:spPr>
-        <p:txBody>
-          <a:bodyPr wrap="square">
-            <a:spAutoFit/>
-          </a:bodyPr>
-          <a:lstStyle/>
-          <a:p>
-            <a:pPr algn="l">
-              <a:defRPr sz="1300" b="0">
-                <a:solidFill>
-                  <a:srgbClr val="1F2328"/>
-                </a:solidFill>
-              </a:defRPr>
-            </a:pPr>
-            <a:r>
-              <a:t>☐  Módulos críticos migrados</a:t>
-            </a:r>
-          </a:p>
-        </p:txBody>
-      </p:sp>
-      <p:sp>
-        <p:nvSpPr>
-          <p:cNvPr id="15" name="TextBox 14"/>
-          <p:cNvSpPr txBox="1"/>
-          <p:nvPr/>
-        </p:nvSpPr>
-        <p:spPr>
-          <a:xfrm>
-            <a:off x="868680" y="5404104"/>
-            <a:ext cx="10058400" cy="320040"/>
-          </a:xfrm>
-          <a:prstGeom prst="rect">
-            <a:avLst/>
-          </a:prstGeom>
-          <a:noFill/>
-        </p:spPr>
-        <p:txBody>
-          <a:bodyPr wrap="square">
-            <a:spAutoFit/>
-          </a:bodyPr>
-          <a:lstStyle/>
-          <a:p>
-            <a:pPr algn="l">
-              <a:defRPr sz="1300" b="0">
-                <a:solidFill>
-                  <a:srgbClr val="1F2328"/>
-                </a:solidFill>
-              </a:defRPr>
-            </a:pPr>
-            <a:r>
-              <a:t>☐  Todos los M usan guard.php</a:t>
-            </a:r>
-          </a:p>
-        </p:txBody>
-      </p:sp>
-    </p:spTree>
-  </p:cSld>
-  <p:clrMapOvr>
-    <a:masterClrMapping/>
-  </p:clrMapOvr>
-</p:sld>
-</file>
-
-<file path=ppt/slides/slide13.xml><?xml version="1.0" encoding="utf-8"?>
-<p:sld xmlns:a="http://schemas.openxmlformats.org/drawingml/2006/main" xmlns:p="http://schemas.openxmlformats.org/presentationml/2006/main" xmlns:r="http://schemas.openxmlformats.org/officeDocument/2006/relationships">
-  <p:cSld>
-    <p:bg>
-      <p:bgPr>
-        <a:solidFill>
-          <a:srgbClr val="E8F6F8"/>
-        </a:solidFill>
-        <a:effectLst/>
-      </p:bgPr>
-    </p:bg>
-    <p:spTree>
-      <p:nvGrpSpPr>
-        <p:cNvPr id="1" name=""/>
-        <p:cNvGrpSpPr/>
-        <p:nvPr/>
-      </p:nvGrpSpPr>
-      <p:grpSpPr/>
-      <p:sp>
-        <p:nvSpPr>
-          <p:cNvPr id="2" name="Rectangle 1"/>
-          <p:cNvSpPr/>
-          <p:nvPr/>
-        </p:nvSpPr>
-        <p:spPr>
-          <a:xfrm>
-            <a:off x="0" y="0"/>
-            <a:ext cx="12191695" cy="960120"/>
-          </a:xfrm>
-          <a:prstGeom prst="rect">
-            <a:avLst/>
-          </a:prstGeom>
-          <a:solidFill>
-            <a:srgbClr val="4A7A80"/>
-          </a:solidFill>
-          <a:ln>
-            <a:noFill/>
-          </a:ln>
-        </p:spPr>
-        <p:style>
-          <a:lnRef idx="1">
-            <a:schemeClr val="accent1"/>
-          </a:lnRef>
-          <a:fillRef idx="3">
-            <a:schemeClr val="accent1"/>
-          </a:fillRef>
-          <a:effectRef idx="2">
-            <a:schemeClr val="accent1"/>
-          </a:effectRef>
-          <a:fontRef idx="minor">
-            <a:schemeClr val="lt1"/>
-          </a:fontRef>
-        </p:style>
-        <p:txBody>
-          <a:bodyPr rtlCol="0" anchor="ctr"/>
-          <a:lstStyle/>
-          <a:p>
-            <a:pPr algn="ctr"/>
-          </a:p>
-        </p:txBody>
-      </p:sp>
-      <p:sp>
-        <p:nvSpPr>
-          <p:cNvPr id="3" name="TextBox 2"/>
-          <p:cNvSpPr txBox="1"/>
-          <p:nvPr/>
-        </p:nvSpPr>
-        <p:spPr>
-          <a:xfrm>
-            <a:off x="502920" y="164592"/>
-            <a:ext cx="10058400" cy="457200"/>
-          </a:xfrm>
-          <a:prstGeom prst="rect">
-            <a:avLst/>
-          </a:prstGeom>
-          <a:noFill/>
-        </p:spPr>
-        <p:txBody>
-          <a:bodyPr wrap="square">
-            <a:spAutoFit/>
-          </a:bodyPr>
-          <a:lstStyle/>
-          <a:p>
-            <a:pPr algn="l">
-              <a:defRPr sz="2400" b="1">
-                <a:solidFill>
-                  <a:srgbClr val="FFFFFF"/>
-                </a:solidFill>
-              </a:defRPr>
-            </a:pPr>
-            <a:r>
-              <a:t>Paso 10 de 12 · Fase D</a:t>
-            </a:r>
-          </a:p>
-        </p:txBody>
-      </p:sp>
-      <p:sp>
-        <p:nvSpPr>
-          <p:cNvPr id="4" name="TextBox 3"/>
-          <p:cNvSpPr txBox="1"/>
-          <p:nvPr/>
-        </p:nvSpPr>
-        <p:spPr>
-          <a:xfrm>
-            <a:off x="502920" y="566928"/>
-            <a:ext cx="10058400" cy="320040"/>
-          </a:xfrm>
-          <a:prstGeom prst="rect">
-            <a:avLst/>
-          </a:prstGeom>
-          <a:noFill/>
-        </p:spPr>
-        <p:txBody>
-          <a:bodyPr wrap="square">
-            <a:spAutoFit/>
-          </a:bodyPr>
-          <a:lstStyle/>
-          <a:p>
-            <a:pPr algn="l">
-              <a:defRPr sz="1300" b="0">
-                <a:solidFill>
-                  <a:srgbClr val="E8F6F8"/>
-                </a:solidFill>
-              </a:defRPr>
-            </a:pPr>
-            <a:r>
-              <a:t>Retirar JWT de localStorage</a:t>
-            </a:r>
-          </a:p>
-        </p:txBody>
-      </p:sp>
-      <p:sp>
-        <p:nvSpPr>
-          <p:cNvPr id="5" name="Oval 4"/>
-          <p:cNvSpPr/>
-          <p:nvPr/>
-        </p:nvSpPr>
-        <p:spPr>
-          <a:xfrm>
-            <a:off x="502920" y="1234440"/>
-            <a:ext cx="502920" cy="502920"/>
-          </a:xfrm>
-          <a:prstGeom prst="ellipse">
-            <a:avLst/>
-          </a:prstGeom>
-          <a:solidFill>
-            <a:srgbClr val="4A7A80"/>
-          </a:solidFill>
-          <a:ln>
-            <a:noFill/>
-          </a:ln>
-        </p:spPr>
-        <p:style>
-          <a:lnRef idx="1">
-            <a:schemeClr val="accent1"/>
-          </a:lnRef>
-          <a:fillRef idx="3">
-            <a:schemeClr val="accent1"/>
-          </a:fillRef>
-          <a:effectRef idx="2">
-            <a:schemeClr val="accent1"/>
-          </a:effectRef>
-          <a:fontRef idx="minor">
-            <a:schemeClr val="lt1"/>
-          </a:fontRef>
-        </p:style>
-        <p:txBody>
-          <a:bodyPr rtlCol="0" anchor="ctr"/>
-          <a:lstStyle/>
-          <a:p>
-            <a:pPr algn="ctr">
-              <a:defRPr sz="2000" b="1">
-                <a:solidFill>
-                  <a:srgbClr val="FFFFFF"/>
-                </a:solidFill>
-              </a:defRPr>
-            </a:pPr>
-            <a:r>
-              <a:t>10</a:t>
-            </a:r>
-          </a:p>
-        </p:txBody>
-      </p:sp>
-      <p:sp>
-        <p:nvSpPr>
-          <p:cNvPr id="6" name="TextBox 5"/>
-          <p:cNvSpPr txBox="1"/>
-          <p:nvPr/>
-        </p:nvSpPr>
-        <p:spPr>
-          <a:xfrm>
-            <a:off x="1143000" y="1143000"/>
-            <a:ext cx="10058400" cy="457200"/>
-          </a:xfrm>
-          <a:prstGeom prst="rect">
-            <a:avLst/>
-          </a:prstGeom>
-          <a:noFill/>
-        </p:spPr>
-        <p:txBody>
-          <a:bodyPr wrap="square">
-            <a:spAutoFit/>
-          </a:bodyPr>
-          <a:lstStyle/>
-          <a:p>
-            <a:pPr algn="l">
-              <a:defRPr sz="2200" b="1">
-                <a:solidFill>
-                  <a:srgbClr val="2A4A4E"/>
-                </a:solidFill>
-              </a:defRPr>
-            </a:pPr>
-            <a:r>
-              <a:t>Retirar JWT de localStorage</a:t>
-            </a:r>
-          </a:p>
-        </p:txBody>
-      </p:sp>
-      <p:sp>
-        <p:nvSpPr>
-          <p:cNvPr id="7" name="TextBox 6"/>
-          <p:cNvSpPr txBox="1"/>
-          <p:nvPr/>
-        </p:nvSpPr>
-        <p:spPr>
-          <a:xfrm>
-            <a:off x="685800" y="1691640"/>
-            <a:ext cx="5669280" cy="1463040"/>
-          </a:xfrm>
-          <a:prstGeom prst="rect">
-            <a:avLst/>
-          </a:prstGeom>
-          <a:noFill/>
-        </p:spPr>
-        <p:txBody>
-          <a:bodyPr wrap="square">
-            <a:spAutoFit/>
-          </a:bodyPr>
-          <a:lstStyle/>
-          <a:p>
-            <a:pPr algn="l">
-              <a:defRPr sz="1600" b="0">
-                <a:solidFill>
-                  <a:srgbClr val="1F2328"/>
-                </a:solidFill>
-              </a:defRPr>
-            </a:pPr>
-            <a:r>
-              <a:t>Buscar localStorage con token/jwt en cada módulo. Eliminar — la cookie basta.</a:t>
-            </a:r>
-          </a:p>
-        </p:txBody>
-      </p:sp>
-      <p:sp>
-        <p:nvSpPr>
-          <p:cNvPr id="8" name="Rounded Rectangle 7"/>
-          <p:cNvSpPr/>
-          <p:nvPr/>
-        </p:nvSpPr>
-        <p:spPr>
-          <a:xfrm>
-            <a:off x="6583680" y="1691640"/>
-            <a:ext cx="5029200" cy="914400"/>
-          </a:xfrm>
-          <a:prstGeom prst="roundRect">
-            <a:avLst/>
-          </a:prstGeom>
-          <a:solidFill>
-            <a:srgbClr val="FFF8C5"/>
-          </a:solidFill>
-          <a:ln>
-            <a:solidFill>
-              <a:srgbClr val="D4A72C"/>
-            </a:solidFill>
-          </a:ln>
-        </p:spPr>
-        <p:style>
-          <a:lnRef idx="1">
-            <a:schemeClr val="accent1"/>
-          </a:lnRef>
-          <a:fillRef idx="3">
-            <a:schemeClr val="accent1"/>
-          </a:fillRef>
-          <a:effectRef idx="2">
-            <a:schemeClr val="accent1"/>
-          </a:effectRef>
-          <a:fontRef idx="minor">
-            <a:schemeClr val="lt1"/>
-          </a:fontRef>
-        </p:style>
-        <p:txBody>
-          <a:bodyPr rtlCol="0" anchor="ctr"/>
-          <a:lstStyle/>
-          <a:p>
-            <a:pPr algn="ctr"/>
-          </a:p>
-        </p:txBody>
-      </p:sp>
-      <p:sp>
-        <p:nvSpPr>
-          <p:cNvPr id="9" name="TextBox 8"/>
-          <p:cNvSpPr txBox="1"/>
-          <p:nvPr/>
-        </p:nvSpPr>
-        <p:spPr>
-          <a:xfrm>
-            <a:off x="6766560" y="1828800"/>
-            <a:ext cx="4663440" cy="685800"/>
-          </a:xfrm>
-          <a:prstGeom prst="rect">
-            <a:avLst/>
-          </a:prstGeom>
-          <a:noFill/>
-        </p:spPr>
-        <p:txBody>
-          <a:bodyPr wrap="square">
-            <a:spAutoFit/>
-          </a:bodyPr>
-          <a:lstStyle/>
-          <a:p>
-            <a:pPr algn="l">
-              <a:defRPr sz="1300" b="1">
-                <a:solidFill>
-                  <a:srgbClr val="2A4A4E"/>
-                </a:solidFill>
-              </a:defRPr>
-            </a:pPr>
-            <a:r>
-              <a:t>👆 DevTools → Application → Local Storage sin tokens</a:t>
-            </a:r>
-          </a:p>
-        </p:txBody>
-      </p:sp>
-      <p:sp>
-        <p:nvSpPr>
-          <p:cNvPr id="10" name="Rounded Rectangle 9"/>
-          <p:cNvSpPr/>
-          <p:nvPr/>
-        </p:nvSpPr>
-        <p:spPr>
-          <a:xfrm>
-            <a:off x="640080" y="3337560"/>
-            <a:ext cx="10972800" cy="822960"/>
-          </a:xfrm>
-          <a:prstGeom prst="roundRect">
-            <a:avLst/>
-          </a:prstGeom>
-          <a:solidFill>
-            <a:srgbClr val="F6F8FA"/>
-          </a:solidFill>
-          <a:ln>
-            <a:solidFill>
-              <a:srgbClr val="D0D7DE"/>
-            </a:solidFill>
-          </a:ln>
-        </p:spPr>
-        <p:style>
-          <a:lnRef idx="1">
-            <a:schemeClr val="accent1"/>
-          </a:lnRef>
-          <a:fillRef idx="3">
-            <a:schemeClr val="accent1"/>
-          </a:fillRef>
-          <a:effectRef idx="2">
-            <a:schemeClr val="accent1"/>
-          </a:effectRef>
-          <a:fontRef idx="minor">
-            <a:schemeClr val="lt1"/>
-          </a:fontRef>
-        </p:style>
-        <p:txBody>
-          <a:bodyPr rtlCol="0" anchor="ctr"/>
-          <a:lstStyle/>
-          <a:p>
-            <a:pPr algn="ctr"/>
-          </a:p>
-        </p:txBody>
-      </p:sp>
-      <p:sp>
-        <p:nvSpPr>
-          <p:cNvPr id="11" name="TextBox 10"/>
-          <p:cNvSpPr txBox="1"/>
-          <p:nvPr/>
-        </p:nvSpPr>
-        <p:spPr>
-          <a:xfrm>
-            <a:off x="822960" y="3474720"/>
-            <a:ext cx="10607040" cy="594360"/>
-          </a:xfrm>
-          <a:prstGeom prst="rect">
-            <a:avLst/>
-          </a:prstGeom>
-          <a:noFill/>
-        </p:spPr>
-        <p:txBody>
-          <a:bodyPr wrap="square">
-            <a:spAutoFit/>
-          </a:bodyPr>
-          <a:lstStyle/>
-          <a:p>
-            <a:pPr algn="l">
-              <a:defRPr sz="1300" b="0">
-                <a:solidFill>
-                  <a:srgbClr val="656D76"/>
-                </a:solidFill>
-              </a:defRPr>
-            </a:pPr>
-            <a:r>
-              <a:t>💡 Tip: Revisar también sessionStorage.</a:t>
-            </a:r>
-          </a:p>
-        </p:txBody>
-      </p:sp>
-      <p:sp>
-        <p:nvSpPr>
-          <p:cNvPr id="12" name="TextBox 11"/>
-          <p:cNvSpPr txBox="1"/>
-          <p:nvPr/>
-        </p:nvSpPr>
-        <p:spPr>
-          <a:xfrm>
-            <a:off x="685800" y="4343400"/>
-            <a:ext cx="10515600" cy="320040"/>
-          </a:xfrm>
-          <a:prstGeom prst="rect">
-            <a:avLst/>
-          </a:prstGeom>
-          <a:noFill/>
-        </p:spPr>
-        <p:txBody>
-          <a:bodyPr wrap="square">
-            <a:spAutoFit/>
-          </a:bodyPr>
-          <a:lstStyle/>
-          <a:p>
-            <a:pPr algn="l">
-              <a:defRPr sz="1400" b="1">
-                <a:solidFill>
-                  <a:srgbClr val="4A7A80"/>
-                </a:solidFill>
-              </a:defRPr>
-            </a:pPr>
-            <a:r>
-              <a:t>Checklist de este paso:</a:t>
-            </a:r>
-          </a:p>
-        </p:txBody>
-      </p:sp>
-      <p:sp>
-        <p:nvSpPr>
-          <p:cNvPr id="13" name="TextBox 12"/>
-          <p:cNvSpPr txBox="1"/>
-          <p:nvPr/>
-        </p:nvSpPr>
-        <p:spPr>
-          <a:xfrm>
-            <a:off x="868680" y="4709160"/>
-            <a:ext cx="10058400" cy="320040"/>
-          </a:xfrm>
-          <a:prstGeom prst="rect">
-            <a:avLst/>
-          </a:prstGeom>
-          <a:noFill/>
-        </p:spPr>
-        <p:txBody>
-          <a:bodyPr wrap="square">
-            <a:spAutoFit/>
-          </a:bodyPr>
-          <a:lstStyle/>
-          <a:p>
-            <a:pPr algn="l">
-              <a:defRPr sz="1300" b="0">
-                <a:solidFill>
-                  <a:srgbClr val="1F2328"/>
-                </a:solidFill>
-              </a:defRPr>
-            </a:pPr>
-            <a:r>
-              <a:t>☐  localStorage sin JWT</a:t>
-            </a:r>
-          </a:p>
-        </p:txBody>
-      </p:sp>
-      <p:sp>
-        <p:nvSpPr>
-          <p:cNvPr id="14" name="TextBox 13"/>
-          <p:cNvSpPr txBox="1"/>
-          <p:nvPr/>
-        </p:nvSpPr>
-        <p:spPr>
-          <a:xfrm>
-            <a:off x="868680" y="5056632"/>
-            <a:ext cx="10058400" cy="320040"/>
-          </a:xfrm>
-          <a:prstGeom prst="rect">
-            <a:avLst/>
-          </a:prstGeom>
-          <a:noFill/>
-        </p:spPr>
-        <p:txBody>
-          <a:bodyPr wrap="square">
-            <a:spAutoFit/>
-          </a:bodyPr>
-          <a:lstStyle/>
-          <a:p>
-            <a:pPr algn="l">
-              <a:defRPr sz="1300" b="0">
-                <a:solidFill>
-                  <a:srgbClr val="1F2328"/>
-                </a:solidFill>
-              </a:defRPr>
-            </a:pPr>
-            <a:r>
-              <a:t>☐  Código viejo eliminado</a:t>
-            </a:r>
-          </a:p>
-        </p:txBody>
-      </p:sp>
-      <p:sp>
-        <p:nvSpPr>
-          <p:cNvPr id="15" name="TextBox 14"/>
-          <p:cNvSpPr txBox="1"/>
-          <p:nvPr/>
-        </p:nvSpPr>
-        <p:spPr>
-          <a:xfrm>
-            <a:off x="868680" y="5404104"/>
-            <a:ext cx="10058400" cy="320040"/>
-          </a:xfrm>
-          <a:prstGeom prst="rect">
-            <a:avLst/>
-          </a:prstGeom>
-          <a:noFill/>
-        </p:spPr>
-        <p:txBody>
-          <a:bodyPr wrap="square">
-            <a:spAutoFit/>
-          </a:bodyPr>
-          <a:lstStyle/>
-          <a:p>
-            <a:pPr algn="l">
-              <a:defRPr sz="1300" b="0">
-                <a:solidFill>
-                  <a:srgbClr val="1F2328"/>
-                </a:solidFill>
-              </a:defRPr>
-            </a:pPr>
-            <a:r>
-              <a:t>☐  Sin regresiones</a:t>
-            </a:r>
-          </a:p>
-        </p:txBody>
-      </p:sp>
-    </p:spTree>
-  </p:cSld>
-  <p:clrMapOvr>
-    <a:masterClrMapping/>
-  </p:clrMapOvr>
-</p:sld>
-</file>
-
-<file path=ppt/slides/slide14.xml><?xml version="1.0" encoding="utf-8"?>
-<p:sld xmlns:a="http://schemas.openxmlformats.org/drawingml/2006/main" xmlns:p="http://schemas.openxmlformats.org/presentationml/2006/main" xmlns:r="http://schemas.openxmlformats.org/officeDocument/2006/relationships">
-  <p:cSld>
-    <p:bg>
-      <p:bgPr>
-        <a:solidFill>
-          <a:srgbClr val="E8F6F8"/>
-        </a:solidFill>
-        <a:effectLst/>
-      </p:bgPr>
-    </p:bg>
-    <p:spTree>
-      <p:nvGrpSpPr>
-        <p:cNvPr id="1" name=""/>
-        <p:cNvGrpSpPr/>
-        <p:nvPr/>
-      </p:nvGrpSpPr>
-      <p:grpSpPr/>
-      <p:sp>
-        <p:nvSpPr>
-          <p:cNvPr id="2" name="Rectangle 1"/>
-          <p:cNvSpPr/>
-          <p:nvPr/>
-        </p:nvSpPr>
-        <p:spPr>
-          <a:xfrm>
-            <a:off x="0" y="0"/>
-            <a:ext cx="12191695" cy="960120"/>
-          </a:xfrm>
-          <a:prstGeom prst="rect">
-            <a:avLst/>
-          </a:prstGeom>
-          <a:solidFill>
-            <a:srgbClr val="4A7A80"/>
-          </a:solidFill>
-          <a:ln>
-            <a:noFill/>
-          </a:ln>
-        </p:spPr>
-        <p:style>
-          <a:lnRef idx="1">
-            <a:schemeClr val="accent1"/>
-          </a:lnRef>
-          <a:fillRef idx="3">
-            <a:schemeClr val="accent1"/>
-          </a:fillRef>
-          <a:effectRef idx="2">
-            <a:schemeClr val="accent1"/>
-          </a:effectRef>
-          <a:fontRef idx="minor">
-            <a:schemeClr val="lt1"/>
-          </a:fontRef>
-        </p:style>
-        <p:txBody>
-          <a:bodyPr rtlCol="0" anchor="ctr"/>
-          <a:lstStyle/>
-          <a:p>
-            <a:pPr algn="ctr"/>
-          </a:p>
-        </p:txBody>
-      </p:sp>
-      <p:sp>
-        <p:nvSpPr>
-          <p:cNvPr id="3" name="TextBox 2"/>
-          <p:cNvSpPr txBox="1"/>
-          <p:nvPr/>
-        </p:nvSpPr>
-        <p:spPr>
-          <a:xfrm>
-            <a:off x="502920" y="164592"/>
-            <a:ext cx="10058400" cy="457200"/>
-          </a:xfrm>
-          <a:prstGeom prst="rect">
-            <a:avLst/>
-          </a:prstGeom>
-          <a:noFill/>
-        </p:spPr>
-        <p:txBody>
-          <a:bodyPr wrap="square">
-            <a:spAutoFit/>
-          </a:bodyPr>
-          <a:lstStyle/>
-          <a:p>
-            <a:pPr algn="l">
-              <a:defRPr sz="2400" b="1">
-                <a:solidFill>
-                  <a:srgbClr val="FFFFFF"/>
-                </a:solidFill>
-              </a:defRPr>
-            </a:pPr>
-            <a:r>
-              <a:t>Paso 11 de 12 · Fase D</a:t>
-            </a:r>
-          </a:p>
-        </p:txBody>
-      </p:sp>
-      <p:sp>
-        <p:nvSpPr>
-          <p:cNvPr id="4" name="TextBox 3"/>
-          <p:cNvSpPr txBox="1"/>
-          <p:nvPr/>
-        </p:nvSpPr>
-        <p:spPr>
-          <a:xfrm>
-            <a:off x="502920" y="566928"/>
-            <a:ext cx="10058400" cy="320040"/>
-          </a:xfrm>
-          <a:prstGeom prst="rect">
-            <a:avLst/>
-          </a:prstGeom>
-          <a:noFill/>
-        </p:spPr>
-        <p:txBody>
-          <a:bodyPr wrap="square">
-            <a:spAutoFit/>
-          </a:bodyPr>
-          <a:lstStyle/>
-          <a:p>
-            <a:pPr algn="l">
-              <a:defRPr sz="1300" b="0">
-                <a:solidFill>
-                  <a:srgbClr val="E8F6F8"/>
-                </a:solidFill>
-              </a:defRPr>
-            </a:pPr>
-            <a:r>
-              <a:t>Pruebas por módulo</a:t>
-            </a:r>
-          </a:p>
-        </p:txBody>
-      </p:sp>
-      <p:sp>
-        <p:nvSpPr>
-          <p:cNvPr id="5" name="Oval 4"/>
-          <p:cNvSpPr/>
-          <p:nvPr/>
-        </p:nvSpPr>
-        <p:spPr>
-          <a:xfrm>
-            <a:off x="502920" y="1234440"/>
-            <a:ext cx="502920" cy="502920"/>
-          </a:xfrm>
-          <a:prstGeom prst="ellipse">
-            <a:avLst/>
-          </a:prstGeom>
-          <a:solidFill>
-            <a:srgbClr val="4A7A80"/>
-          </a:solidFill>
-          <a:ln>
-            <a:noFill/>
-          </a:ln>
-        </p:spPr>
-        <p:style>
-          <a:lnRef idx="1">
-            <a:schemeClr val="accent1"/>
-          </a:lnRef>
-          <a:fillRef idx="3">
-            <a:schemeClr val="accent1"/>
-          </a:fillRef>
-          <a:effectRef idx="2">
-            <a:schemeClr val="accent1"/>
-          </a:effectRef>
-          <a:fontRef idx="minor">
-            <a:schemeClr val="lt1"/>
-          </a:fontRef>
-        </p:style>
-        <p:txBody>
-          <a:bodyPr rtlCol="0" anchor="ctr"/>
-          <a:lstStyle/>
-          <a:p>
-            <a:pPr algn="ctr">
-              <a:defRPr sz="2000" b="1">
-                <a:solidFill>
-                  <a:srgbClr val="FFFFFF"/>
-                </a:solidFill>
-              </a:defRPr>
-            </a:pPr>
-            <a:r>
-              <a:t>11</a:t>
-            </a:r>
-          </a:p>
-        </p:txBody>
-      </p:sp>
-      <p:sp>
-        <p:nvSpPr>
-          <p:cNvPr id="6" name="TextBox 5"/>
-          <p:cNvSpPr txBox="1"/>
-          <p:nvPr/>
-        </p:nvSpPr>
-        <p:spPr>
-          <a:xfrm>
-            <a:off x="1143000" y="1143000"/>
-            <a:ext cx="10058400" cy="457200"/>
-          </a:xfrm>
-          <a:prstGeom prst="rect">
-            <a:avLst/>
-          </a:prstGeom>
-          <a:noFill/>
-        </p:spPr>
-        <p:txBody>
-          <a:bodyPr wrap="square">
-            <a:spAutoFit/>
-          </a:bodyPr>
-          <a:lstStyle/>
-          <a:p>
-            <a:pPr algn="l">
-              <a:defRPr sz="2200" b="1">
-                <a:solidFill>
-                  <a:srgbClr val="2A4A4E"/>
-                </a:solidFill>
-              </a:defRPr>
-            </a:pPr>
-            <a:r>
-              <a:t>Pruebas por módulo</a:t>
-            </a:r>
-          </a:p>
-        </p:txBody>
-      </p:sp>
-      <p:sp>
-        <p:nvSpPr>
-          <p:cNvPr id="7" name="TextBox 6"/>
-          <p:cNvSpPr txBox="1"/>
-          <p:nvPr/>
-        </p:nvSpPr>
-        <p:spPr>
-          <a:xfrm>
-            <a:off x="685800" y="1691640"/>
-            <a:ext cx="5669280" cy="1463040"/>
-          </a:xfrm>
-          <a:prstGeom prst="rect">
-            <a:avLst/>
-          </a:prstGeom>
-          <a:noFill/>
-        </p:spPr>
-        <p:txBody>
-          <a:bodyPr wrap="square">
-            <a:spAutoFit/>
-          </a:bodyPr>
-          <a:lstStyle/>
-          <a:p>
-            <a:pPr algn="l">
-              <a:defRPr sz="1600" b="0">
-                <a:solidFill>
-                  <a:srgbClr val="1F2328"/>
-                </a:solidFill>
-              </a:defRPr>
-            </a:pPr>
-            <a:r>
-              <a:t>4 pruebas: sin login → redirect; con login → entra; logout; incógnito pide login.</a:t>
-            </a:r>
-          </a:p>
-        </p:txBody>
-      </p:sp>
-      <p:sp>
-        <p:nvSpPr>
-          <p:cNvPr id="8" name="Rounded Rectangle 7"/>
-          <p:cNvSpPr/>
-          <p:nvPr/>
-        </p:nvSpPr>
-        <p:spPr>
-          <a:xfrm>
-            <a:off x="6583680" y="1691640"/>
-            <a:ext cx="5029200" cy="914400"/>
-          </a:xfrm>
-          <a:prstGeom prst="roundRect">
-            <a:avLst/>
-          </a:prstGeom>
-          <a:solidFill>
-            <a:srgbClr val="FFF8C5"/>
-          </a:solidFill>
-          <a:ln>
-            <a:solidFill>
-              <a:srgbClr val="D4A72C"/>
-            </a:solidFill>
-          </a:ln>
-        </p:spPr>
-        <p:style>
-          <a:lnRef idx="1">
-            <a:schemeClr val="accent1"/>
-          </a:lnRef>
-          <a:fillRef idx="3">
-            <a:schemeClr val="accent1"/>
-          </a:fillRef>
-          <a:effectRef idx="2">
-            <a:schemeClr val="accent1"/>
-          </a:effectRef>
-          <a:fontRef idx="minor">
-            <a:schemeClr val="lt1"/>
-          </a:fontRef>
-        </p:style>
-        <p:txBody>
-          <a:bodyPr rtlCol="0" anchor="ctr"/>
-          <a:lstStyle/>
-          <a:p>
-            <a:pPr algn="ctr"/>
-          </a:p>
-        </p:txBody>
-      </p:sp>
-      <p:sp>
-        <p:nvSpPr>
-          <p:cNvPr id="9" name="TextBox 8"/>
-          <p:cNvSpPr txBox="1"/>
-          <p:nvPr/>
-        </p:nvSpPr>
-        <p:spPr>
-          <a:xfrm>
-            <a:off x="6766560" y="1828800"/>
-            <a:ext cx="4663440" cy="685800"/>
-          </a:xfrm>
-          <a:prstGeom prst="rect">
-            <a:avLst/>
-          </a:prstGeom>
-          <a:noFill/>
-        </p:spPr>
-        <p:txBody>
-          <a:bodyPr wrap="square">
-            <a:spAutoFit/>
-          </a:bodyPr>
-          <a:lstStyle/>
-          <a:p>
-            <a:pPr algn="l">
-              <a:defRPr sz="1300" b="1">
-                <a:solidFill>
-                  <a:srgbClr val="2A4A4E"/>
-                </a:solidFill>
-              </a:defRPr>
-            </a:pPr>
-            <a:r>
-              <a:t>👆 Chrome normal + ventana incógnito</a:t>
-            </a:r>
-          </a:p>
-        </p:txBody>
-      </p:sp>
-      <p:sp>
-        <p:nvSpPr>
-          <p:cNvPr id="10" name="Rounded Rectangle 9"/>
-          <p:cNvSpPr/>
-          <p:nvPr/>
-        </p:nvSpPr>
-        <p:spPr>
-          <a:xfrm>
-            <a:off x="640080" y="3337560"/>
-            <a:ext cx="10972800" cy="822960"/>
-          </a:xfrm>
-          <a:prstGeom prst="roundRect">
-            <a:avLst/>
-          </a:prstGeom>
-          <a:solidFill>
-            <a:srgbClr val="F6F8FA"/>
-          </a:solidFill>
-          <a:ln>
-            <a:solidFill>
-              <a:srgbClr val="D0D7DE"/>
-            </a:solidFill>
-          </a:ln>
-        </p:spPr>
-        <p:style>
-          <a:lnRef idx="1">
-            <a:schemeClr val="accent1"/>
-          </a:lnRef>
-          <a:fillRef idx="3">
-            <a:schemeClr val="accent1"/>
-          </a:fillRef>
-          <a:effectRef idx="2">
-            <a:schemeClr val="accent1"/>
-          </a:effectRef>
-          <a:fontRef idx="minor">
-            <a:schemeClr val="lt1"/>
-          </a:fontRef>
-        </p:style>
-        <p:txBody>
-          <a:bodyPr rtlCol="0" anchor="ctr"/>
-          <a:lstStyle/>
-          <a:p>
-            <a:pPr algn="ctr"/>
-          </a:p>
-        </p:txBody>
-      </p:sp>
-      <p:sp>
-        <p:nvSpPr>
-          <p:cNvPr id="11" name="TextBox 10"/>
-          <p:cNvSpPr txBox="1"/>
-          <p:nvPr/>
-        </p:nvSpPr>
-        <p:spPr>
-          <a:xfrm>
-            <a:off x="822960" y="3474720"/>
-            <a:ext cx="10607040" cy="594360"/>
-          </a:xfrm>
-          <a:prstGeom prst="rect">
-            <a:avLst/>
-          </a:prstGeom>
-          <a:noFill/>
-        </p:spPr>
-        <p:txBody>
-          <a:bodyPr wrap="square">
-            <a:spAutoFit/>
-          </a:bodyPr>
-          <a:lstStyle/>
-          <a:p>
-            <a:pPr algn="l">
-              <a:defRPr sz="1300" b="0">
-                <a:solidFill>
-                  <a:srgbClr val="656D76"/>
-                </a:solidFill>
-              </a:defRPr>
-            </a:pPr>
-            <a:r>
-              <a:t>💡 Tip: Repetir en cada módulo M migrado.</a:t>
-            </a:r>
-          </a:p>
-        </p:txBody>
-      </p:sp>
-      <p:sp>
-        <p:nvSpPr>
-          <p:cNvPr id="12" name="TextBox 11"/>
-          <p:cNvSpPr txBox="1"/>
-          <p:nvPr/>
-        </p:nvSpPr>
-        <p:spPr>
-          <a:xfrm>
-            <a:off x="685800" y="4343400"/>
-            <a:ext cx="10515600" cy="320040"/>
-          </a:xfrm>
-          <a:prstGeom prst="rect">
-            <a:avLst/>
-          </a:prstGeom>
-          <a:noFill/>
-        </p:spPr>
-        <p:txBody>
-          <a:bodyPr wrap="square">
-            <a:spAutoFit/>
-          </a:bodyPr>
-          <a:lstStyle/>
-          <a:p>
-            <a:pPr algn="l">
-              <a:defRPr sz="1400" b="1">
-                <a:solidFill>
-                  <a:srgbClr val="4A7A80"/>
-                </a:solidFill>
-              </a:defRPr>
-            </a:pPr>
-            <a:r>
-              <a:t>Checklist de este paso:</a:t>
-            </a:r>
-          </a:p>
-        </p:txBody>
-      </p:sp>
-      <p:sp>
-        <p:nvSpPr>
-          <p:cNvPr id="13" name="TextBox 12"/>
-          <p:cNvSpPr txBox="1"/>
-          <p:nvPr/>
-        </p:nvSpPr>
-        <p:spPr>
-          <a:xfrm>
-            <a:off x="868680" y="4709160"/>
-            <a:ext cx="10058400" cy="320040"/>
-          </a:xfrm>
-          <a:prstGeom prst="rect">
-            <a:avLst/>
-          </a:prstGeom>
-          <a:noFill/>
-        </p:spPr>
-        <p:txBody>
-          <a:bodyPr wrap="square">
-            <a:spAutoFit/>
-          </a:bodyPr>
-          <a:lstStyle/>
-          <a:p>
-            <a:pPr algn="l">
-              <a:defRPr sz="1300" b="0">
-                <a:solidFill>
-                  <a:srgbClr val="1F2328"/>
-                </a:solidFill>
-              </a:defRPr>
-            </a:pPr>
-            <a:r>
-              <a:t>☐  4 pruebas OK por módulo</a:t>
-            </a:r>
-          </a:p>
-        </p:txBody>
-      </p:sp>
-      <p:sp>
-        <p:nvSpPr>
-          <p:cNvPr id="14" name="TextBox 13"/>
-          <p:cNvSpPr txBox="1"/>
-          <p:nvPr/>
-        </p:nvSpPr>
-        <p:spPr>
-          <a:xfrm>
-            <a:off x="868680" y="5056632"/>
-            <a:ext cx="10058400" cy="320040"/>
-          </a:xfrm>
-          <a:prstGeom prst="rect">
-            <a:avLst/>
-          </a:prstGeom>
-          <a:noFill/>
-        </p:spPr>
-        <p:txBody>
-          <a:bodyPr wrap="square">
-            <a:spAutoFit/>
-          </a:bodyPr>
-          <a:lstStyle/>
-          <a:p>
-            <a:pPr algn="l">
-              <a:defRPr sz="1300" b="0">
-                <a:solidFill>
-                  <a:srgbClr val="1F2328"/>
-                </a:solidFill>
-              </a:defRPr>
-            </a:pPr>
-            <a:r>
-              <a:t>☐  Logout funciona</a:t>
-            </a:r>
-          </a:p>
-        </p:txBody>
-      </p:sp>
-      <p:sp>
-        <p:nvSpPr>
-          <p:cNvPr id="15" name="TextBox 14"/>
-          <p:cNvSpPr txBox="1"/>
-          <p:nvPr/>
-        </p:nvSpPr>
-        <p:spPr>
-          <a:xfrm>
-            <a:off x="868680" y="5404104"/>
-            <a:ext cx="10058400" cy="320040"/>
-          </a:xfrm>
-          <a:prstGeom prst="rect">
-            <a:avLst/>
-          </a:prstGeom>
-          <a:noFill/>
-        </p:spPr>
-        <p:txBody>
-          <a:bodyPr wrap="square">
-            <a:spAutoFit/>
-          </a:bodyPr>
-          <a:lstStyle/>
-          <a:p>
-            <a:pPr algn="l">
-              <a:defRPr sz="1300" b="0">
-                <a:solidFill>
-                  <a:srgbClr val="1F2328"/>
-                </a:solidFill>
-              </a:defRPr>
-            </a:pPr>
-            <a:r>
-              <a:t>☐  Sesión expira según config</a:t>
-            </a:r>
-          </a:p>
-        </p:txBody>
-      </p:sp>
-    </p:spTree>
-  </p:cSld>
-  <p:clrMapOvr>
-    <a:masterClrMapping/>
-  </p:clrMapOvr>
-</p:sld>
-</file>
-
-<file path=ppt/slides/slide15.xml><?xml version="1.0" encoding="utf-8"?>
-<p:sld xmlns:a="http://schemas.openxmlformats.org/drawingml/2006/main" xmlns:p="http://schemas.openxmlformats.org/presentationml/2006/main" xmlns:r="http://schemas.openxmlformats.org/officeDocument/2006/relationships">
-  <p:cSld>
-    <p:bg>
-      <p:bgPr>
-        <a:solidFill>
-          <a:srgbClr val="E8F6F8"/>
-        </a:solidFill>
-        <a:effectLst/>
-      </p:bgPr>
-    </p:bg>
-    <p:spTree>
-      <p:nvGrpSpPr>
-        <p:cNvPr id="1" name=""/>
-        <p:cNvGrpSpPr/>
-        <p:nvPr/>
-      </p:nvGrpSpPr>
-      <p:grpSpPr/>
-      <p:sp>
-        <p:nvSpPr>
-          <p:cNvPr id="2" name="Rectangle 1"/>
-          <p:cNvSpPr/>
-          <p:nvPr/>
-        </p:nvSpPr>
-        <p:spPr>
-          <a:xfrm>
-            <a:off x="0" y="0"/>
-            <a:ext cx="12191695" cy="960120"/>
-          </a:xfrm>
-          <a:prstGeom prst="rect">
-            <a:avLst/>
-          </a:prstGeom>
-          <a:solidFill>
-            <a:srgbClr val="4A7A80"/>
-          </a:solidFill>
-          <a:ln>
-            <a:noFill/>
-          </a:ln>
-        </p:spPr>
-        <p:style>
-          <a:lnRef idx="1">
-            <a:schemeClr val="accent1"/>
-          </a:lnRef>
-          <a:fillRef idx="3">
-            <a:schemeClr val="accent1"/>
-          </a:fillRef>
-          <a:effectRef idx="2">
-            <a:schemeClr val="accent1"/>
-          </a:effectRef>
-          <a:fontRef idx="minor">
-            <a:schemeClr val="lt1"/>
-          </a:fontRef>
-        </p:style>
-        <p:txBody>
-          <a:bodyPr rtlCol="0" anchor="ctr"/>
-          <a:lstStyle/>
-          <a:p>
-            <a:pPr algn="ctr"/>
-          </a:p>
-        </p:txBody>
-      </p:sp>
-      <p:sp>
-        <p:nvSpPr>
-          <p:cNvPr id="3" name="TextBox 2"/>
-          <p:cNvSpPr txBox="1"/>
-          <p:nvPr/>
-        </p:nvSpPr>
-        <p:spPr>
-          <a:xfrm>
-            <a:off x="502920" y="164592"/>
-            <a:ext cx="10058400" cy="457200"/>
-          </a:xfrm>
-          <a:prstGeom prst="rect">
-            <a:avLst/>
-          </a:prstGeom>
-          <a:noFill/>
-        </p:spPr>
-        <p:txBody>
-          <a:bodyPr wrap="square">
-            <a:spAutoFit/>
-          </a:bodyPr>
-          <a:lstStyle/>
-          <a:p>
-            <a:pPr algn="l">
-              <a:defRPr sz="2400" b="1">
-                <a:solidFill>
-                  <a:srgbClr val="FFFFFF"/>
-                </a:solidFill>
-              </a:defRPr>
-            </a:pPr>
-            <a:r>
-              <a:t>Paso 12 de 12 · Fase D</a:t>
-            </a:r>
-          </a:p>
-        </p:txBody>
-      </p:sp>
-      <p:sp>
-        <p:nvSpPr>
-          <p:cNvPr id="4" name="TextBox 3"/>
-          <p:cNvSpPr txBox="1"/>
-          <p:nvPr/>
-        </p:nvSpPr>
-        <p:spPr>
-          <a:xfrm>
-            <a:off x="502920" y="566928"/>
-            <a:ext cx="10058400" cy="320040"/>
-          </a:xfrm>
-          <a:prstGeom prst="rect">
-            <a:avLst/>
-          </a:prstGeom>
-          <a:noFill/>
-        </p:spPr>
-        <p:txBody>
-          <a:bodyPr wrap="square">
-            <a:spAutoFit/>
-          </a:bodyPr>
-          <a:lstStyle/>
-          <a:p>
-            <a:pPr algn="l">
-              <a:defRPr sz="1300" b="0">
-                <a:solidFill>
-                  <a:srgbClr val="E8F6F8"/>
-                </a:solidFill>
-              </a:defRPr>
-            </a:pPr>
-            <a:r>
-              <a:t>Documentar y cerrar hitos 2.1 + 2.2</a:t>
-            </a:r>
-          </a:p>
-        </p:txBody>
-      </p:sp>
-      <p:sp>
-        <p:nvSpPr>
-          <p:cNvPr id="5" name="Oval 4"/>
-          <p:cNvSpPr/>
-          <p:nvPr/>
-        </p:nvSpPr>
-        <p:spPr>
-          <a:xfrm>
-            <a:off x="502920" y="1234440"/>
-            <a:ext cx="502920" cy="502920"/>
-          </a:xfrm>
-          <a:prstGeom prst="ellipse">
-            <a:avLst/>
-          </a:prstGeom>
-          <a:solidFill>
-            <a:srgbClr val="4A7A80"/>
-          </a:solidFill>
-          <a:ln>
-            <a:noFill/>
-          </a:ln>
-        </p:spPr>
-        <p:style>
-          <a:lnRef idx="1">
-            <a:schemeClr val="accent1"/>
-          </a:lnRef>
-          <a:fillRef idx="3">
-            <a:schemeClr val="accent1"/>
-          </a:fillRef>
-          <a:effectRef idx="2">
-            <a:schemeClr val="accent1"/>
-          </a:effectRef>
-          <a:fontRef idx="minor">
-            <a:schemeClr val="lt1"/>
-          </a:fontRef>
-        </p:style>
-        <p:txBody>
-          <a:bodyPr rtlCol="0" anchor="ctr"/>
-          <a:lstStyle/>
-          <a:p>
-            <a:pPr algn="ctr">
-              <a:defRPr sz="2000" b="1">
-                <a:solidFill>
-                  <a:srgbClr val="FFFFFF"/>
-                </a:solidFill>
-              </a:defRPr>
-            </a:pPr>
-            <a:r>
-              <a:t>12</a:t>
-            </a:r>
-          </a:p>
-        </p:txBody>
-      </p:sp>
-      <p:sp>
-        <p:nvSpPr>
-          <p:cNvPr id="6" name="TextBox 5"/>
-          <p:cNvSpPr txBox="1"/>
-          <p:nvPr/>
-        </p:nvSpPr>
-        <p:spPr>
-          <a:xfrm>
-            <a:off x="1143000" y="1143000"/>
-            <a:ext cx="10058400" cy="457200"/>
-          </a:xfrm>
-          <a:prstGeom prst="rect">
-            <a:avLst/>
-          </a:prstGeom>
-          <a:noFill/>
-        </p:spPr>
-        <p:txBody>
-          <a:bodyPr wrap="square">
-            <a:spAutoFit/>
-          </a:bodyPr>
-          <a:lstStyle/>
-          <a:p>
-            <a:pPr algn="l">
-              <a:defRPr sz="2200" b="1">
-                <a:solidFill>
-                  <a:srgbClr val="2A4A4E"/>
-                </a:solidFill>
-              </a:defRPr>
-            </a:pPr>
-            <a:r>
-              <a:t>Documentar y cerrar hitos 2.1 + 2.2</a:t>
-            </a:r>
-          </a:p>
-        </p:txBody>
-      </p:sp>
-      <p:sp>
-        <p:nvSpPr>
-          <p:cNvPr id="7" name="TextBox 6"/>
-          <p:cNvSpPr txBox="1"/>
-          <p:nvPr/>
-        </p:nvSpPr>
-        <p:spPr>
-          <a:xfrm>
-            <a:off x="685800" y="1691640"/>
-            <a:ext cx="5669280" cy="1463040"/>
-          </a:xfrm>
-          <a:prstGeom prst="rect">
-            <a:avLst/>
-          </a:prstGeom>
-          <a:noFill/>
-        </p:spPr>
-        <p:txBody>
-          <a:bodyPr wrap="square">
-            <a:spAutoFit/>
-          </a:bodyPr>
-          <a:lstStyle/>
-          <a:p>
-            <a:pPr algn="l">
-              <a:defRPr sz="1600" b="0">
-                <a:solidFill>
-                  <a:srgbClr val="1F2328"/>
-                </a:solidFill>
-              </a:defRPr>
-            </a:pPr>
-            <a:r>
-              <a:t>Actualizar ficha MOVA: URL login, config.php, acceso cPanel. Marcar Gantt.</a:t>
-            </a:r>
-          </a:p>
-        </p:txBody>
-      </p:sp>
-      <p:sp>
-        <p:nvSpPr>
-          <p:cNvPr id="8" name="Rounded Rectangle 7"/>
-          <p:cNvSpPr/>
-          <p:nvPr/>
-        </p:nvSpPr>
-        <p:spPr>
-          <a:xfrm>
-            <a:off x="6583680" y="1691640"/>
-            <a:ext cx="5029200" cy="914400"/>
-          </a:xfrm>
-          <a:prstGeom prst="roundRect">
-            <a:avLst/>
-          </a:prstGeom>
-          <a:solidFill>
-            <a:srgbClr val="FFF8C5"/>
-          </a:solidFill>
-          <a:ln>
-            <a:solidFill>
-              <a:srgbClr val="D4A72C"/>
-            </a:solidFill>
-          </a:ln>
-        </p:spPr>
-        <p:style>
-          <a:lnRef idx="1">
-            <a:schemeClr val="accent1"/>
-          </a:lnRef>
-          <a:fillRef idx="3">
-            <a:schemeClr val="accent1"/>
-          </a:fillRef>
-          <a:effectRef idx="2">
-            <a:schemeClr val="accent1"/>
-          </a:effectRef>
-          <a:fontRef idx="minor">
-            <a:schemeClr val="lt1"/>
-          </a:fontRef>
-        </p:style>
-        <p:txBody>
-          <a:bodyPr rtlCol="0" anchor="ctr"/>
-          <a:lstStyle/>
-          <a:p>
-            <a:pPr algn="ctr"/>
-          </a:p>
-        </p:txBody>
-      </p:sp>
-      <p:sp>
-        <p:nvSpPr>
-          <p:cNvPr id="9" name="TextBox 8"/>
-          <p:cNvSpPr txBox="1"/>
-          <p:nvPr/>
-        </p:nvSpPr>
-        <p:spPr>
-          <a:xfrm>
-            <a:off x="6766560" y="1828800"/>
-            <a:ext cx="4663440" cy="685800"/>
-          </a:xfrm>
-          <a:prstGeom prst="rect">
-            <a:avLst/>
-          </a:prstGeom>
-          <a:noFill/>
-        </p:spPr>
-        <p:txBody>
-          <a:bodyPr wrap="square">
-            <a:spAutoFit/>
-          </a:bodyPr>
-          <a:lstStyle/>
-          <a:p>
-            <a:pPr algn="l">
-              <a:defRPr sz="1300" b="1">
-                <a:solidFill>
-                  <a:srgbClr val="2A4A4E"/>
-                </a:solidFill>
-              </a:defRPr>
-            </a:pPr>
-            <a:r>
-              <a:t>👆 Entregable: mova_auth operativo + todos los M centralizados</a:t>
-            </a:r>
-          </a:p>
-        </p:txBody>
-      </p:sp>
-      <p:sp>
-        <p:nvSpPr>
-          <p:cNvPr id="10" name="Rounded Rectangle 9"/>
-          <p:cNvSpPr/>
-          <p:nvPr/>
-        </p:nvSpPr>
-        <p:spPr>
-          <a:xfrm>
-            <a:off x="640080" y="3337560"/>
-            <a:ext cx="10972800" cy="822960"/>
-          </a:xfrm>
-          <a:prstGeom prst="roundRect">
-            <a:avLst/>
-          </a:prstGeom>
-          <a:solidFill>
-            <a:srgbClr val="F6F8FA"/>
-          </a:solidFill>
-          <a:ln>
-            <a:solidFill>
-              <a:srgbClr val="D0D7DE"/>
-            </a:solidFill>
-          </a:ln>
-        </p:spPr>
-        <p:style>
-          <a:lnRef idx="1">
-            <a:schemeClr val="accent1"/>
-          </a:lnRef>
-          <a:fillRef idx="3">
-            <a:schemeClr val="accent1"/>
-          </a:fillRef>
-          <a:effectRef idx="2">
-            <a:schemeClr val="accent1"/>
-          </a:effectRef>
-          <a:fontRef idx="minor">
-            <a:schemeClr val="lt1"/>
-          </a:fontRef>
-        </p:style>
-        <p:txBody>
-          <a:bodyPr rtlCol="0" anchor="ctr"/>
-          <a:lstStyle/>
-          <a:p>
-            <a:pPr algn="ctr"/>
-          </a:p>
-        </p:txBody>
-      </p:sp>
-      <p:sp>
-        <p:nvSpPr>
-          <p:cNvPr id="11" name="TextBox 10"/>
-          <p:cNvSpPr txBox="1"/>
-          <p:nvPr/>
-        </p:nvSpPr>
-        <p:spPr>
-          <a:xfrm>
-            <a:off x="822960" y="3474720"/>
-            <a:ext cx="10607040" cy="594360"/>
-          </a:xfrm>
-          <a:prstGeom prst="rect">
-            <a:avLst/>
-          </a:prstGeom>
-          <a:noFill/>
-        </p:spPr>
-        <p:txBody>
-          <a:bodyPr wrap="square">
-            <a:spAutoFit/>
-          </a:bodyPr>
-          <a:lstStyle/>
-          <a:p>
-            <a:pPr algn="l">
-              <a:defRPr sz="1300" b="0">
-                <a:solidFill>
-                  <a:srgbClr val="656D76"/>
-                </a:solidFill>
-              </a:defRPr>
-            </a:pPr>
-            <a:r>
-              <a:t>💡 Tip: Capacitar al equipo en el nuevo flujo de login.</a:t>
-            </a:r>
-          </a:p>
-        </p:txBody>
-      </p:sp>
-      <p:sp>
-        <p:nvSpPr>
-          <p:cNvPr id="12" name="TextBox 11"/>
-          <p:cNvSpPr txBox="1"/>
-          <p:nvPr/>
-        </p:nvSpPr>
-        <p:spPr>
-          <a:xfrm>
-            <a:off x="685800" y="4343400"/>
-            <a:ext cx="10515600" cy="320040"/>
-          </a:xfrm>
-          <a:prstGeom prst="rect">
-            <a:avLst/>
-          </a:prstGeom>
-          <a:noFill/>
-        </p:spPr>
-        <p:txBody>
-          <a:bodyPr wrap="square">
-            <a:spAutoFit/>
-          </a:bodyPr>
-          <a:lstStyle/>
-          <a:p>
-            <a:pPr algn="l">
-              <a:defRPr sz="1400" b="1">
-                <a:solidFill>
-                  <a:srgbClr val="4A7A80"/>
-                </a:solidFill>
-              </a:defRPr>
-            </a:pPr>
-            <a:r>
-              <a:t>Checklist de este paso:</a:t>
-            </a:r>
-          </a:p>
-        </p:txBody>
-      </p:sp>
-      <p:sp>
-        <p:nvSpPr>
-          <p:cNvPr id="13" name="TextBox 12"/>
-          <p:cNvSpPr txBox="1"/>
-          <p:nvPr/>
-        </p:nvSpPr>
-        <p:spPr>
-          <a:xfrm>
-            <a:off x="868680" y="4709160"/>
-            <a:ext cx="10058400" cy="320040"/>
-          </a:xfrm>
-          <a:prstGeom prst="rect">
-            <a:avLst/>
-          </a:prstGeom>
-          <a:noFill/>
-        </p:spPr>
-        <p:txBody>
-          <a:bodyPr wrap="square">
-            <a:spAutoFit/>
-          </a:bodyPr>
-          <a:lstStyle/>
-          <a:p>
-            <a:pPr algn="l">
-              <a:defRPr sz="1300" b="0">
-                <a:solidFill>
-                  <a:srgbClr val="1F2328"/>
-                </a:solidFill>
-              </a:defRPr>
-            </a:pPr>
-            <a:r>
-              <a:t>☐  Documentación actualizada</a:t>
-            </a:r>
-          </a:p>
-        </p:txBody>
-      </p:sp>
-      <p:sp>
-        <p:nvSpPr>
-          <p:cNvPr id="14" name="TextBox 13"/>
-          <p:cNvSpPr txBox="1"/>
-          <p:nvPr/>
-        </p:nvSpPr>
-        <p:spPr>
-          <a:xfrm>
-            <a:off x="868680" y="5056632"/>
-            <a:ext cx="10058400" cy="320040"/>
-          </a:xfrm>
-          <a:prstGeom prst="rect">
-            <a:avLst/>
-          </a:prstGeom>
-          <a:noFill/>
-        </p:spPr>
-        <p:txBody>
-          <a:bodyPr wrap="square">
-            <a:spAutoFit/>
-          </a:bodyPr>
-          <a:lstStyle/>
-          <a:p>
-            <a:pPr algn="l">
-              <a:defRPr sz="1300" b="0">
-                <a:solidFill>
-                  <a:srgbClr val="1F2328"/>
-                </a:solidFill>
-              </a:defRPr>
-            </a:pPr>
-            <a:r>
-              <a:t>☐  Equipo capacitado</a:t>
-            </a:r>
-          </a:p>
-        </p:txBody>
-      </p:sp>
-      <p:sp>
-        <p:nvSpPr>
-          <p:cNvPr id="15" name="TextBox 14"/>
-          <p:cNvSpPr txBox="1"/>
-          <p:nvPr/>
-        </p:nvSpPr>
-        <p:spPr>
-          <a:xfrm>
-            <a:off x="868680" y="5404104"/>
-            <a:ext cx="10058400" cy="320040"/>
-          </a:xfrm>
-          <a:prstGeom prst="rect">
-            <a:avLst/>
-          </a:prstGeom>
-          <a:noFill/>
-        </p:spPr>
-        <p:txBody>
-          <a:bodyPr wrap="square">
-            <a:spAutoFit/>
-          </a:bodyPr>
-          <a:lstStyle/>
-          <a:p>
-            <a:pPr algn="l">
-              <a:defRPr sz="1300" b="0">
-                <a:solidFill>
-                  <a:srgbClr val="1F2328"/>
-                </a:solidFill>
-              </a:defRPr>
-            </a:pPr>
-            <a:r>
-              <a:t>☐  Hitos 2.1 y 2.2 cerrados en Gantt</a:t>
-            </a:r>
-          </a:p>
-        </p:txBody>
-      </p:sp>
-    </p:spTree>
-  </p:cSld>
-  <p:clrMapOvr>
-    <a:masterClrMapping/>
-  </p:clrMapOvr>
-</p:sld>
-</file>
-
-<file path=ppt/slides/slide16.xml><?xml version="1.0" encoding="utf-8"?>
-<p:sld xmlns:a="http://schemas.openxmlformats.org/drawingml/2006/main" xmlns:p="http://schemas.openxmlformats.org/presentationml/2006/main" xmlns:r="http://schemas.openxmlformats.org/officeDocument/2006/relationships">
-  <p:cSld>
-    <p:bg>
-      <p:bgPr>
-        <a:solidFill>
-          <a:srgbClr val="E8F6F8"/>
-        </a:solidFill>
-        <a:effectLst/>
-      </p:bgPr>
-    </p:bg>
-    <p:spTree>
-      <p:nvGrpSpPr>
-        <p:cNvPr id="1" name=""/>
-        <p:cNvGrpSpPr/>
-        <p:nvPr/>
-      </p:nvGrpSpPr>
-      <p:grpSpPr/>
-      <p:sp>
-        <p:nvSpPr>
-          <p:cNvPr id="2" name="Rectangle 1"/>
-          <p:cNvSpPr/>
-          <p:nvPr/>
-        </p:nvSpPr>
-        <p:spPr>
-          <a:xfrm>
-            <a:off x="0" y="0"/>
-            <a:ext cx="12191695" cy="960120"/>
-          </a:xfrm>
-          <a:prstGeom prst="rect">
-            <a:avLst/>
-          </a:prstGeom>
-          <a:solidFill>
-            <a:srgbClr val="4A7A80"/>
-          </a:solidFill>
-          <a:ln>
-            <a:noFill/>
-          </a:ln>
-        </p:spPr>
-        <p:style>
-          <a:lnRef idx="1">
-            <a:schemeClr val="accent1"/>
-          </a:lnRef>
-          <a:fillRef idx="3">
-            <a:schemeClr val="accent1"/>
-          </a:fillRef>
-          <a:effectRef idx="2">
-            <a:schemeClr val="accent1"/>
-          </a:effectRef>
-          <a:fontRef idx="minor">
-            <a:schemeClr val="lt1"/>
-          </a:fontRef>
-        </p:style>
-        <p:txBody>
-          <a:bodyPr rtlCol="0" anchor="ctr"/>
-          <a:lstStyle/>
-          <a:p>
-            <a:pPr algn="ctr"/>
-          </a:p>
-        </p:txBody>
-      </p:sp>
-      <p:sp>
-        <p:nvSpPr>
-          <p:cNvPr id="3" name="TextBox 2"/>
-          <p:cNvSpPr txBox="1"/>
-          <p:nvPr/>
-        </p:nvSpPr>
-        <p:spPr>
-          <a:xfrm>
-            <a:off x="502920" y="164592"/>
-            <a:ext cx="10058400" cy="457200"/>
-          </a:xfrm>
-          <a:prstGeom prst="rect">
-            <a:avLst/>
-          </a:prstGeom>
-          <a:noFill/>
-        </p:spPr>
-        <p:txBody>
-          <a:bodyPr wrap="square">
-            <a:spAutoFit/>
-          </a:bodyPr>
-          <a:lstStyle/>
-          <a:p>
-            <a:pPr algn="l">
-              <a:defRPr sz="2400" b="1">
-                <a:solidFill>
-                  <a:srgbClr val="FFFFFF"/>
-                </a:solidFill>
-              </a:defRPr>
-            </a:pPr>
-            <a:r>
-              <a:t>Errores frecuentes</a:t>
-            </a:r>
-          </a:p>
-        </p:txBody>
-      </p:sp>
-      <p:sp>
-        <p:nvSpPr>
-          <p:cNvPr id="4" name="TextBox 3"/>
-          <p:cNvSpPr txBox="1"/>
-          <p:nvPr/>
-        </p:nvSpPr>
-        <p:spPr>
-          <a:xfrm>
-            <a:off x="502920" y="566928"/>
-            <a:ext cx="10058400" cy="320040"/>
-          </a:xfrm>
-          <a:prstGeom prst="rect">
-            <a:avLst/>
-          </a:prstGeom>
-          <a:noFill/>
-        </p:spPr>
-        <p:txBody>
-          <a:bodyPr wrap="square">
-            <a:spAutoFit/>
-          </a:bodyPr>
-          <a:lstStyle/>
-          <a:p>
-            <a:pPr algn="l">
-              <a:defRPr sz="1300" b="0">
-                <a:solidFill>
-                  <a:srgbClr val="E8F6F8"/>
-                </a:solidFill>
-              </a:defRPr>
-            </a:pPr>
-            <a:r>
-              <a:t>Si pasa esto, revisa esto</a:t>
-            </a:r>
-          </a:p>
-        </p:txBody>
-      </p:sp>
-      <p:sp>
-        <p:nvSpPr>
-          <p:cNvPr id="5" name="TextBox 4"/>
-          <p:cNvSpPr txBox="1"/>
-          <p:nvPr/>
-        </p:nvSpPr>
-        <p:spPr>
-          <a:xfrm>
-            <a:off x="822960" y="1371600"/>
-            <a:ext cx="4114800" cy="365760"/>
-          </a:xfrm>
-          <a:prstGeom prst="rect">
-            <a:avLst/>
-          </a:prstGeom>
-          <a:noFill/>
-        </p:spPr>
-        <p:txBody>
-          <a:bodyPr wrap="square">
-            <a:spAutoFit/>
-          </a:bodyPr>
-          <a:lstStyle/>
-          <a:p>
-            <a:pPr algn="l">
-              <a:defRPr sz="1500" b="1">
-                <a:solidFill>
-                  <a:srgbClr val="9A6700"/>
-                </a:solidFill>
-              </a:defRPr>
-            </a:pPr>
-            <a:r>
-              <a:t>Redirect infinito</a:t>
-            </a:r>
-          </a:p>
-        </p:txBody>
-      </p:sp>
-      <p:sp>
-        <p:nvSpPr>
-          <p:cNvPr id="6" name="TextBox 5"/>
-          <p:cNvSpPr txBox="1"/>
-          <p:nvPr/>
-        </p:nvSpPr>
-        <p:spPr>
-          <a:xfrm>
-            <a:off x="5029200" y="1371600"/>
-            <a:ext cx="6400800" cy="365760"/>
-          </a:xfrm>
-          <a:prstGeom prst="rect">
-            <a:avLst/>
-          </a:prstGeom>
-          <a:noFill/>
-        </p:spPr>
-        <p:txBody>
-          <a:bodyPr wrap="square">
-            <a:spAutoFit/>
-          </a:bodyPr>
-          <a:lstStyle/>
-          <a:p>
-            <a:pPr algn="l">
-              <a:defRPr sz="1400" b="0">
-                <a:solidFill>
-                  <a:srgbClr val="1F2328"/>
-                </a:solidFill>
-              </a:defRPr>
-            </a:pPr>
-            <a:r>
-              <a:t>→ login.php NO debe incluir guard.php</a:t>
-            </a:r>
-          </a:p>
-        </p:txBody>
-      </p:sp>
-      <p:sp>
-        <p:nvSpPr>
-          <p:cNvPr id="7" name="TextBox 6"/>
-          <p:cNvSpPr txBox="1"/>
-          <p:nvPr/>
-        </p:nvSpPr>
-        <p:spPr>
-          <a:xfrm>
-            <a:off x="822960" y="1874520"/>
-            <a:ext cx="4114800" cy="365760"/>
-          </a:xfrm>
-          <a:prstGeom prst="rect">
-            <a:avLst/>
-          </a:prstGeom>
-          <a:noFill/>
-        </p:spPr>
-        <p:txBody>
-          <a:bodyPr wrap="square">
-            <a:spAutoFit/>
-          </a:bodyPr>
-          <a:lstStyle/>
-          <a:p>
-            <a:pPr algn="l">
-              <a:defRPr sz="1500" b="1">
-                <a:solidFill>
-                  <a:srgbClr val="9A6700"/>
-                </a:solidFill>
-              </a:defRPr>
-            </a:pPr>
-            <a:r>
-              <a:t>Cookie no se guarda</a:t>
-            </a:r>
-          </a:p>
-        </p:txBody>
-      </p:sp>
-      <p:sp>
-        <p:nvSpPr>
-          <p:cNvPr id="8" name="TextBox 7"/>
-          <p:cNvSpPr txBox="1"/>
-          <p:nvPr/>
-        </p:nvSpPr>
-        <p:spPr>
-          <a:xfrm>
-            <a:off x="5029200" y="1874520"/>
-            <a:ext cx="6400800" cy="365760"/>
-          </a:xfrm>
-          <a:prstGeom prst="rect">
-            <a:avLst/>
-          </a:prstGeom>
-          <a:noFill/>
-        </p:spPr>
-        <p:txBody>
-          <a:bodyPr wrap="square">
-            <a:spAutoFit/>
-          </a:bodyPr>
-          <a:lstStyle/>
-          <a:p>
-            <a:pPr algn="l">
-              <a:defRPr sz="1400" b="0">
-                <a:solidFill>
-                  <a:srgbClr val="1F2328"/>
-                </a:solidFill>
-              </a:defRPr>
-            </a:pPr>
-            <a:r>
-              <a:t>→ HTTPS activo — secure =&gt; true requiere SSL</a:t>
-            </a:r>
-          </a:p>
-        </p:txBody>
-      </p:sp>
-      <p:sp>
-        <p:nvSpPr>
-          <p:cNvPr id="9" name="TextBox 8"/>
-          <p:cNvSpPr txBox="1"/>
-          <p:nvPr/>
-        </p:nvSpPr>
-        <p:spPr>
-          <a:xfrm>
-            <a:off x="822960" y="2377440"/>
-            <a:ext cx="4114800" cy="365760"/>
-          </a:xfrm>
-          <a:prstGeom prst="rect">
-            <a:avLst/>
-          </a:prstGeom>
-          <a:noFill/>
-        </p:spPr>
-        <p:txBody>
-          <a:bodyPr wrap="square">
-            <a:spAutoFit/>
-          </a:bodyPr>
-          <a:lstStyle/>
-          <a:p>
-            <a:pPr algn="l">
-              <a:defRPr sz="1500" b="1">
-                <a:solidFill>
-                  <a:srgbClr val="9A6700"/>
-                </a:solidFill>
-              </a:defRPr>
-            </a:pPr>
-            <a:r>
-              <a:t>Módulo sigue pidiendo login</a:t>
-            </a:r>
-          </a:p>
-        </p:txBody>
-      </p:sp>
-      <p:sp>
-        <p:nvSpPr>
-          <p:cNvPr id="10" name="TextBox 9"/>
-          <p:cNvSpPr txBox="1"/>
-          <p:nvPr/>
-        </p:nvSpPr>
-        <p:spPr>
-          <a:xfrm>
-            <a:off x="5029200" y="2377440"/>
-            <a:ext cx="6400800" cy="365760"/>
-          </a:xfrm>
-          <a:prstGeom prst="rect">
-            <a:avLst/>
-          </a:prstGeom>
-          <a:noFill/>
-        </p:spPr>
-        <p:txBody>
-          <a:bodyPr wrap="square">
-            <a:spAutoFit/>
-          </a:bodyPr>
-          <a:lstStyle/>
-          <a:p>
-            <a:pPr algn="l">
-              <a:defRPr sz="1400" b="0">
-                <a:solidFill>
-                  <a:srgbClr val="1F2328"/>
-                </a:solidFill>
-              </a:defRPr>
-            </a:pPr>
-            <a:r>
-              <a:t>→ Misma cookie path=/ y misma carpeta mova_auth</a:t>
-            </a:r>
-          </a:p>
-        </p:txBody>
-      </p:sp>
-      <p:sp>
-        <p:nvSpPr>
-          <p:cNvPr id="11" name="TextBox 10"/>
-          <p:cNvSpPr txBox="1"/>
-          <p:nvPr/>
-        </p:nvSpPr>
-        <p:spPr>
-          <a:xfrm>
-            <a:off x="822960" y="2880360"/>
-            <a:ext cx="4114800" cy="365760"/>
-          </a:xfrm>
-          <a:prstGeom prst="rect">
-            <a:avLst/>
-          </a:prstGeom>
-          <a:noFill/>
-        </p:spPr>
-        <p:txBody>
-          <a:bodyPr wrap="square">
-            <a:spAutoFit/>
-          </a:bodyPr>
-          <a:lstStyle/>
-          <a:p>
-            <a:pPr algn="l">
-              <a:defRPr sz="1500" b="1">
-                <a:solidFill>
-                  <a:srgbClr val="9A6700"/>
-                </a:solidFill>
-              </a:defRPr>
-            </a:pPr>
-            <a:r>
-              <a:t>AJAX devuelve 401</a:t>
-            </a:r>
-          </a:p>
-        </p:txBody>
-      </p:sp>
-      <p:sp>
-        <p:nvSpPr>
-          <p:cNvPr id="12" name="TextBox 11"/>
-          <p:cNvSpPr txBox="1"/>
-          <p:nvPr/>
-        </p:nvSpPr>
-        <p:spPr>
-          <a:xfrm>
-            <a:off x="5029200" y="2880360"/>
-            <a:ext cx="6400800" cy="365760"/>
-          </a:xfrm>
-          <a:prstGeom prst="rect">
-            <a:avLst/>
-          </a:prstGeom>
-          <a:noFill/>
-        </p:spPr>
-        <p:txBody>
-          <a:bodyPr wrap="square">
-            <a:spAutoFit/>
-          </a:bodyPr>
-          <a:lstStyle/>
-          <a:p>
-            <a:pPr algn="l">
-              <a:defRPr sz="1400" b="0">
-                <a:solidFill>
-                  <a:srgbClr val="1F2328"/>
-                </a:solidFill>
-              </a:defRPr>
-            </a:pPr>
-            <a:r>
-              <a:t>→ fetch con credentials: "include"</a:t>
-            </a:r>
-          </a:p>
-        </p:txBody>
-      </p:sp>
-      <p:sp>
-        <p:nvSpPr>
-          <p:cNvPr id="13" name="TextBox 12"/>
-          <p:cNvSpPr txBox="1"/>
-          <p:nvPr/>
-        </p:nvSpPr>
-        <p:spPr>
-          <a:xfrm>
-            <a:off x="822960" y="3383280"/>
-            <a:ext cx="4114800" cy="365760"/>
-          </a:xfrm>
-          <a:prstGeom prst="rect">
-            <a:avLst/>
-          </a:prstGeom>
-          <a:noFill/>
-        </p:spPr>
-        <p:txBody>
-          <a:bodyPr wrap="square">
-            <a:spAutoFit/>
-          </a:bodyPr>
-          <a:lstStyle/>
-          <a:p>
-            <a:pPr algn="l">
-              <a:defRPr sz="1500" b="1">
-                <a:solidFill>
-                  <a:srgbClr val="9A6700"/>
-                </a:solidFill>
-              </a:defRPr>
-            </a:pPr>
-            <a:r>
-              <a:t>Google OK pero no persiste</a:t>
-            </a:r>
-          </a:p>
-        </p:txBody>
-      </p:sp>
-      <p:sp>
-        <p:nvSpPr>
-          <p:cNvPr id="14" name="TextBox 13"/>
-          <p:cNvSpPr txBox="1"/>
-          <p:nvPr/>
-        </p:nvSpPr>
-        <p:spPr>
-          <a:xfrm>
-            <a:off x="5029200" y="3383280"/>
-            <a:ext cx="6400800" cy="365760"/>
-          </a:xfrm>
-          <a:prstGeom prst="rect">
-            <a:avLst/>
-          </a:prstGeom>
-          <a:noFill/>
-        </p:spPr>
-        <p:txBody>
-          <a:bodyPr wrap="square">
-            <a:spAutoFit/>
-          </a:bodyPr>
-          <a:lstStyle/>
-          <a:p>
-            <a:pPr algn="l">
-              <a:defRPr sz="1400" b="0">
-                <a:solidFill>
-                  <a:srgbClr val="1F2328"/>
-                </a:solidFill>
-              </a:defRPr>
-            </a:pPr>
-            <a:r>
-              <a:t>→ session_start() antes de cualquier output</a:t>
-            </a:r>
-          </a:p>
-        </p:txBody>
-      </p:sp>
-    </p:spTree>
-  </p:cSld>
-  <p:clrMapOvr>
-    <a:masterClrMapping/>
-  </p:clrMapOvr>
-</p:sld>
-</file>
-
-<file path=ppt/slides/slide17.xml><?xml version="1.0" encoding="utf-8"?>
-<p:sld xmlns:a="http://schemas.openxmlformats.org/drawingml/2006/main" xmlns:p="http://schemas.openxmlformats.org/presentationml/2006/main" xmlns:r="http://schemas.openxmlformats.org/officeDocument/2006/relationships">
-  <p:cSld>
-    <p:bg>
-      <p:bgPr>
-        <a:solidFill>
-          <a:srgbClr val="E8F6F8"/>
-        </a:solidFill>
-        <a:effectLst/>
-      </p:bgPr>
-    </p:bg>
-    <p:spTree>
-      <p:nvGrpSpPr>
-        <p:cNvPr id="1" name=""/>
-        <p:cNvGrpSpPr/>
-        <p:nvPr/>
-      </p:nvGrpSpPr>
-      <p:grpSpPr/>
-      <p:sp>
-        <p:nvSpPr>
-          <p:cNvPr id="2" name="Rectangle 1"/>
-          <p:cNvSpPr/>
-          <p:nvPr/>
-        </p:nvSpPr>
-        <p:spPr>
-          <a:xfrm>
-            <a:off x="0" y="0"/>
-            <a:ext cx="12191695" cy="960120"/>
-          </a:xfrm>
-          <a:prstGeom prst="rect">
-            <a:avLst/>
-          </a:prstGeom>
-          <a:solidFill>
-            <a:srgbClr val="4A7A80"/>
-          </a:solidFill>
-          <a:ln>
-            <a:noFill/>
-          </a:ln>
-        </p:spPr>
-        <p:style>
-          <a:lnRef idx="1">
-            <a:schemeClr val="accent1"/>
-          </a:lnRef>
-          <a:fillRef idx="3">
-            <a:schemeClr val="accent1"/>
-          </a:fillRef>
-          <a:effectRef idx="2">
-            <a:schemeClr val="accent1"/>
-          </a:effectRef>
-          <a:fontRef idx="minor">
-            <a:schemeClr val="lt1"/>
-          </a:fontRef>
-        </p:style>
-        <p:txBody>
-          <a:bodyPr rtlCol="0" anchor="ctr"/>
-          <a:lstStyle/>
-          <a:p>
-            <a:pPr algn="ctr"/>
-          </a:p>
-        </p:txBody>
-      </p:sp>
-      <p:sp>
-        <p:nvSpPr>
-          <p:cNvPr id="3" name="TextBox 2"/>
-          <p:cNvSpPr txBox="1"/>
-          <p:nvPr/>
-        </p:nvSpPr>
-        <p:spPr>
-          <a:xfrm>
-            <a:off x="502920" y="164592"/>
-            <a:ext cx="10058400" cy="457200"/>
-          </a:xfrm>
-          <a:prstGeom prst="rect">
-            <a:avLst/>
-          </a:prstGeom>
-          <a:noFill/>
-        </p:spPr>
-        <p:txBody>
-          <a:bodyPr wrap="square">
-            <a:spAutoFit/>
-          </a:bodyPr>
-          <a:lstStyle/>
-          <a:p>
-            <a:pPr algn="l">
-              <a:defRPr sz="2400" b="1">
-                <a:solidFill>
-                  <a:srgbClr val="FFFFFF"/>
-                </a:solidFill>
-              </a:defRPr>
-            </a:pPr>
-            <a:r>
-              <a:t>Qué NO hacer</a:t>
-            </a:r>
-          </a:p>
-        </p:txBody>
-      </p:sp>
-      <p:sp>
-        <p:nvSpPr>
-          <p:cNvPr id="4" name="TextBox 3"/>
-          <p:cNvSpPr txBox="1"/>
-          <p:nvPr/>
-        </p:nvSpPr>
-        <p:spPr>
-          <a:xfrm>
-            <a:off x="502920" y="566928"/>
-            <a:ext cx="10058400" cy="320040"/>
-          </a:xfrm>
-          <a:prstGeom prst="rect">
-            <a:avLst/>
-          </a:prstGeom>
-          <a:noFill/>
-        </p:spPr>
-        <p:txBody>
-          <a:bodyPr wrap="square">
-            <a:spAutoFit/>
-          </a:bodyPr>
-          <a:lstStyle/>
-          <a:p>
-            <a:pPr algn="l">
-              <a:defRPr sz="1300" b="0">
-                <a:solidFill>
-                  <a:srgbClr val="E8F6F8"/>
-                </a:solidFill>
-              </a:defRPr>
-            </a:pPr>
-            <a:r>
-              <a:t>Posición del cliente en el playbook</a:t>
-            </a:r>
-          </a:p>
-        </p:txBody>
-      </p:sp>
-      <p:sp>
-        <p:nvSpPr>
-          <p:cNvPr id="5" name="TextBox 4"/>
-          <p:cNvSpPr txBox="1"/>
-          <p:nvPr/>
-        </p:nvSpPr>
-        <p:spPr>
-          <a:xfrm>
-            <a:off x="822960" y="1417320"/>
-            <a:ext cx="10058400" cy="457200"/>
-          </a:xfrm>
-          <a:prstGeom prst="rect">
-            <a:avLst/>
-          </a:prstGeom>
-          <a:noFill/>
-        </p:spPr>
-        <p:txBody>
-          <a:bodyPr wrap="square">
-            <a:spAutoFit/>
-          </a:bodyPr>
-          <a:lstStyle/>
-          <a:p>
-            <a:pPr algn="l">
-              <a:defRPr sz="1800" b="0">
-                <a:solidFill>
-                  <a:srgbClr val="1F2328"/>
-                </a:solidFill>
-              </a:defRPr>
-            </a:pPr>
-            <a:r>
-              <a:t>✗  No migrar de GoDaddy ahora (movimiento lateral).</a:t>
-            </a:r>
-          </a:p>
-        </p:txBody>
-      </p:sp>
-      <p:sp>
-        <p:nvSpPr>
-          <p:cNvPr id="6" name="TextBox 5"/>
-          <p:cNvSpPr txBox="1"/>
-          <p:nvPr/>
-        </p:nvSpPr>
-        <p:spPr>
-          <a:xfrm>
-            <a:off x="822960" y="1965960"/>
-            <a:ext cx="10058400" cy="457200"/>
-          </a:xfrm>
-          <a:prstGeom prst="rect">
-            <a:avLst/>
-          </a:prstGeom>
-          <a:noFill/>
-        </p:spPr>
-        <p:txBody>
-          <a:bodyPr wrap="square">
-            <a:spAutoFit/>
-          </a:bodyPr>
-          <a:lstStyle/>
-          <a:p>
-            <a:pPr algn="l">
-              <a:defRPr sz="1800" b="0">
-                <a:solidFill>
-                  <a:srgbClr val="1F2328"/>
-                </a:solidFill>
-              </a:defRPr>
-            </a:pPr>
-            <a:r>
-              <a:t>✗  No validar permisos dentro de cada módulo.</a:t>
-            </a:r>
-          </a:p>
-        </p:txBody>
-      </p:sp>
-      <p:sp>
-        <p:nvSpPr>
-          <p:cNvPr id="7" name="TextBox 6"/>
-          <p:cNvSpPr txBox="1"/>
-          <p:nvPr/>
-        </p:nvSpPr>
-        <p:spPr>
-          <a:xfrm>
-            <a:off x="822960" y="2514600"/>
-            <a:ext cx="10058400" cy="457200"/>
-          </a:xfrm>
-          <a:prstGeom prst="rect">
-            <a:avLst/>
-          </a:prstGeom>
-          <a:noFill/>
-        </p:spPr>
-        <p:txBody>
-          <a:bodyPr wrap="square">
-            <a:spAutoFit/>
-          </a:bodyPr>
-          <a:lstStyle/>
-          <a:p>
-            <a:pPr algn="l">
-              <a:defRPr sz="1800" b="0">
-                <a:solidFill>
-                  <a:srgbClr val="1F2328"/>
-                </a:solidFill>
-              </a:defRPr>
-            </a:pPr>
-            <a:r>
-              <a:t>✗  No guardar tokens en localStorage.</a:t>
-            </a:r>
-          </a:p>
-        </p:txBody>
-      </p:sp>
-      <p:sp>
-        <p:nvSpPr>
-          <p:cNvPr id="8" name="TextBox 7"/>
-          <p:cNvSpPr txBox="1"/>
-          <p:nvPr/>
-        </p:nvSpPr>
-        <p:spPr>
-          <a:xfrm>
-            <a:off x="822960" y="3063240"/>
-            <a:ext cx="10058400" cy="457200"/>
-          </a:xfrm>
-          <a:prstGeom prst="rect">
-            <a:avLst/>
-          </a:prstGeom>
-          <a:noFill/>
-        </p:spPr>
-        <p:txBody>
-          <a:bodyPr wrap="square">
-            <a:spAutoFit/>
-          </a:bodyPr>
-          <a:lstStyle/>
-          <a:p>
-            <a:pPr algn="l">
-              <a:defRPr sz="1800" b="0">
-                <a:solidFill>
-                  <a:srgbClr val="1F2328"/>
-                </a:solidFill>
-              </a:defRPr>
-            </a:pPr>
-            <a:r>
-              <a:t>✗  No migrar todos los módulos el mismo día sin probar.</a:t>
-            </a:r>
-          </a:p>
-        </p:txBody>
-      </p:sp>
-    </p:spTree>
-  </p:cSld>
-  <p:clrMapOvr>
-    <a:masterClrMapping/>
-  </p:clrMapOvr>
-</p:sld>
-</file>
-
-<file path=ppt/slides/slide18.xml><?xml version="1.0" encoding="utf-8"?>
-<p:sld xmlns:a="http://schemas.openxmlformats.org/drawingml/2006/main" xmlns:p="http://schemas.openxmlformats.org/presentationml/2006/main" xmlns:r="http://schemas.openxmlformats.org/officeDocument/2006/relationships">
-  <p:cSld>
-    <p:bg>
-      <p:bgPr>
-        <a:solidFill>
-          <a:srgbClr val="E8F6F8"/>
-        </a:solidFill>
-        <a:effectLst/>
-      </p:bgPr>
-    </p:bg>
-    <p:spTree>
-      <p:nvGrpSpPr>
-        <p:cNvPr id="1" name=""/>
-        <p:cNvGrpSpPr/>
-        <p:nvPr/>
-      </p:nvGrpSpPr>
-      <p:grpSpPr/>
-      <p:sp>
-        <p:nvSpPr>
-          <p:cNvPr id="2" name="Rectangle 1"/>
-          <p:cNvSpPr/>
-          <p:nvPr/>
-        </p:nvSpPr>
-        <p:spPr>
-          <a:xfrm>
-            <a:off x="0" y="0"/>
-            <a:ext cx="12191695" cy="960120"/>
-          </a:xfrm>
-          <a:prstGeom prst="rect">
-            <a:avLst/>
-          </a:prstGeom>
-          <a:solidFill>
-            <a:srgbClr val="4A7A80"/>
-          </a:solidFill>
-          <a:ln>
-            <a:noFill/>
-          </a:ln>
-        </p:spPr>
-        <p:style>
-          <a:lnRef idx="1">
-            <a:schemeClr val="accent1"/>
-          </a:lnRef>
-          <a:fillRef idx="3">
-            <a:schemeClr val="accent1"/>
-          </a:fillRef>
-          <a:effectRef idx="2">
-            <a:schemeClr val="accent1"/>
-          </a:effectRef>
-          <a:fontRef idx="minor">
-            <a:schemeClr val="lt1"/>
-          </a:fontRef>
-        </p:style>
-        <p:txBody>
-          <a:bodyPr rtlCol="0" anchor="ctr"/>
-          <a:lstStyle/>
-          <a:p>
-            <a:pPr algn="ctr"/>
-          </a:p>
-        </p:txBody>
-      </p:sp>
-      <p:sp>
-        <p:nvSpPr>
-          <p:cNvPr id="3" name="TextBox 2"/>
-          <p:cNvSpPr txBox="1"/>
-          <p:nvPr/>
-        </p:nvSpPr>
-        <p:spPr>
-          <a:xfrm>
-            <a:off x="502920" y="164592"/>
-            <a:ext cx="10058400" cy="457200"/>
-          </a:xfrm>
-          <a:prstGeom prst="rect">
-            <a:avLst/>
-          </a:prstGeom>
-          <a:noFill/>
-        </p:spPr>
-        <p:txBody>
-          <a:bodyPr wrap="square">
-            <a:spAutoFit/>
-          </a:bodyPr>
-          <a:lstStyle/>
-          <a:p>
-            <a:pPr algn="l">
-              <a:defRPr sz="2400" b="1">
-                <a:solidFill>
-                  <a:srgbClr val="FFFFFF"/>
-                </a:solidFill>
-              </a:defRPr>
-            </a:pPr>
-            <a:r>
-              <a:t>Checklist final</a:t>
-            </a:r>
-          </a:p>
-        </p:txBody>
-      </p:sp>
-      <p:sp>
-        <p:nvSpPr>
-          <p:cNvPr id="4" name="TextBox 3"/>
-          <p:cNvSpPr txBox="1"/>
-          <p:nvPr/>
-        </p:nvSpPr>
-        <p:spPr>
-          <a:xfrm>
-            <a:off x="502920" y="566928"/>
-            <a:ext cx="10058400" cy="320040"/>
-          </a:xfrm>
-          <a:prstGeom prst="rect">
-            <a:avLst/>
-          </a:prstGeom>
-          <a:noFill/>
-        </p:spPr>
-        <p:txBody>
-          <a:bodyPr wrap="square">
-            <a:spAutoFit/>
-          </a:bodyPr>
-          <a:lstStyle/>
-          <a:p>
-            <a:pPr algn="l">
-              <a:defRPr sz="1300" b="0">
-                <a:solidFill>
-                  <a:srgbClr val="E8F6F8"/>
-                </a:solidFill>
-              </a:defRPr>
-            </a:pPr>
-            <a:r>
-              <a:t>Antes de dar por cerrado el hito</a:t>
-            </a:r>
-          </a:p>
-        </p:txBody>
-      </p:sp>
-      <p:sp>
-        <p:nvSpPr>
-          <p:cNvPr id="5" name="Rounded Rectangle 4"/>
-          <p:cNvSpPr/>
-          <p:nvPr/>
-        </p:nvSpPr>
-        <p:spPr>
-          <a:xfrm>
-            <a:off x="731520" y="1371600"/>
-            <a:ext cx="320040" cy="320040"/>
-          </a:xfrm>
-          <a:prstGeom prst="roundRect">
-            <a:avLst/>
-          </a:prstGeom>
-          <a:noFill/>
-          <a:ln w="25400">
-            <a:solidFill>
-              <a:srgbClr val="1A7F37"/>
-            </a:solidFill>
-          </a:ln>
-        </p:spPr>
-        <p:style>
-          <a:lnRef idx="1">
-            <a:schemeClr val="accent1"/>
-          </a:lnRef>
-          <a:fillRef idx="3">
-            <a:schemeClr val="accent1"/>
-          </a:fillRef>
-          <a:effectRef idx="2">
-            <a:schemeClr val="accent1"/>
-          </a:effectRef>
-          <a:fontRef idx="minor">
-            <a:schemeClr val="lt1"/>
-          </a:fontRef>
-        </p:style>
-        <p:txBody>
-          <a:bodyPr rtlCol="0" anchor="ctr"/>
-          <a:lstStyle/>
-          <a:p>
-            <a:pPr algn="ctr"/>
-          </a:p>
-        </p:txBody>
-      </p:sp>
-      <p:sp>
-        <p:nvSpPr>
-          <p:cNvPr id="6" name="TextBox 5"/>
-          <p:cNvSpPr txBox="1"/>
-          <p:nvPr/>
-        </p:nvSpPr>
-        <p:spPr>
-          <a:xfrm>
-            <a:off x="1234440" y="1325880"/>
-            <a:ext cx="9601200" cy="411480"/>
-          </a:xfrm>
-          <a:prstGeom prst="rect">
-            <a:avLst/>
-          </a:prstGeom>
-          <a:noFill/>
-        </p:spPr>
-        <p:txBody>
-          <a:bodyPr wrap="square">
-            <a:spAutoFit/>
-          </a:bodyPr>
-          <a:lstStyle/>
-          <a:p>
-            <a:pPr algn="l">
-              <a:defRPr sz="1700" b="0">
-                <a:solidFill>
-                  <a:srgbClr val="1F2328"/>
-                </a:solidFill>
-              </a:defRPr>
-            </a:pPr>
-            <a:r>
-              <a:t>mova_auth es el único punto de login</a:t>
-            </a:r>
-          </a:p>
-        </p:txBody>
-      </p:sp>
-      <p:sp>
-        <p:nvSpPr>
-          <p:cNvPr id="7" name="Rounded Rectangle 6"/>
-          <p:cNvSpPr/>
-          <p:nvPr/>
-        </p:nvSpPr>
-        <p:spPr>
-          <a:xfrm>
-            <a:off x="731520" y="1901952"/>
-            <a:ext cx="320040" cy="320040"/>
-          </a:xfrm>
-          <a:prstGeom prst="roundRect">
-            <a:avLst/>
-          </a:prstGeom>
-          <a:noFill/>
-          <a:ln w="25400">
-            <a:solidFill>
-              <a:srgbClr val="1A7F37"/>
-            </a:solidFill>
-          </a:ln>
-        </p:spPr>
-        <p:style>
-          <a:lnRef idx="1">
-            <a:schemeClr val="accent1"/>
-          </a:lnRef>
-          <a:fillRef idx="3">
-            <a:schemeClr val="accent1"/>
-          </a:fillRef>
-          <a:effectRef idx="2">
-            <a:schemeClr val="accent1"/>
-          </a:effectRef>
-          <a:fontRef idx="minor">
-            <a:schemeClr val="lt1"/>
-          </a:fontRef>
-        </p:style>
-        <p:txBody>
-          <a:bodyPr rtlCol="0" anchor="ctr"/>
-          <a:lstStyle/>
-          <a:p>
-            <a:pPr algn="ctr"/>
-          </a:p>
-        </p:txBody>
-      </p:sp>
-      <p:sp>
-        <p:nvSpPr>
-          <p:cNvPr id="8" name="TextBox 7"/>
-          <p:cNvSpPr txBox="1"/>
-          <p:nvPr/>
-        </p:nvSpPr>
-        <p:spPr>
-          <a:xfrm>
-            <a:off x="1234440" y="1856232"/>
-            <a:ext cx="9601200" cy="411480"/>
-          </a:xfrm>
-          <a:prstGeom prst="rect">
-            <a:avLst/>
-          </a:prstGeom>
-          <a:noFill/>
-        </p:spPr>
-        <p:txBody>
-          <a:bodyPr wrap="square">
-            <a:spAutoFit/>
-          </a:bodyPr>
-          <a:lstStyle/>
-          <a:p>
-            <a:pPr algn="l">
-              <a:defRPr sz="1700" b="0">
-                <a:solidFill>
-                  <a:srgbClr val="1F2328"/>
-                </a:solidFill>
-              </a:defRPr>
-            </a:pPr>
-            <a:r>
-              <a:t>Todos los módulos M incluyen guard.php</a:t>
-            </a:r>
-          </a:p>
-        </p:txBody>
-      </p:sp>
-      <p:sp>
-        <p:nvSpPr>
-          <p:cNvPr id="9" name="Rounded Rectangle 8"/>
-          <p:cNvSpPr/>
-          <p:nvPr/>
-        </p:nvSpPr>
-        <p:spPr>
-          <a:xfrm>
-            <a:off x="731520" y="2432304"/>
-            <a:ext cx="320040" cy="320040"/>
-          </a:xfrm>
-          <a:prstGeom prst="roundRect">
-            <a:avLst/>
-          </a:prstGeom>
-          <a:noFill/>
-          <a:ln w="25400">
-            <a:solidFill>
-              <a:srgbClr val="1A7F37"/>
-            </a:solidFill>
-          </a:ln>
-        </p:spPr>
-        <p:style>
-          <a:lnRef idx="1">
-            <a:schemeClr val="accent1"/>
-          </a:lnRef>
-          <a:fillRef idx="3">
-            <a:schemeClr val="accent1"/>
-          </a:fillRef>
-          <a:effectRef idx="2">
-            <a:schemeClr val="accent1"/>
-          </a:effectRef>
-          <a:fontRef idx="minor">
-            <a:schemeClr val="lt1"/>
-          </a:fontRef>
-        </p:style>
-        <p:txBody>
-          <a:bodyPr rtlCol="0" anchor="ctr"/>
-          <a:lstStyle/>
-          <a:p>
-            <a:pPr algn="ctr"/>
-          </a:p>
-        </p:txBody>
-      </p:sp>
-      <p:sp>
-        <p:nvSpPr>
-          <p:cNvPr id="10" name="TextBox 9"/>
-          <p:cNvSpPr txBox="1"/>
-          <p:nvPr/>
-        </p:nvSpPr>
-        <p:spPr>
-          <a:xfrm>
-            <a:off x="1234440" y="2386584"/>
-            <a:ext cx="9601200" cy="411480"/>
-          </a:xfrm>
-          <a:prstGeom prst="rect">
-            <a:avLst/>
-          </a:prstGeom>
-          <a:noFill/>
-        </p:spPr>
-        <p:txBody>
-          <a:bodyPr wrap="square">
-            <a:spAutoFit/>
-          </a:bodyPr>
-          <a:lstStyle/>
-          <a:p>
-            <a:pPr algn="l">
-              <a:defRPr sz="1700" b="0">
-                <a:solidFill>
-                  <a:srgbClr val="1F2328"/>
-                </a:solidFill>
-              </a:defRPr>
-            </a:pPr>
-            <a:r>
-              <a:t>Cookie httpOnly + Secure activa</a:t>
-            </a:r>
-          </a:p>
-        </p:txBody>
-      </p:sp>
-      <p:sp>
-        <p:nvSpPr>
-          <p:cNvPr id="11" name="Rounded Rectangle 10"/>
-          <p:cNvSpPr/>
-          <p:nvPr/>
-        </p:nvSpPr>
-        <p:spPr>
-          <a:xfrm>
-            <a:off x="731520" y="2962656"/>
-            <a:ext cx="320040" cy="320040"/>
-          </a:xfrm>
-          <a:prstGeom prst="roundRect">
-            <a:avLst/>
-          </a:prstGeom>
-          <a:noFill/>
-          <a:ln w="25400">
-            <a:solidFill>
-              <a:srgbClr val="1A7F37"/>
-            </a:solidFill>
-          </a:ln>
-        </p:spPr>
-        <p:style>
-          <a:lnRef idx="1">
-            <a:schemeClr val="accent1"/>
-          </a:lnRef>
-          <a:fillRef idx="3">
-            <a:schemeClr val="accent1"/>
-          </a:fillRef>
-          <a:effectRef idx="2">
-            <a:schemeClr val="accent1"/>
-          </a:effectRef>
-          <a:fontRef idx="minor">
-            <a:schemeClr val="lt1"/>
-          </a:fontRef>
-        </p:style>
-        <p:txBody>
-          <a:bodyPr rtlCol="0" anchor="ctr"/>
-          <a:lstStyle/>
-          <a:p>
-            <a:pPr algn="ctr"/>
-          </a:p>
-        </p:txBody>
-      </p:sp>
-      <p:sp>
-        <p:nvSpPr>
-          <p:cNvPr id="12" name="TextBox 11"/>
-          <p:cNvSpPr txBox="1"/>
-          <p:nvPr/>
-        </p:nvSpPr>
-        <p:spPr>
-          <a:xfrm>
-            <a:off x="1234440" y="2916936"/>
-            <a:ext cx="9601200" cy="411480"/>
-          </a:xfrm>
-          <a:prstGeom prst="rect">
-            <a:avLst/>
-          </a:prstGeom>
-          <a:noFill/>
-        </p:spPr>
-        <p:txBody>
-          <a:bodyPr wrap="square">
-            <a:spAutoFit/>
-          </a:bodyPr>
-          <a:lstStyle/>
-          <a:p>
-            <a:pPr algn="l">
-              <a:defRPr sz="1700" b="0">
-                <a:solidFill>
-                  <a:srgbClr val="1F2328"/>
-                </a:solidFill>
-              </a:defRPr>
-            </a:pPr>
-            <a:r>
-              <a:t>Sin JWT en localStorage</a:t>
-            </a:r>
-          </a:p>
-        </p:txBody>
-      </p:sp>
-      <p:sp>
-        <p:nvSpPr>
-          <p:cNvPr id="13" name="Rounded Rectangle 12"/>
-          <p:cNvSpPr/>
-          <p:nvPr/>
-        </p:nvSpPr>
-        <p:spPr>
-          <a:xfrm>
-            <a:off x="731520" y="3493008"/>
-            <a:ext cx="320040" cy="320040"/>
-          </a:xfrm>
-          <a:prstGeom prst="roundRect">
-            <a:avLst/>
-          </a:prstGeom>
-          <a:noFill/>
-          <a:ln w="25400">
-            <a:solidFill>
-              <a:srgbClr val="1A7F37"/>
-            </a:solidFill>
-          </a:ln>
-        </p:spPr>
-        <p:style>
-          <a:lnRef idx="1">
-            <a:schemeClr val="accent1"/>
-          </a:lnRef>
-          <a:fillRef idx="3">
-            <a:schemeClr val="accent1"/>
-          </a:fillRef>
-          <a:effectRef idx="2">
-            <a:schemeClr val="accent1"/>
-          </a:effectRef>
-          <a:fontRef idx="minor">
-            <a:schemeClr val="lt1"/>
-          </a:fontRef>
-        </p:style>
-        <p:txBody>
-          <a:bodyPr rtlCol="0" anchor="ctr"/>
-          <a:lstStyle/>
-          <a:p>
-            <a:pPr algn="ctr"/>
-          </a:p>
-        </p:txBody>
-      </p:sp>
-      <p:sp>
-        <p:nvSpPr>
-          <p:cNvPr id="14" name="TextBox 13"/>
-          <p:cNvSpPr txBox="1"/>
-          <p:nvPr/>
-        </p:nvSpPr>
-        <p:spPr>
-          <a:xfrm>
-            <a:off x="1234440" y="3447288"/>
-            <a:ext cx="9601200" cy="411480"/>
-          </a:xfrm>
-          <a:prstGeom prst="rect">
-            <a:avLst/>
-          </a:prstGeom>
-          <a:noFill/>
-        </p:spPr>
-        <p:txBody>
-          <a:bodyPr wrap="square">
-            <a:spAutoFit/>
-          </a:bodyPr>
-          <a:lstStyle/>
-          <a:p>
-            <a:pPr algn="l">
-              <a:defRPr sz="1700" b="0">
-                <a:solidFill>
-                  <a:srgbClr val="1F2328"/>
-                </a:solidFill>
-              </a:defRPr>
-            </a:pPr>
-            <a:r>
-              <a:t>validate.php operativo</a:t>
-            </a:r>
-          </a:p>
-        </p:txBody>
-      </p:sp>
-      <p:sp>
-        <p:nvSpPr>
-          <p:cNvPr id="15" name="Rounded Rectangle 14"/>
-          <p:cNvSpPr/>
-          <p:nvPr/>
-        </p:nvSpPr>
-        <p:spPr>
-          <a:xfrm>
-            <a:off x="731520" y="4023360"/>
-            <a:ext cx="320040" cy="320040"/>
-          </a:xfrm>
-          <a:prstGeom prst="roundRect">
-            <a:avLst/>
-          </a:prstGeom>
-          <a:noFill/>
-          <a:ln w="25400">
-            <a:solidFill>
-              <a:srgbClr val="1A7F37"/>
-            </a:solidFill>
-          </a:ln>
-        </p:spPr>
-        <p:style>
-          <a:lnRef idx="1">
-            <a:schemeClr val="accent1"/>
-          </a:lnRef>
-          <a:fillRef idx="3">
-            <a:schemeClr val="accent1"/>
-          </a:fillRef>
-          <a:effectRef idx="2">
-            <a:schemeClr val="accent1"/>
-          </a:effectRef>
-          <a:fontRef idx="minor">
-            <a:schemeClr val="lt1"/>
-          </a:fontRef>
-        </p:style>
-        <p:txBody>
-          <a:bodyPr rtlCol="0" anchor="ctr"/>
-          <a:lstStyle/>
-          <a:p>
-            <a:pPr algn="ctr"/>
-          </a:p>
-        </p:txBody>
-      </p:sp>
-      <p:sp>
-        <p:nvSpPr>
-          <p:cNvPr id="16" name="TextBox 15"/>
-          <p:cNvSpPr txBox="1"/>
-          <p:nvPr/>
-        </p:nvSpPr>
-        <p:spPr>
-          <a:xfrm>
-            <a:off x="1234440" y="3977640"/>
-            <a:ext cx="9601200" cy="411480"/>
-          </a:xfrm>
-          <a:prstGeom prst="rect">
-            <a:avLst/>
-          </a:prstGeom>
-          <a:noFill/>
-        </p:spPr>
-        <p:txBody>
-          <a:bodyPr wrap="square">
-            <a:spAutoFit/>
-          </a:bodyPr>
-          <a:lstStyle/>
-          <a:p>
-            <a:pPr algn="l">
-              <a:defRPr sz="1700" b="0">
-                <a:solidFill>
-                  <a:srgbClr val="1F2328"/>
-                </a:solidFill>
-              </a:defRPr>
-            </a:pPr>
-            <a:r>
-              <a:t>Pruebas OK en todos los módulos</a:t>
-            </a:r>
-          </a:p>
-        </p:txBody>
-      </p:sp>
-      <p:sp>
-        <p:nvSpPr>
-          <p:cNvPr id="17" name="Rounded Rectangle 16"/>
-          <p:cNvSpPr/>
-          <p:nvPr/>
-        </p:nvSpPr>
-        <p:spPr>
-          <a:xfrm>
-            <a:off x="731520" y="4553712"/>
-            <a:ext cx="320040" cy="320040"/>
-          </a:xfrm>
-          <a:prstGeom prst="roundRect">
-            <a:avLst/>
-          </a:prstGeom>
-          <a:noFill/>
-          <a:ln w="25400">
-            <a:solidFill>
-              <a:srgbClr val="1A7F37"/>
-            </a:solidFill>
-          </a:ln>
-        </p:spPr>
-        <p:style>
-          <a:lnRef idx="1">
-            <a:schemeClr val="accent1"/>
-          </a:lnRef>
-          <a:fillRef idx="3">
-            <a:schemeClr val="accent1"/>
-          </a:fillRef>
-          <a:effectRef idx="2">
-            <a:schemeClr val="accent1"/>
-          </a:effectRef>
-          <a:fontRef idx="minor">
-            <a:schemeClr val="lt1"/>
-          </a:fontRef>
-        </p:style>
-        <p:txBody>
-          <a:bodyPr rtlCol="0" anchor="ctr"/>
-          <a:lstStyle/>
-          <a:p>
-            <a:pPr algn="ctr"/>
-          </a:p>
-        </p:txBody>
-      </p:sp>
-      <p:sp>
-        <p:nvSpPr>
-          <p:cNvPr id="18" name="TextBox 17"/>
-          <p:cNvSpPr txBox="1"/>
-          <p:nvPr/>
-        </p:nvSpPr>
-        <p:spPr>
-          <a:xfrm>
-            <a:off x="1234440" y="4507992"/>
-            <a:ext cx="9601200" cy="411480"/>
-          </a:xfrm>
-          <a:prstGeom prst="rect">
-            <a:avLst/>
-          </a:prstGeom>
-          <a:noFill/>
-        </p:spPr>
-        <p:txBody>
-          <a:bodyPr wrap="square">
-            <a:spAutoFit/>
-          </a:bodyPr>
-          <a:lstStyle/>
-          <a:p>
-            <a:pPr algn="l">
-              <a:defRPr sz="1700" b="0">
-                <a:solidFill>
-                  <a:srgbClr val="1F2328"/>
-                </a:solidFill>
-              </a:defRPr>
-            </a:pPr>
-            <a:r>
-              <a:t>Documentación en ficha MOVA</a:t>
-            </a:r>
-          </a:p>
-        </p:txBody>
-      </p:sp>
-    </p:spTree>
-  </p:cSld>
-  <p:clrMapOvr>
-    <a:masterClrMapping/>
-  </p:clrMapOvr>
-</p:sld>
-</file>
-
-<file path=ppt/slides/slide19.xml><?xml version="1.0" encoding="utf-8"?>
 <p:sld xmlns:a="http://schemas.openxmlformats.org/drawingml/2006/main" xmlns:p="http://schemas.openxmlformats.org/presentationml/2006/main" xmlns:r="http://schemas.openxmlformats.org/officeDocument/2006/relationships">
   <p:cSld>
     <p:bg>
@@ -8142,7 +4278,7 @@
         </p:nvSpPr>
         <p:spPr>
           <a:xfrm>
-            <a:off x="731520" y="1828800"/>
+            <a:off x="731520" y="2011680"/>
             <a:ext cx="10515600" cy="640080"/>
           </a:xfrm>
           <a:prstGeom prst="rect">
@@ -8164,7 +4300,7 @@
               </a:defRPr>
             </a:pPr>
             <a:r>
-              <a:t>Después del login</a:t>
+              <a:t>Tareas en el organizador</a:t>
             </a:r>
           </a:p>
         </p:txBody>
@@ -8177,77 +4313,39 @@
         </p:nvSpPr>
         <p:spPr>
           <a:xfrm>
-            <a:off x="731520" y="2743200"/>
-            <a:ext cx="10515600" cy="1280160"/>
-          </a:xfrm>
-          <a:prstGeom prst="rect">
-            <a:avLst/>
-          </a:prstGeom>
-          <a:noFill/>
-        </p:spPr>
-        <p:txBody>
-          <a:bodyPr wrap="square">
-            <a:spAutoFit/>
-          </a:bodyPr>
-          <a:lstStyle/>
-          <a:p>
-            <a:pPr algn="l">
-              <a:defRPr sz="2200" b="0">
+            <a:off x="731520" y="2926080"/>
+            <a:ext cx="10515600" cy="1371600"/>
+          </a:xfrm>
+          <a:prstGeom prst="rect">
+            <a:avLst/>
+          </a:prstGeom>
+          <a:noFill/>
+        </p:spPr>
+        <p:txBody>
+          <a:bodyPr wrap="square">
+            <a:spAutoFit/>
+          </a:bodyPr>
+          <a:lstStyle/>
+          <a:p>
+            <a:pPr algn="l">
+              <a:defRPr sz="2000" b="0">
                 <a:solidFill>
                   <a:srgbClr val="E8F6F8"/>
                 </a:solidFill>
               </a:defRPr>
             </a:pPr>
             <a:r>
-              <a:t>Gantt Semana 2–3:</a:t>
+              <a:t>7 tareas [MOVA] D1…D7 en el calendario</a:t>
             </a:r>
             <a:br/>
             <a:br/>
             <a:r>
-              <a:t>• Hito 3.1 — Modelar mova_datos (MySQL)</a:t>
+              <a:t>index.html?tarea=mkof/01</a:t>
             </a:r>
             <a:br/>
-            <a:r>
-              <a:t>• Hito 3.2 — MySQL fuente → Sheets vista</a:t>
-            </a:r>
             <a:br/>
             <a:r>
-              <a:t>• Hito 4.0 — Rutinas de operación</a:t>
-            </a:r>
-          </a:p>
-        </p:txBody>
-      </p:sp>
-      <p:sp>
-        <p:nvSpPr>
-          <p:cNvPr id="4" name="TextBox 3"/>
-          <p:cNvSpPr txBox="1"/>
-          <p:nvPr/>
-        </p:nvSpPr>
-        <p:spPr>
-          <a:xfrm>
-            <a:off x="731520" y="4754880"/>
-            <a:ext cx="10515600" cy="548640"/>
-          </a:xfrm>
-          <a:prstGeom prst="rect">
-            <a:avLst/>
-          </a:prstGeom>
-          <a:noFill/>
-        </p:spPr>
-        <p:txBody>
-          <a:bodyPr wrap="square">
-            <a:spAutoFit/>
-          </a:bodyPr>
-          <a:lstStyle/>
-          <a:p>
-            <a:pPr algn="l">
-              <a:defRPr sz="1600" b="0">
-                <a:solidFill>
-                  <a:srgbClr val="A8D8DC"/>
-                </a:solidFill>
-              </a:defRPr>
-            </a:pPr>
-            <a:r>
-              <a:t>Guía detallada: mova-auth-guia.html · PDF MOVA-Auth-Login-Unificado</a:t>
+              <a:t>Recarga el organizador tras git pull</a:t>
             </a:r>
           </a:p>
         </p:txBody>
@@ -8351,7 +4449,7 @@
               </a:defRPr>
             </a:pPr>
             <a:r>
-              <a:t>¿Qué vamos a lograr?</a:t>
+              <a:t>Contexto</a:t>
             </a:r>
           </a:p>
         </p:txBody>
@@ -8386,7 +4484,7 @@
               </a:defRPr>
             </a:pPr>
             <a:r>
-              <a:t>Sin migrar de GoDaddy</a:t>
+              <a:t>https://acme-chile.cl/</a:t>
             </a:r>
           </a:p>
         </p:txBody>
@@ -8421,7 +4519,7 @@
               </a:defRPr>
             </a:pPr>
             <a:r>
-              <a:t>•  Un solo login para todos los módulos M (MAESTRO, INGRESOS, EGRESOS…).</a:t>
+              <a:t>•  Sitio en producción: acme-chile.cl (GoDaddy + Cloudflare).</a:t>
             </a:r>
           </a:p>
         </p:txBody>
@@ -8434,7 +4532,7 @@
         </p:nvSpPr>
         <p:spPr>
           <a:xfrm>
-            <a:off x="822960" y="1938528"/>
+            <a:off x="822960" y="1920240"/>
             <a:ext cx="10515600" cy="502920"/>
           </a:xfrm>
           <a:prstGeom prst="rect">
@@ -8456,7 +4554,7 @@
               </a:defRPr>
             </a:pPr>
             <a:r>
-              <a:t>•  mova_auth como único validador — ningún módulo valida por su cuenta.</a:t>
+              <a:t>•  Problema: login fragmentado — Google + mova_auth + JWT en localStorage.</a:t>
             </a:r>
           </a:p>
         </p:txBody>
@@ -8469,7 +4567,7 @@
         </p:nvSpPr>
         <p:spPr>
           <a:xfrm>
-            <a:off x="822960" y="2505456"/>
+            <a:off x="822960" y="2468880"/>
             <a:ext cx="10515600" cy="502920"/>
           </a:xfrm>
           <a:prstGeom prst="rect">
@@ -8491,7 +4589,7 @@
               </a:defRPr>
             </a:pPr>
             <a:r>
-              <a:t>•  Sesión en cookie httpOnly + Secure (PHP en GoDaddy), no JWT en localStorage.</a:t>
+              <a:t>•  Meta: un solo login, cookie httpOnly, mova_auth valida todos los módulos M.</a:t>
             </a:r>
           </a:p>
         </p:txBody>
@@ -8504,7 +4602,7 @@
         </p:nvSpPr>
         <p:spPr>
           <a:xfrm>
-            <a:off x="822960" y="3072384"/>
+            <a:off x="822960" y="3017520"/>
             <a:ext cx="10515600" cy="502920"/>
           </a:xfrm>
           <a:prstGeom prst="rect">
@@ -8526,7 +4624,7 @@
               </a:defRPr>
             </a:pPr>
             <a:r>
-              <a:t>•  Duración estimada: 8–10 días hábiles (Fases A → D).</a:t>
+              <a:t>•  7 pasos = 7 días hábiles (sin migrar de hosting).</a:t>
             </a:r>
           </a:p>
         </p:txBody>
@@ -8539,7 +4637,7 @@
         </p:nvSpPr>
         <p:spPr>
           <a:xfrm>
-            <a:off x="822960" y="3639312"/>
+            <a:off x="822960" y="3566160"/>
             <a:ext cx="10515600" cy="502920"/>
           </a:xfrm>
           <a:prstGeom prst="rect">
@@ -8561,91 +4659,7 @@
               </a:defRPr>
             </a:pPr>
             <a:r>
-              <a:t>•  Prerrequisito: inventario hecho antes de tocar código en producción.</a:t>
-            </a:r>
-          </a:p>
-        </p:txBody>
-      </p:sp>
-      <p:sp>
-        <p:nvSpPr>
-          <p:cNvPr id="10" name="Rounded Rectangle 9"/>
-          <p:cNvSpPr/>
-          <p:nvPr/>
-        </p:nvSpPr>
-        <p:spPr>
-          <a:xfrm>
-            <a:off x="640080" y="4572000"/>
-            <a:ext cx="10789920" cy="1371600"/>
-          </a:xfrm>
-          <a:prstGeom prst="roundRect">
-            <a:avLst/>
-          </a:prstGeom>
-          <a:solidFill>
-            <a:srgbClr val="FFF8C5"/>
-          </a:solidFill>
-          <a:ln>
-            <a:solidFill>
-              <a:srgbClr val="D4A72C"/>
-            </a:solidFill>
-          </a:ln>
-        </p:spPr>
-        <p:style>
-          <a:lnRef idx="1">
-            <a:schemeClr val="accent1"/>
-          </a:lnRef>
-          <a:fillRef idx="3">
-            <a:schemeClr val="accent1"/>
-          </a:fillRef>
-          <a:effectRef idx="2">
-            <a:schemeClr val="accent1"/>
-          </a:effectRef>
-          <a:fontRef idx="minor">
-            <a:schemeClr val="lt1"/>
-          </a:fontRef>
-        </p:style>
-        <p:txBody>
-          <a:bodyPr rtlCol="0" anchor="ctr"/>
-          <a:lstStyle/>
-          <a:p>
-            <a:pPr algn="ctr"/>
-          </a:p>
-        </p:txBody>
-      </p:sp>
-      <p:sp>
-        <p:nvSpPr>
-          <p:cNvPr id="11" name="TextBox 10"/>
-          <p:cNvSpPr txBox="1"/>
-          <p:nvPr/>
-        </p:nvSpPr>
-        <p:spPr>
-          <a:xfrm>
-            <a:off x="868680" y="4754880"/>
-            <a:ext cx="10332720" cy="1005840"/>
-          </a:xfrm>
-          <a:prstGeom prst="rect">
-            <a:avLst/>
-          </a:prstGeom>
-          <a:noFill/>
-        </p:spPr>
-        <p:txBody>
-          <a:bodyPr wrap="square">
-            <a:spAutoFit/>
-          </a:bodyPr>
-          <a:lstStyle/>
-          <a:p>
-            <a:pPr algn="l">
-              <a:defRPr sz="1600" b="0">
-                <a:solidFill>
-                  <a:srgbClr val="2A4A4E"/>
-                </a:solidFill>
-              </a:defRPr>
-            </a:pPr>
-            <a:r>
-              <a:t>⚠  El problema no es falta de validación — es fragmentación:</a:t>
-            </a:r>
-            <a:br/>
-            <a:r>
-              <a:t>Google + mova_auth + permisos parciales + JWT en el navegador.</a:t>
+              <a:t>•  Día 1: solo inventario — no tocar código.</a:t>
             </a:r>
           </a:p>
         </p:txBody>
@@ -8749,7 +4763,7 @@
               </a:defRPr>
             </a:pPr>
             <a:r>
-              <a:t>Mapa de fases (12 pasos)</a:t>
+              <a:t>Mapa 7 días</a:t>
             </a:r>
           </a:p>
         </p:txBody>
@@ -8784,53 +4798,43 @@
               </a:defRPr>
             </a:pPr>
             <a:r>
-              <a:t>Seguir en orden — un módulo a la vez</a:t>
-            </a:r>
-          </a:p>
-        </p:txBody>
-      </p:sp>
-      <p:sp>
-        <p:nvSpPr>
-          <p:cNvPr id="5" name="Rounded Rectangle 4"/>
-          <p:cNvSpPr/>
-          <p:nvPr/>
-        </p:nvSpPr>
-        <p:spPr>
-          <a:xfrm>
-            <a:off x="685800" y="1325880"/>
-            <a:ext cx="10789920" cy="1051560"/>
-          </a:xfrm>
-          <a:prstGeom prst="roundRect">
-            <a:avLst/>
-          </a:prstGeom>
-          <a:solidFill>
-            <a:srgbClr val="FFFFFF"/>
-          </a:solidFill>
-          <a:ln>
-            <a:solidFill>
-              <a:srgbClr val="4A7A80"/>
-            </a:solidFill>
-          </a:ln>
-        </p:spPr>
-        <p:style>
-          <a:lnRef idx="1">
-            <a:schemeClr val="accent1"/>
-          </a:lnRef>
-          <a:fillRef idx="3">
-            <a:schemeClr val="accent1"/>
-          </a:fillRef>
-          <a:effectRef idx="2">
-            <a:schemeClr val="accent1"/>
-          </a:effectRef>
-          <a:fontRef idx="minor">
-            <a:schemeClr val="lt1"/>
-          </a:fontRef>
-        </p:style>
-        <p:txBody>
-          <a:bodyPr rtlCol="0" anchor="ctr"/>
-          <a:lstStyle/>
-          <a:p>
-            <a:pPr algn="ctr"/>
+              <a:t>12 pasos originales comprimidos en 7</a:t>
+            </a:r>
+          </a:p>
+        </p:txBody>
+      </p:sp>
+      <p:sp>
+        <p:nvSpPr>
+          <p:cNvPr id="5" name="TextBox 4"/>
+          <p:cNvSpPr txBox="1"/>
+          <p:nvPr/>
+        </p:nvSpPr>
+        <p:spPr>
+          <a:xfrm>
+            <a:off x="731520" y="1280160"/>
+            <a:ext cx="1097280" cy="320040"/>
+          </a:xfrm>
+          <a:prstGeom prst="rect">
+            <a:avLst/>
+          </a:prstGeom>
+          <a:noFill/>
+        </p:spPr>
+        <p:txBody>
+          <a:bodyPr wrap="square">
+            <a:spAutoFit/>
+          </a:bodyPr>
+          <a:lstStyle/>
+          <a:p>
+            <a:pPr algn="l">
+              <a:defRPr sz="1400" b="1">
+                <a:solidFill>
+                  <a:srgbClr val="4A7A80"/>
+                </a:solidFill>
+              </a:defRPr>
+            </a:pPr>
+            <a:r>
+              <a:t>Día 1</a:t>
+            </a:r>
           </a:p>
         </p:txBody>
       </p:sp>
@@ -8842,8 +4846,78 @@
         </p:nvSpPr>
         <p:spPr>
           <a:xfrm>
-            <a:off x="868680" y="1435608"/>
-            <a:ext cx="1097280" cy="365760"/>
+            <a:off x="1828800" y="1280160"/>
+            <a:ext cx="5943600" cy="320040"/>
+          </a:xfrm>
+          <a:prstGeom prst="rect">
+            <a:avLst/>
+          </a:prstGeom>
+          <a:noFill/>
+        </p:spPr>
+        <p:txBody>
+          <a:bodyPr wrap="square">
+            <a:spAutoFit/>
+          </a:bodyPr>
+          <a:lstStyle/>
+          <a:p>
+            <a:pPr algn="l">
+              <a:defRPr sz="1500" b="1">
+                <a:solidFill>
+                  <a:srgbClr val="1F2328"/>
+                </a:solidFill>
+              </a:defRPr>
+            </a:pPr>
+            <a:r>
+              <a:t>Inventario módulos M</a:t>
+            </a:r>
+          </a:p>
+        </p:txBody>
+      </p:sp>
+      <p:sp>
+        <p:nvSpPr>
+          <p:cNvPr id="7" name="TextBox 6"/>
+          <p:cNvSpPr txBox="1"/>
+          <p:nvPr/>
+        </p:nvSpPr>
+        <p:spPr>
+          <a:xfrm>
+            <a:off x="8229600" y="1280160"/>
+            <a:ext cx="3200400" cy="320040"/>
+          </a:xfrm>
+          <a:prstGeom prst="rect">
+            <a:avLst/>
+          </a:prstGeom>
+          <a:noFill/>
+        </p:spPr>
+        <p:txBody>
+          <a:bodyPr wrap="square">
+            <a:spAutoFit/>
+          </a:bodyPr>
+          <a:lstStyle/>
+          <a:p>
+            <a:pPr algn="l">
+              <a:defRPr sz="1300" b="0">
+                <a:solidFill>
+                  <a:srgbClr val="656D76"/>
+                </a:solidFill>
+              </a:defRPr>
+            </a:pPr>
+            <a:r>
+              <a:t>lun 6 jul</a:t>
+            </a:r>
+          </a:p>
+        </p:txBody>
+      </p:sp>
+      <p:sp>
+        <p:nvSpPr>
+          <p:cNvPr id="8" name="TextBox 7"/>
+          <p:cNvSpPr txBox="1"/>
+          <p:nvPr/>
+        </p:nvSpPr>
+        <p:spPr>
+          <a:xfrm>
+            <a:off x="731520" y="1938528"/>
+            <a:ext cx="1097280" cy="320040"/>
           </a:xfrm>
           <a:prstGeom prst="rect">
             <a:avLst/>
@@ -8864,56 +4938,56 @@
               </a:defRPr>
             </a:pPr>
             <a:r>
-              <a:t>Fase A</a:t>
-            </a:r>
-          </a:p>
-        </p:txBody>
-      </p:sp>
-      <p:sp>
-        <p:nvSpPr>
-          <p:cNvPr id="7" name="TextBox 6"/>
-          <p:cNvSpPr txBox="1"/>
-          <p:nvPr/>
-        </p:nvSpPr>
-        <p:spPr>
-          <a:xfrm>
-            <a:off x="1920240" y="1399032"/>
-            <a:ext cx="4572000" cy="365760"/>
-          </a:xfrm>
-          <a:prstGeom prst="rect">
-            <a:avLst/>
-          </a:prstGeom>
-          <a:noFill/>
-        </p:spPr>
-        <p:txBody>
-          <a:bodyPr wrap="square">
-            <a:spAutoFit/>
-          </a:bodyPr>
-          <a:lstStyle/>
-          <a:p>
-            <a:pPr algn="l">
-              <a:defRPr sz="1800" b="1">
-                <a:solidFill>
-                  <a:srgbClr val="2A4A4E"/>
-                </a:solidFill>
-              </a:defRPr>
-            </a:pPr>
-            <a:r>
-              <a:t>Inventario</a:t>
-            </a:r>
-          </a:p>
-        </p:txBody>
-      </p:sp>
-      <p:sp>
-        <p:nvSpPr>
-          <p:cNvPr id="8" name="TextBox 7"/>
-          <p:cNvSpPr txBox="1"/>
-          <p:nvPr/>
-        </p:nvSpPr>
-        <p:spPr>
-          <a:xfrm>
-            <a:off x="6858000" y="1417320"/>
-            <a:ext cx="2286000" cy="320040"/>
+              <a:t>Día 2</a:t>
+            </a:r>
+          </a:p>
+        </p:txBody>
+      </p:sp>
+      <p:sp>
+        <p:nvSpPr>
+          <p:cNvPr id="9" name="TextBox 8"/>
+          <p:cNvSpPr txBox="1"/>
+          <p:nvPr/>
+        </p:nvSpPr>
+        <p:spPr>
+          <a:xfrm>
+            <a:off x="1828800" y="1938528"/>
+            <a:ext cx="5943600" cy="320040"/>
+          </a:xfrm>
+          <a:prstGeom prst="rect">
+            <a:avLst/>
+          </a:prstGeom>
+          <a:noFill/>
+        </p:spPr>
+        <p:txBody>
+          <a:bodyPr wrap="square">
+            <a:spAutoFit/>
+          </a:bodyPr>
+          <a:lstStyle/>
+          <a:p>
+            <a:pPr algn="l">
+              <a:defRPr sz="1500" b="1">
+                <a:solidFill>
+                  <a:srgbClr val="1F2328"/>
+                </a:solidFill>
+              </a:defRPr>
+            </a:pPr>
+            <a:r>
+              <a:t>Acuerdo + diseño mova_auth</a:t>
+            </a:r>
+          </a:p>
+        </p:txBody>
+      </p:sp>
+      <p:sp>
+        <p:nvSpPr>
+          <p:cNvPr id="10" name="TextBox 9"/>
+          <p:cNvSpPr txBox="1"/>
+          <p:nvPr/>
+        </p:nvSpPr>
+        <p:spPr>
+          <a:xfrm>
+            <a:off x="8229600" y="1938528"/>
+            <a:ext cx="3200400" cy="320040"/>
           </a:xfrm>
           <a:prstGeom prst="rect">
             <a:avLst/>
@@ -8934,101 +5008,126 @@
               </a:defRPr>
             </a:pPr>
             <a:r>
-              <a:t>Día 1</a:t>
-            </a:r>
-          </a:p>
-        </p:txBody>
-      </p:sp>
-      <p:sp>
-        <p:nvSpPr>
-          <p:cNvPr id="9" name="TextBox 8"/>
-          <p:cNvSpPr txBox="1"/>
-          <p:nvPr/>
-        </p:nvSpPr>
-        <p:spPr>
-          <a:xfrm>
-            <a:off x="1920240" y="1783080"/>
-            <a:ext cx="8686800" cy="457200"/>
-          </a:xfrm>
-          <a:prstGeom prst="rect">
-            <a:avLst/>
-          </a:prstGeom>
-          <a:noFill/>
-        </p:spPr>
-        <p:txBody>
-          <a:bodyPr wrap="square">
-            <a:spAutoFit/>
-          </a:bodyPr>
-          <a:lstStyle/>
-          <a:p>
-            <a:pPr algn="l">
-              <a:defRPr sz="1400" b="0">
+              <a:t>mar 7 jul</a:t>
+            </a:r>
+          </a:p>
+        </p:txBody>
+      </p:sp>
+      <p:sp>
+        <p:nvSpPr>
+          <p:cNvPr id="11" name="TextBox 10"/>
+          <p:cNvSpPr txBox="1"/>
+          <p:nvPr/>
+        </p:nvSpPr>
+        <p:spPr>
+          <a:xfrm>
+            <a:off x="731520" y="2596896"/>
+            <a:ext cx="1097280" cy="320040"/>
+          </a:xfrm>
+          <a:prstGeom prst="rect">
+            <a:avLst/>
+          </a:prstGeom>
+          <a:noFill/>
+        </p:spPr>
+        <p:txBody>
+          <a:bodyPr wrap="square">
+            <a:spAutoFit/>
+          </a:bodyPr>
+          <a:lstStyle/>
+          <a:p>
+            <a:pPr algn="l">
+              <a:defRPr sz="1400" b="1">
+                <a:solidFill>
+                  <a:srgbClr val="4A7A80"/>
+                </a:solidFill>
+              </a:defRPr>
+            </a:pPr>
+            <a:r>
+              <a:t>Día 3</a:t>
+            </a:r>
+          </a:p>
+        </p:txBody>
+      </p:sp>
+      <p:sp>
+        <p:nvSpPr>
+          <p:cNvPr id="12" name="TextBox 11"/>
+          <p:cNvSpPr txBox="1"/>
+          <p:nvPr/>
+        </p:nvSpPr>
+        <p:spPr>
+          <a:xfrm>
+            <a:off x="1828800" y="2596896"/>
+            <a:ext cx="5943600" cy="320040"/>
+          </a:xfrm>
+          <a:prstGeom prst="rect">
+            <a:avLst/>
+          </a:prstGeom>
+          <a:noFill/>
+        </p:spPr>
+        <p:txBody>
+          <a:bodyPr wrap="square">
+            <a:spAutoFit/>
+          </a:bodyPr>
+          <a:lstStyle/>
+          <a:p>
+            <a:pPr algn="l">
+              <a:defRPr sz="1500" b="1">
                 <a:solidFill>
                   <a:srgbClr val="1F2328"/>
                 </a:solidFill>
               </a:defRPr>
             </a:pPr>
             <a:r>
-              <a:t>Pasos 1–2 · Listar módulos y flujos actuales</a:t>
-            </a:r>
-          </a:p>
-        </p:txBody>
-      </p:sp>
-      <p:sp>
-        <p:nvSpPr>
-          <p:cNvPr id="10" name="Rounded Rectangle 9"/>
-          <p:cNvSpPr/>
-          <p:nvPr/>
-        </p:nvSpPr>
-        <p:spPr>
-          <a:xfrm>
-            <a:off x="685800" y="2496312"/>
-            <a:ext cx="10789920" cy="1051560"/>
-          </a:xfrm>
-          <a:prstGeom prst="roundRect">
-            <a:avLst/>
-          </a:prstGeom>
-          <a:solidFill>
-            <a:srgbClr val="FFFFFF"/>
-          </a:solidFill>
-          <a:ln>
-            <a:solidFill>
-              <a:srgbClr val="4A7A80"/>
-            </a:solidFill>
-          </a:ln>
-        </p:spPr>
-        <p:style>
-          <a:lnRef idx="1">
-            <a:schemeClr val="accent1"/>
-          </a:lnRef>
-          <a:fillRef idx="3">
-            <a:schemeClr val="accent1"/>
-          </a:fillRef>
-          <a:effectRef idx="2">
-            <a:schemeClr val="accent1"/>
-          </a:effectRef>
-          <a:fontRef idx="minor">
-            <a:schemeClr val="lt1"/>
-          </a:fontRef>
-        </p:style>
-        <p:txBody>
-          <a:bodyPr rtlCol="0" anchor="ctr"/>
-          <a:lstStyle/>
-          <a:p>
-            <a:pPr algn="ctr"/>
-          </a:p>
-        </p:txBody>
-      </p:sp>
-      <p:sp>
-        <p:nvSpPr>
-          <p:cNvPr id="11" name="TextBox 10"/>
-          <p:cNvSpPr txBox="1"/>
-          <p:nvPr/>
-        </p:nvSpPr>
-        <p:spPr>
-          <a:xfrm>
-            <a:off x="868680" y="2606040"/>
-            <a:ext cx="1097280" cy="365760"/>
+              <a:t>Carpeta + archivos en servidor</a:t>
+            </a:r>
+          </a:p>
+        </p:txBody>
+      </p:sp>
+      <p:sp>
+        <p:nvSpPr>
+          <p:cNvPr id="13" name="TextBox 12"/>
+          <p:cNvSpPr txBox="1"/>
+          <p:nvPr/>
+        </p:nvSpPr>
+        <p:spPr>
+          <a:xfrm>
+            <a:off x="8229600" y="2596896"/>
+            <a:ext cx="3200400" cy="320040"/>
+          </a:xfrm>
+          <a:prstGeom prst="rect">
+            <a:avLst/>
+          </a:prstGeom>
+          <a:noFill/>
+        </p:spPr>
+        <p:txBody>
+          <a:bodyPr wrap="square">
+            <a:spAutoFit/>
+          </a:bodyPr>
+          <a:lstStyle/>
+          <a:p>
+            <a:pPr algn="l">
+              <a:defRPr sz="1300" b="0">
+                <a:solidFill>
+                  <a:srgbClr val="656D76"/>
+                </a:solidFill>
+              </a:defRPr>
+            </a:pPr>
+            <a:r>
+              <a:t>mié 8 jul</a:t>
+            </a:r>
+          </a:p>
+        </p:txBody>
+      </p:sp>
+      <p:sp>
+        <p:nvSpPr>
+          <p:cNvPr id="14" name="TextBox 13"/>
+          <p:cNvSpPr txBox="1"/>
+          <p:nvPr/>
+        </p:nvSpPr>
+        <p:spPr>
+          <a:xfrm>
+            <a:off x="731520" y="3255264"/>
+            <a:ext cx="1097280" cy="320040"/>
           </a:xfrm>
           <a:prstGeom prst="rect">
             <a:avLst/>
@@ -9049,56 +5148,56 @@
               </a:defRPr>
             </a:pPr>
             <a:r>
-              <a:t>Fase B</a:t>
-            </a:r>
-          </a:p>
-        </p:txBody>
-      </p:sp>
-      <p:sp>
-        <p:nvSpPr>
-          <p:cNvPr id="12" name="TextBox 11"/>
-          <p:cNvSpPr txBox="1"/>
-          <p:nvPr/>
-        </p:nvSpPr>
-        <p:spPr>
-          <a:xfrm>
-            <a:off x="1920240" y="2569464"/>
-            <a:ext cx="4572000" cy="365760"/>
-          </a:xfrm>
-          <a:prstGeom prst="rect">
-            <a:avLst/>
-          </a:prstGeom>
-          <a:noFill/>
-        </p:spPr>
-        <p:txBody>
-          <a:bodyPr wrap="square">
-            <a:spAutoFit/>
-          </a:bodyPr>
-          <a:lstStyle/>
-          <a:p>
-            <a:pPr algn="l">
-              <a:defRPr sz="1800" b="1">
-                <a:solidFill>
-                  <a:srgbClr val="2A4A4E"/>
-                </a:solidFill>
-              </a:defRPr>
-            </a:pPr>
-            <a:r>
-              <a:t>Diseñar mova_auth</a:t>
-            </a:r>
-          </a:p>
-        </p:txBody>
-      </p:sp>
-      <p:sp>
-        <p:nvSpPr>
-          <p:cNvPr id="13" name="TextBox 12"/>
-          <p:cNvSpPr txBox="1"/>
-          <p:nvPr/>
-        </p:nvSpPr>
-        <p:spPr>
-          <a:xfrm>
-            <a:off x="6858000" y="2587752"/>
-            <a:ext cx="2286000" cy="320040"/>
+              <a:t>Día 4</a:t>
+            </a:r>
+          </a:p>
+        </p:txBody>
+      </p:sp>
+      <p:sp>
+        <p:nvSpPr>
+          <p:cNvPr id="15" name="TextBox 14"/>
+          <p:cNvSpPr txBox="1"/>
+          <p:nvPr/>
+        </p:nvSpPr>
+        <p:spPr>
+          <a:xfrm>
+            <a:off x="1828800" y="3255264"/>
+            <a:ext cx="5943600" cy="320040"/>
+          </a:xfrm>
+          <a:prstGeom prst="rect">
+            <a:avLst/>
+          </a:prstGeom>
+          <a:noFill/>
+        </p:spPr>
+        <p:txBody>
+          <a:bodyPr wrap="square">
+            <a:spAutoFit/>
+          </a:bodyPr>
+          <a:lstStyle/>
+          <a:p>
+            <a:pPr algn="l">
+              <a:defRPr sz="1500" b="1">
+                <a:solidFill>
+                  <a:srgbClr val="1F2328"/>
+                </a:solidFill>
+              </a:defRPr>
+            </a:pPr>
+            <a:r>
+              <a:t>Login único + cookie httpOnly</a:t>
+            </a:r>
+          </a:p>
+        </p:txBody>
+      </p:sp>
+      <p:sp>
+        <p:nvSpPr>
+          <p:cNvPr id="16" name="TextBox 15"/>
+          <p:cNvSpPr txBox="1"/>
+          <p:nvPr/>
+        </p:nvSpPr>
+        <p:spPr>
+          <a:xfrm>
+            <a:off x="8229600" y="3255264"/>
+            <a:ext cx="3200400" cy="320040"/>
           </a:xfrm>
           <a:prstGeom prst="rect">
             <a:avLst/>
@@ -9119,101 +5218,126 @@
               </a:defRPr>
             </a:pPr>
             <a:r>
-              <a:t>Días 2–3</a:t>
-            </a:r>
-          </a:p>
-        </p:txBody>
-      </p:sp>
-      <p:sp>
-        <p:nvSpPr>
-          <p:cNvPr id="14" name="TextBox 13"/>
-          <p:cNvSpPr txBox="1"/>
-          <p:nvPr/>
-        </p:nvSpPr>
-        <p:spPr>
-          <a:xfrm>
-            <a:off x="1920240" y="2953512"/>
-            <a:ext cx="8686800" cy="457200"/>
-          </a:xfrm>
-          <a:prstGeom prst="rect">
-            <a:avLst/>
-          </a:prstGeom>
-          <a:noFill/>
-        </p:spPr>
-        <p:txBody>
-          <a:bodyPr wrap="square">
-            <a:spAutoFit/>
-          </a:bodyPr>
-          <a:lstStyle/>
-          <a:p>
-            <a:pPr algn="l">
-              <a:defRPr sz="1400" b="0">
+              <a:t>jue 9 jul</a:t>
+            </a:r>
+          </a:p>
+        </p:txBody>
+      </p:sp>
+      <p:sp>
+        <p:nvSpPr>
+          <p:cNvPr id="17" name="TextBox 16"/>
+          <p:cNvSpPr txBox="1"/>
+          <p:nvPr/>
+        </p:nvSpPr>
+        <p:spPr>
+          <a:xfrm>
+            <a:off x="731520" y="3913632"/>
+            <a:ext cx="1097280" cy="320040"/>
+          </a:xfrm>
+          <a:prstGeom prst="rect">
+            <a:avLst/>
+          </a:prstGeom>
+          <a:noFill/>
+        </p:spPr>
+        <p:txBody>
+          <a:bodyPr wrap="square">
+            <a:spAutoFit/>
+          </a:bodyPr>
+          <a:lstStyle/>
+          <a:p>
+            <a:pPr algn="l">
+              <a:defRPr sz="1400" b="1">
+                <a:solidFill>
+                  <a:srgbClr val="4A7A80"/>
+                </a:solidFill>
+              </a:defRPr>
+            </a:pPr>
+            <a:r>
+              <a:t>Día 5</a:t>
+            </a:r>
+          </a:p>
+        </p:txBody>
+      </p:sp>
+      <p:sp>
+        <p:nvSpPr>
+          <p:cNvPr id="18" name="TextBox 17"/>
+          <p:cNvSpPr txBox="1"/>
+          <p:nvPr/>
+        </p:nvSpPr>
+        <p:spPr>
+          <a:xfrm>
+            <a:off x="1828800" y="3913632"/>
+            <a:ext cx="5943600" cy="320040"/>
+          </a:xfrm>
+          <a:prstGeom prst="rect">
+            <a:avLst/>
+          </a:prstGeom>
+          <a:noFill/>
+        </p:spPr>
+        <p:txBody>
+          <a:bodyPr wrap="square">
+            <a:spAutoFit/>
+          </a:bodyPr>
+          <a:lstStyle/>
+          <a:p>
+            <a:pPr algn="l">
+              <a:defRPr sz="1500" b="1">
                 <a:solidFill>
                   <a:srgbClr val="1F2328"/>
                 </a:solidFill>
               </a:defRPr>
             </a:pPr>
             <a:r>
-              <a:t>Pasos 3–5 · Carpeta + archivos PHP núcleo</a:t>
-            </a:r>
-          </a:p>
-        </p:txBody>
-      </p:sp>
-      <p:sp>
-        <p:nvSpPr>
-          <p:cNvPr id="15" name="Rounded Rectangle 14"/>
-          <p:cNvSpPr/>
-          <p:nvPr/>
-        </p:nvSpPr>
-        <p:spPr>
-          <a:xfrm>
-            <a:off x="685800" y="3666744"/>
-            <a:ext cx="10789920" cy="1051560"/>
-          </a:xfrm>
-          <a:prstGeom prst="roundRect">
-            <a:avLst/>
-          </a:prstGeom>
-          <a:solidFill>
-            <a:srgbClr val="FFFFFF"/>
-          </a:solidFill>
-          <a:ln>
-            <a:solidFill>
-              <a:srgbClr val="4A7A80"/>
-            </a:solidFill>
-          </a:ln>
-        </p:spPr>
-        <p:style>
-          <a:lnRef idx="1">
-            <a:schemeClr val="accent1"/>
-          </a:lnRef>
-          <a:fillRef idx="3">
-            <a:schemeClr val="accent1"/>
-          </a:fillRef>
-          <a:effectRef idx="2">
-            <a:schemeClr val="accent1"/>
-          </a:effectRef>
-          <a:fontRef idx="minor">
-            <a:schemeClr val="lt1"/>
-          </a:fontRef>
-        </p:style>
-        <p:txBody>
-          <a:bodyPr rtlCol="0" anchor="ctr"/>
-          <a:lstStyle/>
-          <a:p>
-            <a:pPr algn="ctr"/>
-          </a:p>
-        </p:txBody>
-      </p:sp>
-      <p:sp>
-        <p:nvSpPr>
-          <p:cNvPr id="16" name="TextBox 15"/>
-          <p:cNvSpPr txBox="1"/>
-          <p:nvPr/>
-        </p:nvSpPr>
-        <p:spPr>
-          <a:xfrm>
-            <a:off x="868680" y="3776472"/>
-            <a:ext cx="1097280" cy="365760"/>
+              <a:t>validate.php + 1er módulo</a:t>
+            </a:r>
+          </a:p>
+        </p:txBody>
+      </p:sp>
+      <p:sp>
+        <p:nvSpPr>
+          <p:cNvPr id="19" name="TextBox 18"/>
+          <p:cNvSpPr txBox="1"/>
+          <p:nvPr/>
+        </p:nvSpPr>
+        <p:spPr>
+          <a:xfrm>
+            <a:off x="8229600" y="3913632"/>
+            <a:ext cx="3200400" cy="320040"/>
+          </a:xfrm>
+          <a:prstGeom prst="rect">
+            <a:avLst/>
+          </a:prstGeom>
+          <a:noFill/>
+        </p:spPr>
+        <p:txBody>
+          <a:bodyPr wrap="square">
+            <a:spAutoFit/>
+          </a:bodyPr>
+          <a:lstStyle/>
+          <a:p>
+            <a:pPr algn="l">
+              <a:defRPr sz="1300" b="0">
+                <a:solidFill>
+                  <a:srgbClr val="656D76"/>
+                </a:solidFill>
+              </a:defRPr>
+            </a:pPr>
+            <a:r>
+              <a:t>vie 10 jul</a:t>
+            </a:r>
+          </a:p>
+        </p:txBody>
+      </p:sp>
+      <p:sp>
+        <p:nvSpPr>
+          <p:cNvPr id="20" name="TextBox 19"/>
+          <p:cNvSpPr txBox="1"/>
+          <p:nvPr/>
+        </p:nvSpPr>
+        <p:spPr>
+          <a:xfrm>
+            <a:off x="731520" y="4572000"/>
+            <a:ext cx="1097280" cy="320040"/>
           </a:xfrm>
           <a:prstGeom prst="rect">
             <a:avLst/>
@@ -9234,56 +5358,56 @@
               </a:defRPr>
             </a:pPr>
             <a:r>
-              <a:t>Fase C</a:t>
-            </a:r>
-          </a:p>
-        </p:txBody>
-      </p:sp>
-      <p:sp>
-        <p:nvSpPr>
-          <p:cNvPr id="17" name="TextBox 16"/>
-          <p:cNvSpPr txBox="1"/>
-          <p:nvPr/>
-        </p:nvSpPr>
-        <p:spPr>
-          <a:xfrm>
-            <a:off x="1920240" y="3739896"/>
-            <a:ext cx="4572000" cy="365760"/>
-          </a:xfrm>
-          <a:prstGeom prst="rect">
-            <a:avLst/>
-          </a:prstGeom>
-          <a:noFill/>
-        </p:spPr>
-        <p:txBody>
-          <a:bodyPr wrap="square">
-            <a:spAutoFit/>
-          </a:bodyPr>
-          <a:lstStyle/>
-          <a:p>
-            <a:pPr algn="l">
-              <a:defRPr sz="1800" b="1">
-                <a:solidFill>
-                  <a:srgbClr val="2A4A4E"/>
-                </a:solidFill>
-              </a:defRPr>
-            </a:pPr>
-            <a:r>
-              <a:t>Login y sesión</a:t>
-            </a:r>
-          </a:p>
-        </p:txBody>
-      </p:sp>
-      <p:sp>
-        <p:nvSpPr>
-          <p:cNvPr id="18" name="TextBox 17"/>
-          <p:cNvSpPr txBox="1"/>
-          <p:nvPr/>
-        </p:nvSpPr>
-        <p:spPr>
-          <a:xfrm>
-            <a:off x="6858000" y="3758184"/>
-            <a:ext cx="2286000" cy="320040"/>
+              <a:t>Día 6</a:t>
+            </a:r>
+          </a:p>
+        </p:txBody>
+      </p:sp>
+      <p:sp>
+        <p:nvSpPr>
+          <p:cNvPr id="21" name="TextBox 20"/>
+          <p:cNvSpPr txBox="1"/>
+          <p:nvPr/>
+        </p:nvSpPr>
+        <p:spPr>
+          <a:xfrm>
+            <a:off x="1828800" y="4572000"/>
+            <a:ext cx="5943600" cy="320040"/>
+          </a:xfrm>
+          <a:prstGeom prst="rect">
+            <a:avLst/>
+          </a:prstGeom>
+          <a:noFill/>
+        </p:spPr>
+        <p:txBody>
+          <a:bodyPr wrap="square">
+            <a:spAutoFit/>
+          </a:bodyPr>
+          <a:lstStyle/>
+          <a:p>
+            <a:pPr algn="l">
+              <a:defRPr sz="1500" b="1">
+                <a:solidFill>
+                  <a:srgbClr val="1F2328"/>
+                </a:solidFill>
+              </a:defRPr>
+            </a:pPr>
+            <a:r>
+              <a:t>Migrar resto + quitar JWT</a:t>
+            </a:r>
+          </a:p>
+        </p:txBody>
+      </p:sp>
+      <p:sp>
+        <p:nvSpPr>
+          <p:cNvPr id="22" name="TextBox 21"/>
+          <p:cNvSpPr txBox="1"/>
+          <p:nvPr/>
+        </p:nvSpPr>
+        <p:spPr>
+          <a:xfrm>
+            <a:off x="8229600" y="4572000"/>
+            <a:ext cx="3200400" cy="320040"/>
           </a:xfrm>
           <a:prstGeom prst="rect">
             <a:avLst/>
@@ -9304,171 +5428,91 @@
               </a:defRPr>
             </a:pPr>
             <a:r>
-              <a:t>Días 4–7</a:t>
-            </a:r>
-          </a:p>
-        </p:txBody>
-      </p:sp>
-      <p:sp>
-        <p:nvSpPr>
-          <p:cNvPr id="19" name="TextBox 18"/>
-          <p:cNvSpPr txBox="1"/>
-          <p:nvPr/>
-        </p:nvSpPr>
-        <p:spPr>
-          <a:xfrm>
-            <a:off x="1920240" y="4123944"/>
-            <a:ext cx="8686800" cy="457200"/>
-          </a:xfrm>
-          <a:prstGeom prst="rect">
-            <a:avLst/>
-          </a:prstGeom>
-          <a:noFill/>
-        </p:spPr>
-        <p:txBody>
-          <a:bodyPr wrap="square">
-            <a:spAutoFit/>
-          </a:bodyPr>
-          <a:lstStyle/>
-          <a:p>
-            <a:pPr algn="l">
-              <a:defRPr sz="1400" b="0">
+              <a:t>lun 13 jul</a:t>
+            </a:r>
+          </a:p>
+        </p:txBody>
+      </p:sp>
+      <p:sp>
+        <p:nvSpPr>
+          <p:cNvPr id="23" name="TextBox 22"/>
+          <p:cNvSpPr txBox="1"/>
+          <p:nvPr/>
+        </p:nvSpPr>
+        <p:spPr>
+          <a:xfrm>
+            <a:off x="731520" y="5230368"/>
+            <a:ext cx="1097280" cy="320040"/>
+          </a:xfrm>
+          <a:prstGeom prst="rect">
+            <a:avLst/>
+          </a:prstGeom>
+          <a:noFill/>
+        </p:spPr>
+        <p:txBody>
+          <a:bodyPr wrap="square">
+            <a:spAutoFit/>
+          </a:bodyPr>
+          <a:lstStyle/>
+          <a:p>
+            <a:pPr algn="l">
+              <a:defRPr sz="1400" b="1">
+                <a:solidFill>
+                  <a:srgbClr val="4A7A80"/>
+                </a:solidFill>
+              </a:defRPr>
+            </a:pPr>
+            <a:r>
+              <a:t>Día 7</a:t>
+            </a:r>
+          </a:p>
+        </p:txBody>
+      </p:sp>
+      <p:sp>
+        <p:nvSpPr>
+          <p:cNvPr id="24" name="TextBox 23"/>
+          <p:cNvSpPr txBox="1"/>
+          <p:nvPr/>
+        </p:nvSpPr>
+        <p:spPr>
+          <a:xfrm>
+            <a:off x="1828800" y="5230368"/>
+            <a:ext cx="5943600" cy="320040"/>
+          </a:xfrm>
+          <a:prstGeom prst="rect">
+            <a:avLst/>
+          </a:prstGeom>
+          <a:noFill/>
+        </p:spPr>
+        <p:txBody>
+          <a:bodyPr wrap="square">
+            <a:spAutoFit/>
+          </a:bodyPr>
+          <a:lstStyle/>
+          <a:p>
+            <a:pPr algn="l">
+              <a:defRPr sz="1500" b="1">
                 <a:solidFill>
                   <a:srgbClr val="1F2328"/>
                 </a:solidFill>
               </a:defRPr>
             </a:pPr>
             <a:r>
-              <a:t>Pasos 6–9 · Cookie, validate.php, migrar módulos</a:t>
-            </a:r>
-          </a:p>
-        </p:txBody>
-      </p:sp>
-      <p:sp>
-        <p:nvSpPr>
-          <p:cNvPr id="20" name="Rounded Rectangle 19"/>
-          <p:cNvSpPr/>
-          <p:nvPr/>
-        </p:nvSpPr>
-        <p:spPr>
-          <a:xfrm>
-            <a:off x="685800" y="4837176"/>
-            <a:ext cx="10789920" cy="1051560"/>
-          </a:xfrm>
-          <a:prstGeom prst="roundRect">
-            <a:avLst/>
-          </a:prstGeom>
-          <a:solidFill>
-            <a:srgbClr val="FFFFFF"/>
-          </a:solidFill>
-          <a:ln>
-            <a:solidFill>
-              <a:srgbClr val="4A7A80"/>
-            </a:solidFill>
-          </a:ln>
-        </p:spPr>
-        <p:style>
-          <a:lnRef idx="1">
-            <a:schemeClr val="accent1"/>
-          </a:lnRef>
-          <a:fillRef idx="3">
-            <a:schemeClr val="accent1"/>
-          </a:fillRef>
-          <a:effectRef idx="2">
-            <a:schemeClr val="accent1"/>
-          </a:effectRef>
-          <a:fontRef idx="minor">
-            <a:schemeClr val="lt1"/>
-          </a:fontRef>
-        </p:style>
-        <p:txBody>
-          <a:bodyPr rtlCol="0" anchor="ctr"/>
-          <a:lstStyle/>
-          <a:p>
-            <a:pPr algn="ctr"/>
-          </a:p>
-        </p:txBody>
-      </p:sp>
-      <p:sp>
-        <p:nvSpPr>
-          <p:cNvPr id="21" name="TextBox 20"/>
-          <p:cNvSpPr txBox="1"/>
-          <p:nvPr/>
-        </p:nvSpPr>
-        <p:spPr>
-          <a:xfrm>
-            <a:off x="868680" y="4946904"/>
-            <a:ext cx="1097280" cy="365760"/>
-          </a:xfrm>
-          <a:prstGeom prst="rect">
-            <a:avLst/>
-          </a:prstGeom>
-          <a:noFill/>
-        </p:spPr>
-        <p:txBody>
-          <a:bodyPr wrap="square">
-            <a:spAutoFit/>
-          </a:bodyPr>
-          <a:lstStyle/>
-          <a:p>
-            <a:pPr algn="l">
-              <a:defRPr sz="1400" b="1">
-                <a:solidFill>
-                  <a:srgbClr val="4A7A80"/>
-                </a:solidFill>
-              </a:defRPr>
-            </a:pPr>
-            <a:r>
-              <a:t>Fase D</a:t>
-            </a:r>
-          </a:p>
-        </p:txBody>
-      </p:sp>
-      <p:sp>
-        <p:nvSpPr>
-          <p:cNvPr id="22" name="TextBox 21"/>
-          <p:cNvSpPr txBox="1"/>
-          <p:nvPr/>
-        </p:nvSpPr>
-        <p:spPr>
-          <a:xfrm>
-            <a:off x="1920240" y="4910328"/>
-            <a:ext cx="4572000" cy="365760"/>
-          </a:xfrm>
-          <a:prstGeom prst="rect">
-            <a:avLst/>
-          </a:prstGeom>
-          <a:noFill/>
-        </p:spPr>
-        <p:txBody>
-          <a:bodyPr wrap="square">
-            <a:spAutoFit/>
-          </a:bodyPr>
-          <a:lstStyle/>
-          <a:p>
-            <a:pPr algn="l">
-              <a:defRPr sz="1800" b="1">
-                <a:solidFill>
-                  <a:srgbClr val="2A4A4E"/>
-                </a:solidFill>
-              </a:defRPr>
-            </a:pPr>
-            <a:r>
-              <a:t>Limpieza y cierre</a:t>
-            </a:r>
-          </a:p>
-        </p:txBody>
-      </p:sp>
-      <p:sp>
-        <p:nvSpPr>
-          <p:cNvPr id="23" name="TextBox 22"/>
-          <p:cNvSpPr txBox="1"/>
-          <p:nvPr/>
-        </p:nvSpPr>
-        <p:spPr>
-          <a:xfrm>
-            <a:off x="6858000" y="4928616"/>
-            <a:ext cx="2286000" cy="320040"/>
+              <a:t>Pruebas y cierre 2.1 + 2.2</a:t>
+            </a:r>
+          </a:p>
+        </p:txBody>
+      </p:sp>
+      <p:sp>
+        <p:nvSpPr>
+          <p:cNvPr id="25" name="TextBox 24"/>
+          <p:cNvSpPr txBox="1"/>
+          <p:nvPr/>
+        </p:nvSpPr>
+        <p:spPr>
+          <a:xfrm>
+            <a:off x="8229600" y="5230368"/>
+            <a:ext cx="3200400" cy="320040"/>
           </a:xfrm>
           <a:prstGeom prst="rect">
             <a:avLst/>
@@ -9489,42 +5533,7 @@
               </a:defRPr>
             </a:pPr>
             <a:r>
-              <a:t>Días 8–10</a:t>
-            </a:r>
-          </a:p>
-        </p:txBody>
-      </p:sp>
-      <p:sp>
-        <p:nvSpPr>
-          <p:cNvPr id="24" name="TextBox 23"/>
-          <p:cNvSpPr txBox="1"/>
-          <p:nvPr/>
-        </p:nvSpPr>
-        <p:spPr>
-          <a:xfrm>
-            <a:off x="1920240" y="5294376"/>
-            <a:ext cx="8686800" cy="457200"/>
-          </a:xfrm>
-          <a:prstGeom prst="rect">
-            <a:avLst/>
-          </a:prstGeom>
-          <a:noFill/>
-        </p:spPr>
-        <p:txBody>
-          <a:bodyPr wrap="square">
-            <a:spAutoFit/>
-          </a:bodyPr>
-          <a:lstStyle/>
-          <a:p>
-            <a:pPr algn="l">
-              <a:defRPr sz="1400" b="0">
-                <a:solidFill>
-                  <a:srgbClr val="1F2328"/>
-                </a:solidFill>
-              </a:defRPr>
-            </a:pPr>
-            <a:r>
-              <a:t>Pasos 10–12 · Quitar JWT, pruebas, documentar</a:t>
+              <a:t>mar 14 jul</a:t>
             </a:r>
           </a:p>
         </p:txBody>
@@ -9628,7 +5637,7 @@
               </a:defRPr>
             </a:pPr>
             <a:r>
-              <a:t>Paso 1 de 12 · Fase A</a:t>
+              <a:t>Día 1 — Qué debes tener hoy</a:t>
             </a:r>
           </a:p>
         </p:txBody>
@@ -9663,59 +5672,42 @@
               </a:defRPr>
             </a:pPr>
             <a:r>
-              <a:t>Listar todos los módulos M</a:t>
-            </a:r>
-          </a:p>
-        </p:txBody>
-      </p:sp>
-      <p:sp>
-        <p:nvSpPr>
-          <p:cNvPr id="5" name="Oval 4"/>
-          <p:cNvSpPr/>
-          <p:nvPr/>
-        </p:nvSpPr>
-        <p:spPr>
-          <a:xfrm>
-            <a:off x="502920" y="1234440"/>
-            <a:ext cx="502920" cy="502920"/>
-          </a:xfrm>
-          <a:prstGeom prst="ellipse">
-            <a:avLst/>
-          </a:prstGeom>
-          <a:solidFill>
-            <a:srgbClr val="4A7A80"/>
-          </a:solidFill>
-          <a:ln>
-            <a:noFill/>
-          </a:ln>
-        </p:spPr>
-        <p:style>
-          <a:lnRef idx="1">
-            <a:schemeClr val="accent1"/>
-          </a:lnRef>
-          <a:fillRef idx="3">
-            <a:schemeClr val="accent1"/>
-          </a:fillRef>
-          <a:effectRef idx="2">
-            <a:schemeClr val="accent1"/>
-          </a:effectRef>
-          <a:fontRef idx="minor">
-            <a:schemeClr val="lt1"/>
-          </a:fontRef>
-        </p:style>
-        <p:txBody>
-          <a:bodyPr rtlCol="0" anchor="ctr"/>
-          <a:lstStyle/>
-          <a:p>
-            <a:pPr algn="ctr">
-              <a:defRPr sz="2000" b="1">
-                <a:solidFill>
-                  <a:srgbClr val="FFFFFF"/>
-                </a:solidFill>
-              </a:defRPr>
-            </a:pPr>
-            <a:r>
-              <a:t>1</a:t>
+              <a:t>https://acme-chile.cl/ · sin tocar código</a:t>
+            </a:r>
+          </a:p>
+        </p:txBody>
+      </p:sp>
+      <p:sp>
+        <p:nvSpPr>
+          <p:cNvPr id="5" name="TextBox 4"/>
+          <p:cNvSpPr txBox="1"/>
+          <p:nvPr/>
+        </p:nvSpPr>
+        <p:spPr>
+          <a:xfrm>
+            <a:off x="685800" y="1234440"/>
+            <a:ext cx="10515600" cy="411480"/>
+          </a:xfrm>
+          <a:prstGeom prst="rect">
+            <a:avLst/>
+          </a:prstGeom>
+          <a:noFill/>
+        </p:spPr>
+        <p:txBody>
+          <a:bodyPr wrap="square">
+            <a:spAutoFit/>
+          </a:bodyPr>
+          <a:lstStyle/>
+          <a:p>
+            <a:pPr algn="l">
+              <a:defRPr sz="1600" b="1">
+                <a:solidFill>
+                  <a:srgbClr val="2A4A4E"/>
+                </a:solidFill>
+              </a:defRPr>
+            </a:pPr>
+            <a:r>
+              <a:t>Entregable del día</a:t>
             </a:r>
           </a:p>
         </p:txBody>
@@ -9728,29 +5720,29 @@
         </p:nvSpPr>
         <p:spPr>
           <a:xfrm>
-            <a:off x="1143000" y="1143000"/>
-            <a:ext cx="10058400" cy="457200"/>
-          </a:xfrm>
-          <a:prstGeom prst="rect">
-            <a:avLst/>
-          </a:prstGeom>
-          <a:noFill/>
-        </p:spPr>
-        <p:txBody>
-          <a:bodyPr wrap="square">
-            <a:spAutoFit/>
-          </a:bodyPr>
-          <a:lstStyle/>
-          <a:p>
-            <a:pPr algn="l">
-              <a:defRPr sz="2200" b="1">
-                <a:solidFill>
-                  <a:srgbClr val="2A4A4E"/>
-                </a:solidFill>
-              </a:defRPr>
-            </a:pPr>
-            <a:r>
-              <a:t>Listar todos los módulos M</a:t>
+            <a:off x="685800" y="1691640"/>
+            <a:ext cx="10515600" cy="457200"/>
+          </a:xfrm>
+          <a:prstGeom prst="rect">
+            <a:avLst/>
+          </a:prstGeom>
+          <a:noFill/>
+        </p:spPr>
+        <p:txBody>
+          <a:bodyPr wrap="square">
+            <a:spAutoFit/>
+          </a:bodyPr>
+          <a:lstStyle/>
+          <a:p>
+            <a:pPr algn="l">
+              <a:defRPr sz="1700" b="0">
+                <a:solidFill>
+                  <a:srgbClr val="1F2328"/>
+                </a:solidFill>
+              </a:defRPr>
+            </a:pPr>
+            <a:r>
+              <a:t>Hoja «Inventario-MOVA-modulos» (Google Sheets o .md en el repo)</a:t>
             </a:r>
           </a:p>
         </p:txBody>
@@ -9763,75 +5755,65 @@
         </p:nvSpPr>
         <p:spPr>
           <a:xfrm>
-            <a:off x="685800" y="1691640"/>
-            <a:ext cx="5669280" cy="1463040"/>
-          </a:xfrm>
-          <a:prstGeom prst="rect">
-            <a:avLst/>
-          </a:prstGeom>
-          <a:noFill/>
-        </p:spPr>
-        <p:txBody>
-          <a:bodyPr wrap="square">
-            <a:spAutoFit/>
-          </a:bodyPr>
-          <a:lstStyle/>
-          <a:p>
-            <a:pPr algn="l">
-              <a:defRPr sz="1600" b="0">
+            <a:off x="685800" y="2331720"/>
+            <a:ext cx="10515600" cy="365760"/>
+          </a:xfrm>
+          <a:prstGeom prst="rect">
+            <a:avLst/>
+          </a:prstGeom>
+          <a:noFill/>
+        </p:spPr>
+        <p:txBody>
+          <a:bodyPr wrap="square">
+            <a:spAutoFit/>
+          </a:bodyPr>
+          <a:lstStyle/>
+          <a:p>
+            <a:pPr algn="l">
+              <a:defRPr sz="1500" b="1">
+                <a:solidFill>
+                  <a:srgbClr val="4A7A80"/>
+                </a:solidFill>
+              </a:defRPr>
+            </a:pPr>
+            <a:r>
+              <a:t>Columnas obligatorias</a:t>
+            </a:r>
+          </a:p>
+        </p:txBody>
+      </p:sp>
+      <p:sp>
+        <p:nvSpPr>
+          <p:cNvPr id="8" name="TextBox 7"/>
+          <p:cNvSpPr txBox="1"/>
+          <p:nvPr/>
+        </p:nvSpPr>
+        <p:spPr>
+          <a:xfrm>
+            <a:off x="822960" y="2743200"/>
+            <a:ext cx="10241280" cy="502920"/>
+          </a:xfrm>
+          <a:prstGeom prst="rect">
+            <a:avLst/>
+          </a:prstGeom>
+          <a:noFill/>
+        </p:spPr>
+        <p:txBody>
+          <a:bodyPr wrap="square">
+            <a:spAutoFit/>
+          </a:bodyPr>
+          <a:lstStyle/>
+          <a:p>
+            <a:pPr algn="l">
+              <a:defRPr sz="1400" b="0">
                 <a:solidFill>
                   <a:srgbClr val="1F2328"/>
                 </a:solidFill>
               </a:defRPr>
             </a:pPr>
             <a:r>
-              <a:t>En cPanel → Administrador de archivos → public_html. Anota cada carpeta MOVA y su URL.</a:t>
-            </a:r>
-          </a:p>
-        </p:txBody>
-      </p:sp>
-      <p:sp>
-        <p:nvSpPr>
-          <p:cNvPr id="8" name="Rounded Rectangle 7"/>
-          <p:cNvSpPr/>
-          <p:nvPr/>
-        </p:nvSpPr>
-        <p:spPr>
-          <a:xfrm>
-            <a:off x="6583680" y="1691640"/>
-            <a:ext cx="5029200" cy="914400"/>
-          </a:xfrm>
-          <a:prstGeom prst="roundRect">
-            <a:avLst/>
-          </a:prstGeom>
-          <a:solidFill>
-            <a:srgbClr val="FFF8C5"/>
-          </a:solidFill>
-          <a:ln>
-            <a:solidFill>
-              <a:srgbClr val="D4A72C"/>
-            </a:solidFill>
-          </a:ln>
-        </p:spPr>
-        <p:style>
-          <a:lnRef idx="1">
-            <a:schemeClr val="accent1"/>
-          </a:lnRef>
-          <a:fillRef idx="3">
-            <a:schemeClr val="accent1"/>
-          </a:fillRef>
-          <a:effectRef idx="2">
-            <a:schemeClr val="accent1"/>
-          </a:effectRef>
-          <a:fontRef idx="minor">
-            <a:schemeClr val="lt1"/>
-          </a:fontRef>
-        </p:style>
-        <p:txBody>
-          <a:bodyPr rtlCol="0" anchor="ctr"/>
-          <a:lstStyle/>
-          <a:p>
-            <a:pPr algn="ctr"/>
+              <a:t>Módulo | URL completa | ¿Cómo valida hoy? | ¿JWT/localStorage? | ¿Llama n8n? | Responsable</a:t>
+            </a:r>
           </a:p>
         </p:txBody>
       </p:sp>
@@ -9843,75 +5825,65 @@
         </p:nvSpPr>
         <p:spPr>
           <a:xfrm>
-            <a:off x="6766560" y="1828800"/>
-            <a:ext cx="4663440" cy="685800"/>
-          </a:xfrm>
-          <a:prstGeom prst="rect">
-            <a:avLst/>
-          </a:prstGeom>
-          <a:noFill/>
-        </p:spPr>
-        <p:txBody>
-          <a:bodyPr wrap="square">
-            <a:spAutoFit/>
-          </a:bodyPr>
-          <a:lstStyle/>
-          <a:p>
-            <a:pPr algn="l">
-              <a:defRPr sz="1300" b="1">
-                <a:solidFill>
-                  <a:srgbClr val="2A4A4E"/>
-                </a:solidFill>
-              </a:defRPr>
-            </a:pPr>
-            <a:r>
-              <a:t>👆 Tabla: Módulo | URL | ¿Cómo valida hoy? | ¿localStorage?</a:t>
-            </a:r>
-          </a:p>
-        </p:txBody>
-      </p:sp>
-      <p:sp>
-        <p:nvSpPr>
-          <p:cNvPr id="10" name="Rounded Rectangle 9"/>
-          <p:cNvSpPr/>
-          <p:nvPr/>
-        </p:nvSpPr>
-        <p:spPr>
-          <a:xfrm>
-            <a:off x="640080" y="3337560"/>
-            <a:ext cx="10972800" cy="822960"/>
-          </a:xfrm>
-          <a:prstGeom prst="roundRect">
-            <a:avLst/>
-          </a:prstGeom>
-          <a:solidFill>
-            <a:srgbClr val="F6F8FA"/>
-          </a:solidFill>
-          <a:ln>
-            <a:solidFill>
-              <a:srgbClr val="D0D7DE"/>
-            </a:solidFill>
-          </a:ln>
-        </p:spPr>
-        <p:style>
-          <a:lnRef idx="1">
-            <a:schemeClr val="accent1"/>
-          </a:lnRef>
-          <a:fillRef idx="3">
-            <a:schemeClr val="accent1"/>
-          </a:fillRef>
-          <a:effectRef idx="2">
-            <a:schemeClr val="accent1"/>
-          </a:effectRef>
-          <a:fontRef idx="minor">
-            <a:schemeClr val="lt1"/>
-          </a:fontRef>
-        </p:style>
-        <p:txBody>
-          <a:bodyPr rtlCol="0" anchor="ctr"/>
-          <a:lstStyle/>
-          <a:p>
-            <a:pPr algn="ctr"/>
+            <a:off x="685800" y="3429000"/>
+            <a:ext cx="10515600" cy="365760"/>
+          </a:xfrm>
+          <a:prstGeom prst="rect">
+            <a:avLst/>
+          </a:prstGeom>
+          <a:noFill/>
+        </p:spPr>
+        <p:txBody>
+          <a:bodyPr wrap="square">
+            <a:spAutoFit/>
+          </a:bodyPr>
+          <a:lstStyle/>
+          <a:p>
+            <a:pPr algn="l">
+              <a:defRPr sz="1500" b="1">
+                <a:solidFill>
+                  <a:srgbClr val="4A7A80"/>
+                </a:solidFill>
+              </a:defRPr>
+            </a:pPr>
+            <a:r>
+              <a:t>Pasos hoy</a:t>
+            </a:r>
+          </a:p>
+        </p:txBody>
+      </p:sp>
+      <p:sp>
+        <p:nvSpPr>
+          <p:cNvPr id="10" name="TextBox 9"/>
+          <p:cNvSpPr txBox="1"/>
+          <p:nvPr/>
+        </p:nvSpPr>
+        <p:spPr>
+          <a:xfrm>
+            <a:off x="822960" y="3840480"/>
+            <a:ext cx="10058400" cy="347472"/>
+          </a:xfrm>
+          <a:prstGeom prst="rect">
+            <a:avLst/>
+          </a:prstGeom>
+          <a:noFill/>
+        </p:spPr>
+        <p:txBody>
+          <a:bodyPr wrap="square">
+            <a:spAutoFit/>
+          </a:bodyPr>
+          <a:lstStyle/>
+          <a:p>
+            <a:pPr algn="l">
+              <a:defRPr sz="1300" b="0">
+                <a:solidFill>
+                  <a:srgbClr val="1F2328"/>
+                </a:solidFill>
+              </a:defRPr>
+            </a:pPr>
+            <a:r>
+              <a:t>1. Entrar a cPanel → Administrador de archivos → public_html</a:t>
+            </a:r>
           </a:p>
         </p:txBody>
       </p:sp>
@@ -9923,8 +5895,8 @@
         </p:nvSpPr>
         <p:spPr>
           <a:xfrm>
-            <a:off x="822960" y="3474720"/>
-            <a:ext cx="10607040" cy="594360"/>
+            <a:off x="822960" y="4206240"/>
+            <a:ext cx="10058400" cy="347472"/>
           </a:xfrm>
           <a:prstGeom prst="rect">
             <a:avLst/>
@@ -9940,12 +5912,12 @@
             <a:pPr algn="l">
               <a:defRPr sz="1300" b="0">
                 <a:solidFill>
-                  <a:srgbClr val="656D76"/>
-                </a:solidFill>
-              </a:defRPr>
-            </a:pPr>
-            <a:r>
-              <a:t>💡 Tip: No tocar código aún — solo inventario.</a:t>
+                  <a:srgbClr val="1F2328"/>
+                </a:solidFill>
+              </a:defRPr>
+            </a:pPr>
+            <a:r>
+              <a:t>2. Listar cada carpeta/módulo MOVA y su URL en acme-chile.cl</a:t>
             </a:r>
           </a:p>
         </p:txBody>
@@ -9958,29 +5930,29 @@
         </p:nvSpPr>
         <p:spPr>
           <a:xfrm>
-            <a:off x="685800" y="4343400"/>
-            <a:ext cx="10515600" cy="320040"/>
-          </a:xfrm>
-          <a:prstGeom prst="rect">
-            <a:avLst/>
-          </a:prstGeom>
-          <a:noFill/>
-        </p:spPr>
-        <p:txBody>
-          <a:bodyPr wrap="square">
-            <a:spAutoFit/>
-          </a:bodyPr>
-          <a:lstStyle/>
-          <a:p>
-            <a:pPr algn="l">
-              <a:defRPr sz="1400" b="1">
-                <a:solidFill>
-                  <a:srgbClr val="4A7A80"/>
-                </a:solidFill>
-              </a:defRPr>
-            </a:pPr>
-            <a:r>
-              <a:t>Checklist de este paso:</a:t>
+            <a:off x="822960" y="4572000"/>
+            <a:ext cx="10058400" cy="347472"/>
+          </a:xfrm>
+          <a:prstGeom prst="rect">
+            <a:avLst/>
+          </a:prstGeom>
+          <a:noFill/>
+        </p:spPr>
+        <p:txBody>
+          <a:bodyPr wrap="square">
+            <a:spAutoFit/>
+          </a:bodyPr>
+          <a:lstStyle/>
+          <a:p>
+            <a:pPr algn="l">
+              <a:defRPr sz="1300" b="0">
+                <a:solidFill>
+                  <a:srgbClr val="1F2328"/>
+                </a:solidFill>
+              </a:defRPr>
+            </a:pPr>
+            <a:r>
+              <a:t>3. Por módulo: anotar si usa Google OAuth, mova_auth u otro</a:t>
             </a:r>
           </a:p>
         </p:txBody>
@@ -9993,8 +5965,8 @@
         </p:nvSpPr>
         <p:spPr>
           <a:xfrm>
-            <a:off x="868680" y="4709160"/>
-            <a:ext cx="10058400" cy="320040"/>
+            <a:off x="822960" y="4937760"/>
+            <a:ext cx="10058400" cy="347472"/>
           </a:xfrm>
           <a:prstGeom prst="rect">
             <a:avLst/>
@@ -10015,7 +5987,7 @@
               </a:defRPr>
             </a:pPr>
             <a:r>
-              <a:t>☐  Tabla de módulos completa</a:t>
+              <a:t>4. Buscar localStorage / JWT en el código (o preguntar al dev)</a:t>
             </a:r>
           </a:p>
         </p:txBody>
@@ -10028,8 +6000,8 @@
         </p:nvSpPr>
         <p:spPr>
           <a:xfrm>
-            <a:off x="868680" y="5056632"/>
-            <a:ext cx="10058400" cy="320040"/>
+            <a:off x="822960" y="5303520"/>
+            <a:ext cx="10058400" cy="347472"/>
           </a:xfrm>
           <a:prstGeom prst="rect">
             <a:avLst/>
@@ -10050,7 +6022,7 @@
               </a:defRPr>
             </a:pPr>
             <a:r>
-              <a:t>☐  URLs anotadas</a:t>
+              <a:t>5. Marcar en rojo lo que NO pase por mova_auth</a:t>
             </a:r>
           </a:p>
         </p:txBody>
@@ -10063,8 +6035,8 @@
         </p:nvSpPr>
         <p:spPr>
           <a:xfrm>
-            <a:off x="868680" y="5404104"/>
-            <a:ext cx="10058400" cy="320040"/>
+            <a:off x="822960" y="5669280"/>
+            <a:ext cx="10058400" cy="347472"/>
           </a:xfrm>
           <a:prstGeom prst="rect">
             <a:avLst/>
@@ -10085,7 +6057,7 @@
               </a:defRPr>
             </a:pPr>
             <a:r>
-              <a:t>☐  Responsable por módulo</a:t>
+              <a:t>6. Compartir la tabla con el equipo antes del Día 2</a:t>
             </a:r>
           </a:p>
         </p:txBody>
@@ -10189,7 +6161,7 @@
               </a:defRPr>
             </a:pPr>
             <a:r>
-              <a:t>Paso 2 de 12 · Fase A</a:t>
+              <a:t>Día 1 · lun 6 jul</a:t>
             </a:r>
           </a:p>
         </p:txBody>
@@ -10224,7 +6196,7 @@
               </a:defRPr>
             </a:pPr>
             <a:r>
-              <a:t>Documentar flujo actual</a:t>
+              <a:t>Inventario módulos M</a:t>
             </a:r>
           </a:p>
         </p:txBody>
@@ -10276,7 +6248,7 @@
               </a:defRPr>
             </a:pPr>
             <a:r>
-              <a:t>2</a:t>
+              <a:t>1</a:t>
             </a:r>
           </a:p>
         </p:txBody>
@@ -10289,8 +6261,8 @@
         </p:nvSpPr>
         <p:spPr>
           <a:xfrm>
-            <a:off x="1143000" y="1143000"/>
-            <a:ext cx="10058400" cy="457200"/>
+            <a:off x="1143000" y="1188720"/>
+            <a:ext cx="9144000" cy="457200"/>
           </a:xfrm>
           <a:prstGeom prst="rect">
             <a:avLst/>
@@ -10311,7 +6283,7 @@
               </a:defRPr>
             </a:pPr>
             <a:r>
-              <a:t>Documentar flujo actual</a:t>
+              <a:t>Inventario módulos M</a:t>
             </a:r>
           </a:p>
         </p:txBody>
@@ -10324,8 +6296,8 @@
         </p:nvSpPr>
         <p:spPr>
           <a:xfrm>
-            <a:off x="685800" y="1691640"/>
-            <a:ext cx="5669280" cy="1463040"/>
+            <a:off x="685800" y="1783080"/>
+            <a:ext cx="10515600" cy="1097280"/>
           </a:xfrm>
           <a:prstGeom prst="rect">
             <a:avLst/>
@@ -10346,7 +6318,7 @@
               </a:defRPr>
             </a:pPr>
             <a:r>
-              <a:t>Por módulo: ¿Google OAuth? ¿mova_auth? ¿JWT en localStorage? ¿llama n8n?</a:t>
+              <a:t>cPanel → public_html en GoDaddy. Listar MAESTRO, INGRESOS, EGRESOS y cada URL bajo acme-chile.cl.</a:t>
             </a:r>
           </a:p>
         </p:txBody>
@@ -10359,8 +6331,8 @@
         </p:nvSpPr>
         <p:spPr>
           <a:xfrm>
-            <a:off x="6583680" y="1691640"/>
-            <a:ext cx="5029200" cy="914400"/>
+            <a:off x="640080" y="2971800"/>
+            <a:ext cx="10789920" cy="685800"/>
           </a:xfrm>
           <a:prstGeom prst="roundRect">
             <a:avLst/>
@@ -10404,8 +6376,8 @@
         </p:nvSpPr>
         <p:spPr>
           <a:xfrm>
-            <a:off x="6766560" y="1828800"/>
-            <a:ext cx="4663440" cy="685800"/>
+            <a:off x="822960" y="3108960"/>
+            <a:ext cx="10424160" cy="457200"/>
           </a:xfrm>
           <a:prstGeom prst="rect">
             <a:avLst/>
@@ -10426,53 +6398,43 @@
               </a:defRPr>
             </a:pPr>
             <a:r>
-              <a:t>👆 Marcar en rojo lo que NO pase por mova_auth</a:t>
-            </a:r>
-          </a:p>
-        </p:txBody>
-      </p:sp>
-      <p:sp>
-        <p:nvSpPr>
-          <p:cNvPr id="10" name="Rounded Rectangle 9"/>
-          <p:cNvSpPr/>
-          <p:nvPr/>
-        </p:nvSpPr>
-        <p:spPr>
-          <a:xfrm>
-            <a:off x="640080" y="3337560"/>
-            <a:ext cx="10972800" cy="822960"/>
-          </a:xfrm>
-          <a:prstGeom prst="roundRect">
-            <a:avLst/>
-          </a:prstGeom>
-          <a:solidFill>
-            <a:srgbClr val="F6F8FA"/>
-          </a:solidFill>
-          <a:ln>
-            <a:solidFill>
-              <a:srgbClr val="D0D7DE"/>
-            </a:solidFill>
-          </a:ln>
-        </p:spPr>
-        <p:style>
-          <a:lnRef idx="1">
-            <a:schemeClr val="accent1"/>
-          </a:lnRef>
-          <a:fillRef idx="3">
-            <a:schemeClr val="accent1"/>
-          </a:fillRef>
-          <a:effectRef idx="2">
-            <a:schemeClr val="accent1"/>
-          </a:effectRef>
-          <a:fontRef idx="minor">
-            <a:schemeClr val="lt1"/>
-          </a:fontRef>
-        </p:style>
-        <p:txBody>
-          <a:bodyPr rtlCol="0" anchor="ctr"/>
-          <a:lstStyle/>
-          <a:p>
-            <a:pPr algn="ctr"/>
+              <a:t>👆 Tabla: Módulo | URL | Cómo valida | ¿JWT? | ¿n8n? | Responsable</a:t>
+            </a:r>
+          </a:p>
+        </p:txBody>
+      </p:sp>
+      <p:sp>
+        <p:nvSpPr>
+          <p:cNvPr id="10" name="TextBox 9"/>
+          <p:cNvSpPr txBox="1"/>
+          <p:nvPr/>
+        </p:nvSpPr>
+        <p:spPr>
+          <a:xfrm>
+            <a:off x="685800" y="3794760"/>
+            <a:ext cx="10515600" cy="365760"/>
+          </a:xfrm>
+          <a:prstGeom prst="rect">
+            <a:avLst/>
+          </a:prstGeom>
+          <a:noFill/>
+        </p:spPr>
+        <p:txBody>
+          <a:bodyPr wrap="square">
+            <a:spAutoFit/>
+          </a:bodyPr>
+          <a:lstStyle/>
+          <a:p>
+            <a:pPr algn="l">
+              <a:defRPr sz="1400" b="1">
+                <a:solidFill>
+                  <a:srgbClr val="1A7F37"/>
+                </a:solidFill>
+              </a:defRPr>
+            </a:pPr>
+            <a:r>
+              <a:t>Entregable: Entregable: hoja «Inventario-MOVA-modulos»</a:t>
+            </a:r>
           </a:p>
         </p:txBody>
       </p:sp>
@@ -10484,8 +6446,8 @@
         </p:nvSpPr>
         <p:spPr>
           <a:xfrm>
-            <a:off x="822960" y="3474720"/>
-            <a:ext cx="10607040" cy="594360"/>
+            <a:off x="868680" y="4251960"/>
+            <a:ext cx="10058400" cy="320040"/>
           </a:xfrm>
           <a:prstGeom prst="rect">
             <a:avLst/>
@@ -10501,12 +6463,12 @@
             <a:pPr algn="l">
               <a:defRPr sz="1300" b="0">
                 <a:solidFill>
-                  <a:srgbClr val="656D76"/>
-                </a:solidFill>
-              </a:defRPr>
-            </a:pPr>
-            <a:r>
-              <a:t>💡 Tip: Dibujar o anotar el flujo actual antes de cambiar nada.</a:t>
+                  <a:srgbClr val="1F2328"/>
+                </a:solidFill>
+              </a:defRPr>
+            </a:pPr>
+            <a:r>
+              <a:t>☐  Acceso cPanel OK</a:t>
             </a:r>
           </a:p>
         </p:txBody>
@@ -10519,29 +6481,29 @@
         </p:nvSpPr>
         <p:spPr>
           <a:xfrm>
-            <a:off x="685800" y="4343400"/>
-            <a:ext cx="10515600" cy="320040"/>
-          </a:xfrm>
-          <a:prstGeom prst="rect">
-            <a:avLst/>
-          </a:prstGeom>
-          <a:noFill/>
-        </p:spPr>
-        <p:txBody>
-          <a:bodyPr wrap="square">
-            <a:spAutoFit/>
-          </a:bodyPr>
-          <a:lstStyle/>
-          <a:p>
-            <a:pPr algn="l">
-              <a:defRPr sz="1400" b="1">
-                <a:solidFill>
-                  <a:srgbClr val="4A7A80"/>
-                </a:solidFill>
-              </a:defRPr>
-            </a:pPr>
-            <a:r>
-              <a:t>Checklist de este paso:</a:t>
+            <a:off x="868680" y="4599432"/>
+            <a:ext cx="10058400" cy="320040"/>
+          </a:xfrm>
+          <a:prstGeom prst="rect">
+            <a:avLst/>
+          </a:prstGeom>
+          <a:noFill/>
+        </p:spPr>
+        <p:txBody>
+          <a:bodyPr wrap="square">
+            <a:spAutoFit/>
+          </a:bodyPr>
+          <a:lstStyle/>
+          <a:p>
+            <a:pPr algn="l">
+              <a:defRPr sz="1300" b="0">
+                <a:solidFill>
+                  <a:srgbClr val="1F2328"/>
+                </a:solidFill>
+              </a:defRPr>
+            </a:pPr>
+            <a:r>
+              <a:t>☐  Todas las URLs anotadas</a:t>
             </a:r>
           </a:p>
         </p:txBody>
@@ -10554,7 +6516,7 @@
         </p:nvSpPr>
         <p:spPr>
           <a:xfrm>
-            <a:off x="868680" y="4709160"/>
+            <a:off x="868680" y="4946904"/>
             <a:ext cx="10058400" cy="320040"/>
           </a:xfrm>
           <a:prstGeom prst="rect">
@@ -10576,7 +6538,7 @@
               </a:defRPr>
             </a:pPr>
             <a:r>
-              <a:t>☐  Flujo actual documentado</a:t>
+              <a:t>☐  JWT/localStorage marcados</a:t>
             </a:r>
           </a:p>
         </p:txBody>
@@ -10589,7 +6551,7 @@
         </p:nvSpPr>
         <p:spPr>
           <a:xfrm>
-            <a:off x="868680" y="5056632"/>
+            <a:off x="868680" y="5294376"/>
             <a:ext cx="10058400" cy="320040"/>
           </a:xfrm>
           <a:prstGeom prst="rect">
@@ -10611,42 +6573,7 @@
               </a:defRPr>
             </a:pPr>
             <a:r>
-              <a:t>☐  JWT/localStorage identificados</a:t>
-            </a:r>
-          </a:p>
-        </p:txBody>
-      </p:sp>
-      <p:sp>
-        <p:nvSpPr>
-          <p:cNvPr id="15" name="TextBox 14"/>
-          <p:cNvSpPr txBox="1"/>
-          <p:nvPr/>
-        </p:nvSpPr>
-        <p:spPr>
-          <a:xfrm>
-            <a:off x="868680" y="5404104"/>
-            <a:ext cx="10058400" cy="320040"/>
-          </a:xfrm>
-          <a:prstGeom prst="rect">
-            <a:avLst/>
-          </a:prstGeom>
-          <a:noFill/>
-        </p:spPr>
-        <p:txBody>
-          <a:bodyPr wrap="square">
-            <a:spAutoFit/>
-          </a:bodyPr>
-          <a:lstStyle/>
-          <a:p>
-            <a:pPr algn="l">
-              <a:defRPr sz="1300" b="0">
-                <a:solidFill>
-                  <a:srgbClr val="1F2328"/>
-                </a:solidFill>
-              </a:defRPr>
-            </a:pPr>
-            <a:r>
-              <a:t>☐  Endpoints n8n listados</a:t>
+              <a:t>☐  Tabla compartida</a:t>
             </a:r>
           </a:p>
         </p:txBody>
@@ -10750,7 +6677,7 @@
               </a:defRPr>
             </a:pPr>
             <a:r>
-              <a:t>Paso 3 de 12 · Fase B</a:t>
+              <a:t>Día 2 · mar 7 jul</a:t>
             </a:r>
           </a:p>
         </p:txBody>
@@ -10785,7 +6712,7 @@
               </a:defRPr>
             </a:pPr>
             <a:r>
-              <a:t>Definir mova_auth como único validador</a:t>
+              <a:t>Acuerdo + diseño mova_auth</a:t>
             </a:r>
           </a:p>
         </p:txBody>
@@ -10837,7 +6764,7 @@
               </a:defRPr>
             </a:pPr>
             <a:r>
-              <a:t>3</a:t>
+              <a:t>2</a:t>
             </a:r>
           </a:p>
         </p:txBody>
@@ -10850,8 +6777,8 @@
         </p:nvSpPr>
         <p:spPr>
           <a:xfrm>
-            <a:off x="1143000" y="1143000"/>
-            <a:ext cx="10058400" cy="457200"/>
+            <a:off x="1143000" y="1188720"/>
+            <a:ext cx="9144000" cy="457200"/>
           </a:xfrm>
           <a:prstGeom prst="rect">
             <a:avLst/>
@@ -10872,7 +6799,7 @@
               </a:defRPr>
             </a:pPr>
             <a:r>
-              <a:t>Definir mova_auth como único validador</a:t>
+              <a:t>Acuerdo + diseño mova_auth</a:t>
             </a:r>
           </a:p>
         </p:txBody>
@@ -10885,8 +6812,8 @@
         </p:nvSpPr>
         <p:spPr>
           <a:xfrm>
-            <a:off x="685800" y="1691640"/>
-            <a:ext cx="5669280" cy="1463040"/>
+            <a:off x="685800" y="1783080"/>
+            <a:ext cx="10515600" cy="1097280"/>
           </a:xfrm>
           <a:prstGeom prst="rect">
             <a:avLst/>
@@ -10907,7 +6834,7 @@
               </a:defRPr>
             </a:pPr>
             <a:r>
-              <a:t>Acuerdo de equipo: ningún módulo valida permisos solo. Todos usan guard.php.</a:t>
+              <a:t>Regla escrita: ningún módulo valida solo. Definir 6 archivos PHP y módulo sandbox para día 5.</a:t>
             </a:r>
           </a:p>
         </p:txBody>
@@ -10920,8 +6847,8 @@
         </p:nvSpPr>
         <p:spPr>
           <a:xfrm>
-            <a:off x="6583680" y="1691640"/>
-            <a:ext cx="5029200" cy="914400"/>
+            <a:off x="640080" y="2971800"/>
+            <a:ext cx="10789920" cy="685800"/>
           </a:xfrm>
           <a:prstGeom prst="roundRect">
             <a:avLst/>
@@ -10965,8 +6892,8 @@
         </p:nvSpPr>
         <p:spPr>
           <a:xfrm>
-            <a:off x="6766560" y="1828800"/>
-            <a:ext cx="4663440" cy="685800"/>
+            <a:off x="822960" y="3108960"/>
+            <a:ext cx="10424160" cy="457200"/>
           </a:xfrm>
           <a:prstGeom prst="rect">
             <a:avLst/>
@@ -10987,53 +6914,43 @@
               </a:defRPr>
             </a:pPr>
             <a:r>
-              <a:t>👆 Si no pasó por mova_auth → redirect a login</a:t>
-            </a:r>
-          </a:p>
-        </p:txBody>
-      </p:sp>
-      <p:sp>
-        <p:nvSpPr>
-          <p:cNvPr id="10" name="Rounded Rectangle 9"/>
-          <p:cNvSpPr/>
-          <p:nvPr/>
-        </p:nvSpPr>
-        <p:spPr>
-          <a:xfrm>
-            <a:off x="640080" y="3337560"/>
-            <a:ext cx="10972800" cy="822960"/>
-          </a:xfrm>
-          <a:prstGeom prst="roundRect">
-            <a:avLst/>
-          </a:prstGeom>
-          <a:solidFill>
-            <a:srgbClr val="F6F8FA"/>
-          </a:solidFill>
-          <a:ln>
-            <a:solidFill>
-              <a:srgbClr val="D0D7DE"/>
-            </a:solidFill>
-          </a:ln>
-        </p:spPr>
-        <p:style>
-          <a:lnRef idx="1">
-            <a:schemeClr val="accent1"/>
-          </a:lnRef>
-          <a:fillRef idx="3">
-            <a:schemeClr val="accent1"/>
-          </a:fillRef>
-          <a:effectRef idx="2">
-            <a:schemeClr val="accent1"/>
-          </a:effectRef>
-          <a:fontRef idx="minor">
-            <a:schemeClr val="lt1"/>
-          </a:fontRef>
-        </p:style>
-        <p:txBody>
-          <a:bodyPr rtlCol="0" anchor="ctr"/>
-          <a:lstStyle/>
-          <a:p>
-            <a:pPr algn="ctr"/>
+              <a:t>👆 Único validador = mova_auth + guard.php</a:t>
+            </a:r>
+          </a:p>
+        </p:txBody>
+      </p:sp>
+      <p:sp>
+        <p:nvSpPr>
+          <p:cNvPr id="10" name="TextBox 9"/>
+          <p:cNvSpPr txBox="1"/>
+          <p:nvPr/>
+        </p:nvSpPr>
+        <p:spPr>
+          <a:xfrm>
+            <a:off x="685800" y="3794760"/>
+            <a:ext cx="10515600" cy="365760"/>
+          </a:xfrm>
+          <a:prstGeom prst="rect">
+            <a:avLst/>
+          </a:prstGeom>
+          <a:noFill/>
+        </p:spPr>
+        <p:txBody>
+          <a:bodyPr wrap="square">
+            <a:spAutoFit/>
+          </a:bodyPr>
+          <a:lstStyle/>
+          <a:p>
+            <a:pPr algn="l">
+              <a:defRPr sz="1400" b="1">
+                <a:solidFill>
+                  <a:srgbClr val="1A7F37"/>
+                </a:solidFill>
+              </a:defRPr>
+            </a:pPr>
+            <a:r>
+              <a:t>Entregable: Entregable: doc «Reglas-mova_auth»</a:t>
+            </a:r>
           </a:p>
         </p:txBody>
       </p:sp>
@@ -11045,8 +6962,8 @@
         </p:nvSpPr>
         <p:spPr>
           <a:xfrm>
-            <a:off x="822960" y="3474720"/>
-            <a:ext cx="10607040" cy="594360"/>
+            <a:off x="868680" y="4251960"/>
+            <a:ext cx="10058400" cy="320040"/>
           </a:xfrm>
           <a:prstGeom prst="rect">
             <a:avLst/>
@@ -11062,12 +6979,12 @@
             <a:pPr algn="l">
               <a:defRPr sz="1300" b="0">
                 <a:solidFill>
-                  <a:srgbClr val="656D76"/>
-                </a:solidFill>
-              </a:defRPr>
-            </a:pPr>
-            <a:r>
-              <a:t>💡 Tip: Escribir la regla y compartirla con el equipo antes de subir archivos.</a:t>
+                  <a:srgbClr val="1F2328"/>
+                </a:solidFill>
+              </a:defRPr>
+            </a:pPr>
+            <a:r>
+              <a:t>☐  Regla acordada</a:t>
             </a:r>
           </a:p>
         </p:txBody>
@@ -11080,29 +6997,29 @@
         </p:nvSpPr>
         <p:spPr>
           <a:xfrm>
-            <a:off x="685800" y="4343400"/>
-            <a:ext cx="10515600" cy="320040"/>
-          </a:xfrm>
-          <a:prstGeom prst="rect">
-            <a:avLst/>
-          </a:prstGeom>
-          <a:noFill/>
-        </p:spPr>
-        <p:txBody>
-          <a:bodyPr wrap="square">
-            <a:spAutoFit/>
-          </a:bodyPr>
-          <a:lstStyle/>
-          <a:p>
-            <a:pPr algn="l">
-              <a:defRPr sz="1400" b="1">
-                <a:solidFill>
-                  <a:srgbClr val="4A7A80"/>
-                </a:solidFill>
-              </a:defRPr>
-            </a:pPr>
-            <a:r>
-              <a:t>Checklist de este paso:</a:t>
+            <a:off x="868680" y="4599432"/>
+            <a:ext cx="10058400" cy="320040"/>
+          </a:xfrm>
+          <a:prstGeom prst="rect">
+            <a:avLst/>
+          </a:prstGeom>
+          <a:noFill/>
+        </p:spPr>
+        <p:txBody>
+          <a:bodyPr wrap="square">
+            <a:spAutoFit/>
+          </a:bodyPr>
+          <a:lstStyle/>
+          <a:p>
+            <a:pPr algn="l">
+              <a:defRPr sz="1300" b="0">
+                <a:solidFill>
+                  <a:srgbClr val="1F2328"/>
+                </a:solidFill>
+              </a:defRPr>
+            </a:pPr>
+            <a:r>
+              <a:t>☐  Lista de archivos PHP</a:t>
             </a:r>
           </a:p>
         </p:txBody>
@@ -11115,7 +7032,7 @@
         </p:nvSpPr>
         <p:spPr>
           <a:xfrm>
-            <a:off x="868680" y="4709160"/>
+            <a:off x="868680" y="4946904"/>
             <a:ext cx="10058400" cy="320040"/>
           </a:xfrm>
           <a:prstGeom prst="rect">
@@ -11137,77 +7054,7 @@
               </a:defRPr>
             </a:pPr>
             <a:r>
-              <a:t>☐  Regla escrita y compartida</a:t>
-            </a:r>
-          </a:p>
-        </p:txBody>
-      </p:sp>
-      <p:sp>
-        <p:nvSpPr>
-          <p:cNvPr id="14" name="TextBox 13"/>
-          <p:cNvSpPr txBox="1"/>
-          <p:nvPr/>
-        </p:nvSpPr>
-        <p:spPr>
-          <a:xfrm>
-            <a:off x="868680" y="5056632"/>
-            <a:ext cx="10058400" cy="320040"/>
-          </a:xfrm>
-          <a:prstGeom prst="rect">
-            <a:avLst/>
-          </a:prstGeom>
-          <a:noFill/>
-        </p:spPr>
-        <p:txBody>
-          <a:bodyPr wrap="square">
-            <a:spAutoFit/>
-          </a:bodyPr>
-          <a:lstStyle/>
-          <a:p>
-            <a:pPr algn="l">
-              <a:defRPr sz="1300" b="0">
-                <a:solidFill>
-                  <a:srgbClr val="1F2328"/>
-                </a:solidFill>
-              </a:defRPr>
-            </a:pPr>
-            <a:r>
-              <a:t>☐  Lista de archivos acordada</a:t>
-            </a:r>
-          </a:p>
-        </p:txBody>
-      </p:sp>
-      <p:sp>
-        <p:nvSpPr>
-          <p:cNvPr id="15" name="TextBox 14"/>
-          <p:cNvSpPr txBox="1"/>
-          <p:nvPr/>
-        </p:nvSpPr>
-        <p:spPr>
-          <a:xfrm>
-            <a:off x="868680" y="5404104"/>
-            <a:ext cx="10058400" cy="320040"/>
-          </a:xfrm>
-          <a:prstGeom prst="rect">
-            <a:avLst/>
-          </a:prstGeom>
-          <a:noFill/>
-        </p:spPr>
-        <p:txBody>
-          <a:bodyPr wrap="square">
-            <a:spAutoFit/>
-          </a:bodyPr>
-          <a:lstStyle/>
-          <a:p>
-            <a:pPr algn="l">
-              <a:defRPr sz="1300" b="0">
-                <a:solidFill>
-                  <a:srgbClr val="1F2328"/>
-                </a:solidFill>
-              </a:defRPr>
-            </a:pPr>
-            <a:r>
-              <a:t>☐  Responsable técnico asignado</a:t>
+              <a:t>☐  Sandbox elegido</a:t>
             </a:r>
           </a:p>
         </p:txBody>
@@ -11311,7 +7158,7 @@
               </a:defRPr>
             </a:pPr>
             <a:r>
-              <a:t>Paso 4 de 12 · Fase B</a:t>
+              <a:t>Día 3 · mié 8 jul</a:t>
             </a:r>
           </a:p>
         </p:txBody>
@@ -11346,7 +7193,7 @@
               </a:defRPr>
             </a:pPr>
             <a:r>
-              <a:t>Crear carpeta mova_auth en GoDaddy</a:t>
+              <a:t>Carpeta + archivos en servidor</a:t>
             </a:r>
           </a:p>
         </p:txBody>
@@ -11398,7 +7245,7 @@
               </a:defRPr>
             </a:pPr>
             <a:r>
-              <a:t>4</a:t>
+              <a:t>3</a:t>
             </a:r>
           </a:p>
         </p:txBody>
@@ -11411,8 +7258,8 @@
         </p:nvSpPr>
         <p:spPr>
           <a:xfrm>
-            <a:off x="1143000" y="1143000"/>
-            <a:ext cx="10058400" cy="457200"/>
+            <a:off x="1143000" y="1188720"/>
+            <a:ext cx="9144000" cy="457200"/>
           </a:xfrm>
           <a:prstGeom prst="rect">
             <a:avLst/>
@@ -11433,7 +7280,7 @@
               </a:defRPr>
             </a:pPr>
             <a:r>
-              <a:t>Crear carpeta mova_auth en GoDaddy</a:t>
+              <a:t>Carpeta + archivos en servidor</a:t>
             </a:r>
           </a:p>
         </p:txBody>
@@ -11446,8 +7293,8 @@
         </p:nvSpPr>
         <p:spPr>
           <a:xfrm>
-            <a:off x="685800" y="1691640"/>
-            <a:ext cx="5669280" cy="1463040"/>
+            <a:off x="685800" y="1783080"/>
+            <a:ext cx="10515600" cy="1097280"/>
           </a:xfrm>
           <a:prstGeom prst="rect">
             <a:avLst/>
@@ -11468,7 +7315,7 @@
               </a:defRPr>
             </a:pPr>
             <a:r>
-              <a:t>cPanel → public_html → Nueva carpeta: mova_auth. Permisos 755.</a:t>
+              <a:t>Crear public_html/mova_auth/ y subir config, session, login, validate, guard, logout.</a:t>
             </a:r>
           </a:p>
         </p:txBody>
@@ -11481,8 +7328,8 @@
         </p:nvSpPr>
         <p:spPr>
           <a:xfrm>
-            <a:off x="6583680" y="1691640"/>
-            <a:ext cx="5029200" cy="914400"/>
+            <a:off x="640080" y="2971800"/>
+            <a:ext cx="10789920" cy="685800"/>
           </a:xfrm>
           <a:prstGeom prst="roundRect">
             <a:avLst/>
@@ -11526,8 +7373,8 @@
         </p:nvSpPr>
         <p:spPr>
           <a:xfrm>
-            <a:off x="6766560" y="1828800"/>
-            <a:ext cx="4663440" cy="685800"/>
+            <a:off x="822960" y="3108960"/>
+            <a:ext cx="10424160" cy="457200"/>
           </a:xfrm>
           <a:prstGeom prst="rect">
             <a:avLst/>
@@ -11548,53 +7395,43 @@
               </a:defRPr>
             </a:pPr>
             <a:r>
-              <a:t>👆 public_html/mova_auth/</a:t>
-            </a:r>
-          </a:p>
-        </p:txBody>
-      </p:sp>
-      <p:sp>
-        <p:nvSpPr>
-          <p:cNvPr id="10" name="Rounded Rectangle 9"/>
-          <p:cNvSpPr/>
-          <p:nvPr/>
-        </p:nvSpPr>
-        <p:spPr>
-          <a:xfrm>
-            <a:off x="640080" y="3337560"/>
-            <a:ext cx="10972800" cy="822960"/>
-          </a:xfrm>
-          <a:prstGeom prst="roundRect">
-            <a:avLst/>
-          </a:prstGeom>
-          <a:solidFill>
-            <a:srgbClr val="F6F8FA"/>
-          </a:solidFill>
-          <a:ln>
-            <a:solidFill>
-              <a:srgbClr val="D0D7DE"/>
-            </a:solidFill>
-          </a:ln>
-        </p:spPr>
-        <p:style>
-          <a:lnRef idx="1">
-            <a:schemeClr val="accent1"/>
-          </a:lnRef>
-          <a:fillRef idx="3">
-            <a:schemeClr val="accent1"/>
-          </a:fillRef>
-          <a:effectRef idx="2">
-            <a:schemeClr val="accent1"/>
-          </a:effectRef>
-          <a:fontRef idx="minor">
-            <a:schemeClr val="lt1"/>
-          </a:fontRef>
-        </p:style>
-        <p:txBody>
-          <a:bodyPr rtlCol="0" anchor="ctr"/>
-          <a:lstStyle/>
-          <a:p>
-            <a:pPr algn="ctr"/>
+              <a:t>👆 login.php debe abrir en HTTPS</a:t>
+            </a:r>
+          </a:p>
+        </p:txBody>
+      </p:sp>
+      <p:sp>
+        <p:nvSpPr>
+          <p:cNvPr id="10" name="TextBox 9"/>
+          <p:cNvSpPr txBox="1"/>
+          <p:nvPr/>
+        </p:nvSpPr>
+        <p:spPr>
+          <a:xfrm>
+            <a:off x="685800" y="3794760"/>
+            <a:ext cx="10515600" cy="365760"/>
+          </a:xfrm>
+          <a:prstGeom prst="rect">
+            <a:avLst/>
+          </a:prstGeom>
+          <a:noFill/>
+        </p:spPr>
+        <p:txBody>
+          <a:bodyPr wrap="square">
+            <a:spAutoFit/>
+          </a:bodyPr>
+          <a:lstStyle/>
+          <a:p>
+            <a:pPr algn="l">
+              <a:defRPr sz="1400" b="1">
+                <a:solidFill>
+                  <a:srgbClr val="1A7F37"/>
+                </a:solidFill>
+              </a:defRPr>
+            </a:pPr>
+            <a:r>
+              <a:t>Entregable: Entregable: 6 archivos PHP en servidor</a:t>
+            </a:r>
           </a:p>
         </p:txBody>
       </p:sp>
@@ -11606,8 +7443,8 @@
         </p:nvSpPr>
         <p:spPr>
           <a:xfrm>
-            <a:off x="822960" y="3474720"/>
-            <a:ext cx="10607040" cy="594360"/>
+            <a:off x="868680" y="4251960"/>
+            <a:ext cx="10058400" cy="320040"/>
           </a:xfrm>
           <a:prstGeom prst="rect">
             <a:avLst/>
@@ -11623,12 +7460,12 @@
             <a:pPr algn="l">
               <a:defRPr sz="1300" b="0">
                 <a:solidFill>
-                  <a:srgbClr val="656D76"/>
-                </a:solidFill>
-              </a:defRPr>
-            </a:pPr>
-            <a:r>
-              <a:t>💡 Tip: Probar URL https://tudominio.cl/mova_auth/ antes de seguir.</a:t>
+                  <a:srgbClr val="1F2328"/>
+                </a:solidFill>
+              </a:defRPr>
+            </a:pPr>
+            <a:r>
+              <a:t>☐  Carpeta creada</a:t>
             </a:r>
           </a:p>
         </p:txBody>
@@ -11641,29 +7478,29 @@
         </p:nvSpPr>
         <p:spPr>
           <a:xfrm>
-            <a:off x="685800" y="4343400"/>
-            <a:ext cx="10515600" cy="320040"/>
-          </a:xfrm>
-          <a:prstGeom prst="rect">
-            <a:avLst/>
-          </a:prstGeom>
-          <a:noFill/>
-        </p:spPr>
-        <p:txBody>
-          <a:bodyPr wrap="square">
-            <a:spAutoFit/>
-          </a:bodyPr>
-          <a:lstStyle/>
-          <a:p>
-            <a:pPr algn="l">
-              <a:defRPr sz="1400" b="1">
-                <a:solidFill>
-                  <a:srgbClr val="4A7A80"/>
-                </a:solidFill>
-              </a:defRPr>
-            </a:pPr>
-            <a:r>
-              <a:t>Checklist de este paso:</a:t>
+            <a:off x="868680" y="4599432"/>
+            <a:ext cx="10058400" cy="320040"/>
+          </a:xfrm>
+          <a:prstGeom prst="rect">
+            <a:avLst/>
+          </a:prstGeom>
+          <a:noFill/>
+        </p:spPr>
+        <p:txBody>
+          <a:bodyPr wrap="square">
+            <a:spAutoFit/>
+          </a:bodyPr>
+          <a:lstStyle/>
+          <a:p>
+            <a:pPr algn="l">
+              <a:defRPr sz="1300" b="0">
+                <a:solidFill>
+                  <a:srgbClr val="1F2328"/>
+                </a:solidFill>
+              </a:defRPr>
+            </a:pPr>
+            <a:r>
+              <a:t>☐  login.php responde</a:t>
             </a:r>
           </a:p>
         </p:txBody>
@@ -11676,7 +7513,7 @@
         </p:nvSpPr>
         <p:spPr>
           <a:xfrm>
-            <a:off x="868680" y="4709160"/>
+            <a:off x="868680" y="4946904"/>
             <a:ext cx="10058400" cy="320040"/>
           </a:xfrm>
           <a:prstGeom prst="rect">
@@ -11698,77 +7535,7 @@
               </a:defRPr>
             </a:pPr>
             <a:r>
-              <a:t>☐  Carpeta creada</a:t>
-            </a:r>
-          </a:p>
-        </p:txBody>
-      </p:sp>
-      <p:sp>
-        <p:nvSpPr>
-          <p:cNvPr id="14" name="TextBox 13"/>
-          <p:cNvSpPr txBox="1"/>
-          <p:nvPr/>
-        </p:nvSpPr>
-        <p:spPr>
-          <a:xfrm>
-            <a:off x="868680" y="5056632"/>
-            <a:ext cx="10058400" cy="320040"/>
-          </a:xfrm>
-          <a:prstGeom prst="rect">
-            <a:avLst/>
-          </a:prstGeom>
-          <a:noFill/>
-        </p:spPr>
-        <p:txBody>
-          <a:bodyPr wrap="square">
-            <a:spAutoFit/>
-          </a:bodyPr>
-          <a:lstStyle/>
-          <a:p>
-            <a:pPr algn="l">
-              <a:defRPr sz="1300" b="0">
-                <a:solidFill>
-                  <a:srgbClr val="1F2328"/>
-                </a:solidFill>
-              </a:defRPr>
-            </a:pPr>
-            <a:r>
-              <a:t>☐  Permisos 755</a:t>
-            </a:r>
-          </a:p>
-        </p:txBody>
-      </p:sp>
-      <p:sp>
-        <p:nvSpPr>
-          <p:cNvPr id="15" name="TextBox 14"/>
-          <p:cNvSpPr txBox="1"/>
-          <p:nvPr/>
-        </p:nvSpPr>
-        <p:spPr>
-          <a:xfrm>
-            <a:off x="868680" y="5404104"/>
-            <a:ext cx="10058400" cy="320040"/>
-          </a:xfrm>
-          <a:prstGeom prst="rect">
-            <a:avLst/>
-          </a:prstGeom>
-          <a:noFill/>
-        </p:spPr>
-        <p:txBody>
-          <a:bodyPr wrap="square">
-            <a:spAutoFit/>
-          </a:bodyPr>
-          <a:lstStyle/>
-          <a:p>
-            <a:pPr algn="l">
-              <a:defRPr sz="1300" b="0">
-                <a:solidFill>
-                  <a:srgbClr val="1F2328"/>
-                </a:solidFill>
-              </a:defRPr>
-            </a:pPr>
-            <a:r>
-              <a:t>☐  URL responde en navegador</a:t>
+              <a:t>☐  config fuera de Git público</a:t>
             </a:r>
           </a:p>
         </p:txBody>
@@ -11872,7 +7639,7 @@
               </a:defRPr>
             </a:pPr>
             <a:r>
-              <a:t>Paso 5 de 12 · Fase B</a:t>
+              <a:t>Día 4 · jue 9 jul</a:t>
             </a:r>
           </a:p>
         </p:txBody>
@@ -11907,7 +7674,7 @@
               </a:defRPr>
             </a:pPr>
             <a:r>
-              <a:t>Subir archivos núcleo PHP</a:t>
+              <a:t>Login único + cookie httpOnly</a:t>
             </a:r>
           </a:p>
         </p:txBody>
@@ -11959,7 +7726,7 @@
               </a:defRPr>
             </a:pPr>
             <a:r>
-              <a:t>5</a:t>
+              <a:t>4</a:t>
             </a:r>
           </a:p>
         </p:txBody>
@@ -11972,8 +7739,8 @@
         </p:nvSpPr>
         <p:spPr>
           <a:xfrm>
-            <a:off x="1143000" y="1143000"/>
-            <a:ext cx="10058400" cy="457200"/>
+            <a:off x="1143000" y="1188720"/>
+            <a:ext cx="9144000" cy="457200"/>
           </a:xfrm>
           <a:prstGeom prst="rect">
             <a:avLst/>
@@ -11994,7 +7761,7 @@
               </a:defRPr>
             </a:pPr>
             <a:r>
-              <a:t>Subir archivos núcleo PHP</a:t>
+              <a:t>Login único + cookie httpOnly</a:t>
             </a:r>
           </a:p>
         </p:txBody>
@@ -12007,8 +7774,8 @@
         </p:nvSpPr>
         <p:spPr>
           <a:xfrm>
-            <a:off x="685800" y="1691640"/>
-            <a:ext cx="5669280" cy="1463040"/>
+            <a:off x="685800" y="1783080"/>
+            <a:ext cx="10515600" cy="1097280"/>
           </a:xfrm>
           <a:prstGeom prst="rect">
             <a:avLst/>
@@ -12029,7 +7796,7 @@
               </a:defRPr>
             </a:pPr>
             <a:r>
-              <a:t>config.php, session.php, login.php, validate.php, guard.php, logout.php.</a:t>
+              <a:t>Sesión PHP. Google opcional (tokeninfo + whitelist). Cookie Secure + HttpOnly. Sin JWT.</a:t>
             </a:r>
           </a:p>
         </p:txBody>
@@ -12042,8 +7809,8 @@
         </p:nvSpPr>
         <p:spPr>
           <a:xfrm>
-            <a:off x="6583680" y="1691640"/>
-            <a:ext cx="5029200" cy="914400"/>
+            <a:off x="640080" y="2971800"/>
+            <a:ext cx="10789920" cy="685800"/>
           </a:xfrm>
           <a:prstGeom prst="roundRect">
             <a:avLst/>
@@ -12087,8 +7854,8 @@
         </p:nvSpPr>
         <p:spPr>
           <a:xfrm>
-            <a:off x="6766560" y="1828800"/>
-            <a:ext cx="4663440" cy="685800"/>
+            <a:off x="822960" y="3108960"/>
+            <a:ext cx="10424160" cy="457200"/>
           </a:xfrm>
           <a:prstGeom prst="rect">
             <a:avLst/>
@@ -12109,53 +7876,43 @@
               </a:defRPr>
             </a:pPr>
             <a:r>
-              <a:t>👆 guard.php se incluye AL INICIO de cada módulo</a:t>
-            </a:r>
-          </a:p>
-        </p:txBody>
-      </p:sp>
-      <p:sp>
-        <p:nvSpPr>
-          <p:cNvPr id="10" name="Rounded Rectangle 9"/>
-          <p:cNvSpPr/>
-          <p:nvPr/>
-        </p:nvSpPr>
-        <p:spPr>
-          <a:xfrm>
-            <a:off x="640080" y="3337560"/>
-            <a:ext cx="10972800" cy="822960"/>
-          </a:xfrm>
-          <a:prstGeom prst="roundRect">
-            <a:avLst/>
-          </a:prstGeom>
-          <a:solidFill>
-            <a:srgbClr val="F6F8FA"/>
-          </a:solidFill>
-          <a:ln>
-            <a:solidFill>
-              <a:srgbClr val="D0D7DE"/>
-            </a:solidFill>
-          </a:ln>
-        </p:spPr>
-        <p:style>
-          <a:lnRef idx="1">
-            <a:schemeClr val="accent1"/>
-          </a:lnRef>
-          <a:fillRef idx="3">
-            <a:schemeClr val="accent1"/>
-          </a:fillRef>
-          <a:effectRef idx="2">
-            <a:schemeClr val="accent1"/>
-          </a:effectRef>
-          <a:fontRef idx="minor">
-            <a:schemeClr val="lt1"/>
-          </a:fontRef>
-        </p:style>
-        <p:txBody>
-          <a:bodyPr rtlCol="0" anchor="ctr"/>
-          <a:lstStyle/>
-          <a:p>
-            <a:pPr algn="ctr"/>
+              <a:t>👆 DevTools → cookie HttpOnly ✓</a:t>
+            </a:r>
+          </a:p>
+        </p:txBody>
+      </p:sp>
+      <p:sp>
+        <p:nvSpPr>
+          <p:cNvPr id="10" name="TextBox 9"/>
+          <p:cNvSpPr txBox="1"/>
+          <p:nvPr/>
+        </p:nvSpPr>
+        <p:spPr>
+          <a:xfrm>
+            <a:off x="685800" y="3794760"/>
+            <a:ext cx="10515600" cy="365760"/>
+          </a:xfrm>
+          <a:prstGeom prst="rect">
+            <a:avLst/>
+          </a:prstGeom>
+          <a:noFill/>
+        </p:spPr>
+        <p:txBody>
+          <a:bodyPr wrap="square">
+            <a:spAutoFit/>
+          </a:bodyPr>
+          <a:lstStyle/>
+          <a:p>
+            <a:pPr algn="l">
+              <a:defRPr sz="1400" b="1">
+                <a:solidFill>
+                  <a:srgbClr val="1A7F37"/>
+                </a:solidFill>
+              </a:defRPr>
+            </a:pPr>
+            <a:r>
+              <a:t>Entregable: Entregable: login con redirect al módulo</a:t>
+            </a:r>
           </a:p>
         </p:txBody>
       </p:sp>
@@ -12167,8 +7924,8 @@
         </p:nvSpPr>
         <p:spPr>
           <a:xfrm>
-            <a:off x="822960" y="3474720"/>
-            <a:ext cx="10607040" cy="594360"/>
+            <a:off x="868680" y="4251960"/>
+            <a:ext cx="10058400" cy="320040"/>
           </a:xfrm>
           <a:prstGeom prst="rect">
             <a:avLst/>
@@ -12184,12 +7941,12 @@
             <a:pPr algn="l">
               <a:defRPr sz="1300" b="0">
                 <a:solidFill>
-                  <a:srgbClr val="656D76"/>
-                </a:solidFill>
-              </a:defRPr>
-            </a:pPr>
-            <a:r>
-              <a:t>💡 Tip: config.php con secretos — no subir a repos públicos.</a:t>
+                  <a:srgbClr val="1F2328"/>
+                </a:solidFill>
+              </a:defRPr>
+            </a:pPr>
+            <a:r>
+              <a:t>☐  Login funciona</a:t>
             </a:r>
           </a:p>
         </p:txBody>
@@ -12202,29 +7959,29 @@
         </p:nvSpPr>
         <p:spPr>
           <a:xfrm>
-            <a:off x="685800" y="4343400"/>
-            <a:ext cx="10515600" cy="320040"/>
-          </a:xfrm>
-          <a:prstGeom prst="rect">
-            <a:avLst/>
-          </a:prstGeom>
-          <a:noFill/>
-        </p:spPr>
-        <p:txBody>
-          <a:bodyPr wrap="square">
-            <a:spAutoFit/>
-          </a:bodyPr>
-          <a:lstStyle/>
-          <a:p>
-            <a:pPr algn="l">
-              <a:defRPr sz="1400" b="1">
-                <a:solidFill>
-                  <a:srgbClr val="4A7A80"/>
-                </a:solidFill>
-              </a:defRPr>
-            </a:pPr>
-            <a:r>
-              <a:t>Checklist de este paso:</a:t>
+            <a:off x="868680" y="4599432"/>
+            <a:ext cx="10058400" cy="320040"/>
+          </a:xfrm>
+          <a:prstGeom prst="rect">
+            <a:avLst/>
+          </a:prstGeom>
+          <a:noFill/>
+        </p:spPr>
+        <p:txBody>
+          <a:bodyPr wrap="square">
+            <a:spAutoFit/>
+          </a:bodyPr>
+          <a:lstStyle/>
+          <a:p>
+            <a:pPr algn="l">
+              <a:defRPr sz="1300" b="0">
+                <a:solidFill>
+                  <a:srgbClr val="1F2328"/>
+                </a:solidFill>
+              </a:defRPr>
+            </a:pPr>
+            <a:r>
+              <a:t>☐  Redirect OK</a:t>
             </a:r>
           </a:p>
         </p:txBody>
@@ -12237,7 +7994,7 @@
         </p:nvSpPr>
         <p:spPr>
           <a:xfrm>
-            <a:off x="868680" y="4709160"/>
+            <a:off x="868680" y="4946904"/>
             <a:ext cx="10058400" cy="320040"/>
           </a:xfrm>
           <a:prstGeom prst="rect">
@@ -12259,77 +8016,7 @@
               </a:defRPr>
             </a:pPr>
             <a:r>
-              <a:t>☐  6 archivos PHP creados</a:t>
-            </a:r>
-          </a:p>
-        </p:txBody>
-      </p:sp>
-      <p:sp>
-        <p:nvSpPr>
-          <p:cNvPr id="14" name="TextBox 13"/>
-          <p:cNvSpPr txBox="1"/>
-          <p:nvPr/>
-        </p:nvSpPr>
-        <p:spPr>
-          <a:xfrm>
-            <a:off x="868680" y="5056632"/>
-            <a:ext cx="10058400" cy="320040"/>
-          </a:xfrm>
-          <a:prstGeom prst="rect">
-            <a:avLst/>
-          </a:prstGeom>
-          <a:noFill/>
-        </p:spPr>
-        <p:txBody>
-          <a:bodyPr wrap="square">
-            <a:spAutoFit/>
-          </a:bodyPr>
-          <a:lstStyle/>
-          <a:p>
-            <a:pPr algn="l">
-              <a:defRPr sz="1300" b="0">
-                <a:solidFill>
-                  <a:srgbClr val="1F2328"/>
-                </a:solidFill>
-              </a:defRPr>
-            </a:pPr>
-            <a:r>
-              <a:t>☐  login.php abre en navegador</a:t>
-            </a:r>
-          </a:p>
-        </p:txBody>
-      </p:sp>
-      <p:sp>
-        <p:nvSpPr>
-          <p:cNvPr id="15" name="TextBox 14"/>
-          <p:cNvSpPr txBox="1"/>
-          <p:nvPr/>
-        </p:nvSpPr>
-        <p:spPr>
-          <a:xfrm>
-            <a:off x="868680" y="5404104"/>
-            <a:ext cx="10058400" cy="320040"/>
-          </a:xfrm>
-          <a:prstGeom prst="rect">
-            <a:avLst/>
-          </a:prstGeom>
-          <a:noFill/>
-        </p:spPr>
-        <p:txBody>
-          <a:bodyPr wrap="square">
-            <a:spAutoFit/>
-          </a:bodyPr>
-          <a:lstStyle/>
-          <a:p>
-            <a:pPr algn="l">
-              <a:defRPr sz="1300" b="0">
-                <a:solidFill>
-                  <a:srgbClr val="1F2328"/>
-                </a:solidFill>
-              </a:defRPr>
-            </a:pPr>
-            <a:r>
-              <a:t>☐  guard.php probado en sandbox</a:t>
+              <a:t>☐  Sin JWT en localStorage</a:t>
             </a:r>
           </a:p>
         </p:txBody>
@@ -12433,7 +8120,7 @@
               </a:defRPr>
             </a:pPr>
             <a:r>
-              <a:t>Paso 6 de 12 · Fase C</a:t>
+              <a:t>Día 5 · vie 10 jul</a:t>
             </a:r>
           </a:p>
         </p:txBody>
@@ -12468,7 +8155,7 @@
               </a:defRPr>
             </a:pPr>
             <a:r>
-              <a:t>Implementar login único</a:t>
+              <a:t>validate.php + 1er módulo</a:t>
             </a:r>
           </a:p>
         </p:txBody>
@@ -12520,7 +8207,7 @@
               </a:defRPr>
             </a:pPr>
             <a:r>
-              <a:t>6</a:t>
+              <a:t>5</a:t>
             </a:r>
           </a:p>
         </p:txBody>
@@ -12533,8 +8220,8 @@
         </p:nvSpPr>
         <p:spPr>
           <a:xfrm>
-            <a:off x="1143000" y="1143000"/>
-            <a:ext cx="10058400" cy="457200"/>
+            <a:off x="1143000" y="1188720"/>
+            <a:ext cx="9144000" cy="457200"/>
           </a:xfrm>
           <a:prstGeom prst="rect">
             <a:avLst/>
@@ -12555,7 +8242,7 @@
               </a:defRPr>
             </a:pPr>
             <a:r>
-              <a:t>Implementar login único</a:t>
+              <a:t>validate.php + 1er módulo</a:t>
             </a:r>
           </a:p>
         </p:txBody>
@@ -12568,8 +8255,8 @@
         </p:nvSpPr>
         <p:spPr>
           <a:xfrm>
-            <a:off x="685800" y="1691640"/>
-            <a:ext cx="5669280" cy="1463040"/>
+            <a:off x="685800" y="1783080"/>
+            <a:ext cx="10515600" cy="1097280"/>
           </a:xfrm>
           <a:prstGeom prst="rect">
             <a:avLst/>
@@ -12590,7 +8277,7 @@
               </a:defRPr>
             </a:pPr>
             <a:r>
-              <a:t>login.php: usuario entra una vez. Google opcional → resultado en sesión PHP, no localStorage.</a:t>
+              <a:t>validate.php JSON 200/401. Migrar módulo sandbox con require guard.php al inicio.</a:t>
             </a:r>
           </a:p>
         </p:txBody>
@@ -12603,8 +8290,8 @@
         </p:nvSpPr>
         <p:spPr>
           <a:xfrm>
-            <a:off x="6583680" y="1691640"/>
-            <a:ext cx="5029200" cy="914400"/>
+            <a:off x="640080" y="2971800"/>
+            <a:ext cx="10789920" cy="685800"/>
           </a:xfrm>
           <a:prstGeom prst="roundRect">
             <a:avLst/>
@@ -12648,8 +8335,8 @@
         </p:nvSpPr>
         <p:spPr>
           <a:xfrm>
-            <a:off x="6766560" y="1828800"/>
-            <a:ext cx="4663440" cy="685800"/>
+            <a:off x="822960" y="3108960"/>
+            <a:ext cx="10424160" cy="457200"/>
           </a:xfrm>
           <a:prstGeom prst="rect">
             <a:avLst/>
@@ -12670,53 +8357,43 @@
               </a:defRPr>
             </a:pPr>
             <a:r>
-              <a:t>👆 login.php → sesión → redirect al módulo pedido</a:t>
-            </a:r>
-          </a:p>
-        </p:txBody>
-      </p:sp>
-      <p:sp>
-        <p:nvSpPr>
-          <p:cNvPr id="10" name="Rounded Rectangle 9"/>
-          <p:cNvSpPr/>
-          <p:nvPr/>
-        </p:nvSpPr>
-        <p:spPr>
-          <a:xfrm>
-            <a:off x="640080" y="3337560"/>
-            <a:ext cx="10972800" cy="822960"/>
-          </a:xfrm>
-          <a:prstGeom prst="roundRect">
-            <a:avLst/>
-          </a:prstGeom>
-          <a:solidFill>
-            <a:srgbClr val="F6F8FA"/>
-          </a:solidFill>
-          <a:ln>
-            <a:solidFill>
-              <a:srgbClr val="D0D7DE"/>
-            </a:solidFill>
-          </a:ln>
-        </p:spPr>
-        <p:style>
-          <a:lnRef idx="1">
-            <a:schemeClr val="accent1"/>
-          </a:lnRef>
-          <a:fillRef idx="3">
-            <a:schemeClr val="accent1"/>
-          </a:fillRef>
-          <a:effectRef idx="2">
-            <a:schemeClr val="accent1"/>
-          </a:effectRef>
-          <a:fontRef idx="minor">
-            <a:schemeClr val="lt1"/>
-          </a:fontRef>
-        </p:style>
-        <p:txBody>
-          <a:bodyPr rtlCol="0" anchor="ctr"/>
-          <a:lstStyle/>
-          <a:p>
-            <a:pPr algn="ctr"/>
+              <a:t>👆 fetch con credentials: include</a:t>
+            </a:r>
+          </a:p>
+        </p:txBody>
+      </p:sp>
+      <p:sp>
+        <p:nvSpPr>
+          <p:cNvPr id="10" name="TextBox 9"/>
+          <p:cNvSpPr txBox="1"/>
+          <p:nvPr/>
+        </p:nvSpPr>
+        <p:spPr>
+          <a:xfrm>
+            <a:off x="685800" y="3794760"/>
+            <a:ext cx="10515600" cy="365760"/>
+          </a:xfrm>
+          <a:prstGeom prst="rect">
+            <a:avLst/>
+          </a:prstGeom>
+          <a:noFill/>
+        </p:spPr>
+        <p:txBody>
+          <a:bodyPr wrap="square">
+            <a:spAutoFit/>
+          </a:bodyPr>
+          <a:lstStyle/>
+          <a:p>
+            <a:pPr algn="l">
+              <a:defRPr sz="1400" b="1">
+                <a:solidFill>
+                  <a:srgbClr val="1A7F37"/>
+                </a:solidFill>
+              </a:defRPr>
+            </a:pPr>
+            <a:r>
+              <a:t>Entregable: Entregable: 1 módulo M migrado</a:t>
+            </a:r>
           </a:p>
         </p:txBody>
       </p:sp>
@@ -12728,8 +8405,8 @@
         </p:nvSpPr>
         <p:spPr>
           <a:xfrm>
-            <a:off x="822960" y="3474720"/>
-            <a:ext cx="10607040" cy="594360"/>
+            <a:off x="868680" y="4251960"/>
+            <a:ext cx="10058400" cy="320040"/>
           </a:xfrm>
           <a:prstGeom prst="rect">
             <a:avLst/>
@@ -12745,12 +8422,12 @@
             <a:pPr algn="l">
               <a:defRPr sz="1300" b="0">
                 <a:solidFill>
-                  <a:srgbClr val="656D76"/>
-                </a:solidFill>
-              </a:defRPr>
-            </a:pPr>
-            <a:r>
-              <a:t>💡 Tip: Reutilizar tokeninfo + whitelist como hoy en n8n.</a:t>
+                  <a:srgbClr val="1F2328"/>
+                </a:solidFill>
+              </a:defRPr>
+            </a:pPr>
+            <a:r>
+              <a:t>☐  validate.php OK</a:t>
             </a:r>
           </a:p>
         </p:txBody>
@@ -12763,29 +8440,29 @@
         </p:nvSpPr>
         <p:spPr>
           <a:xfrm>
-            <a:off x="685800" y="4343400"/>
-            <a:ext cx="10515600" cy="320040"/>
-          </a:xfrm>
-          <a:prstGeom prst="rect">
-            <a:avLst/>
-          </a:prstGeom>
-          <a:noFill/>
-        </p:spPr>
-        <p:txBody>
-          <a:bodyPr wrap="square">
-            <a:spAutoFit/>
-          </a:bodyPr>
-          <a:lstStyle/>
-          <a:p>
-            <a:pPr algn="l">
-              <a:defRPr sz="1400" b="1">
-                <a:solidFill>
-                  <a:srgbClr val="4A7A80"/>
-                </a:solidFill>
-              </a:defRPr>
-            </a:pPr>
-            <a:r>
-              <a:t>Checklist de este paso:</a:t>
+            <a:off x="868680" y="4599432"/>
+            <a:ext cx="10058400" cy="320040"/>
+          </a:xfrm>
+          <a:prstGeom prst="rect">
+            <a:avLst/>
+          </a:prstGeom>
+          <a:noFill/>
+        </p:spPr>
+        <p:txBody>
+          <a:bodyPr wrap="square">
+            <a:spAutoFit/>
+          </a:bodyPr>
+          <a:lstStyle/>
+          <a:p>
+            <a:pPr algn="l">
+              <a:defRPr sz="1300" b="0">
+                <a:solidFill>
+                  <a:srgbClr val="1F2328"/>
+                </a:solidFill>
+              </a:defRPr>
+            </a:pPr>
+            <a:r>
+              <a:t>☐  Sandbox con guard.php</a:t>
             </a:r>
           </a:p>
         </p:txBody>
@@ -12798,7 +8475,7 @@
         </p:nvSpPr>
         <p:spPr>
           <a:xfrm>
-            <a:off x="868680" y="4709160"/>
+            <a:off x="868680" y="4946904"/>
             <a:ext cx="10058400" cy="320040"/>
           </a:xfrm>
           <a:prstGeom prst="rect">
@@ -12820,77 +8497,7 @@
               </a:defRPr>
             </a:pPr>
             <a:r>
-              <a:t>☐  Login funciona</a:t>
-            </a:r>
-          </a:p>
-        </p:txBody>
-      </p:sp>
-      <p:sp>
-        <p:nvSpPr>
-          <p:cNvPr id="14" name="TextBox 13"/>
-          <p:cNvSpPr txBox="1"/>
-          <p:nvPr/>
-        </p:nvSpPr>
-        <p:spPr>
-          <a:xfrm>
-            <a:off x="868680" y="5056632"/>
-            <a:ext cx="10058400" cy="320040"/>
-          </a:xfrm>
-          <a:prstGeom prst="rect">
-            <a:avLst/>
-          </a:prstGeom>
-          <a:noFill/>
-        </p:spPr>
-        <p:txBody>
-          <a:bodyPr wrap="square">
-            <a:spAutoFit/>
-          </a:bodyPr>
-          <a:lstStyle/>
-          <a:p>
-            <a:pPr algn="l">
-              <a:defRPr sz="1300" b="0">
-                <a:solidFill>
-                  <a:srgbClr val="1F2328"/>
-                </a:solidFill>
-              </a:defRPr>
-            </a:pPr>
-            <a:r>
-              <a:t>☐  Redirect correcto</a:t>
-            </a:r>
-          </a:p>
-        </p:txBody>
-      </p:sp>
-      <p:sp>
-        <p:nvSpPr>
-          <p:cNvPr id="15" name="TextBox 14"/>
-          <p:cNvSpPr txBox="1"/>
-          <p:nvPr/>
-        </p:nvSpPr>
-        <p:spPr>
-          <a:xfrm>
-            <a:off x="868680" y="5404104"/>
-            <a:ext cx="10058400" cy="320040"/>
-          </a:xfrm>
-          <a:prstGeom prst="rect">
-            <a:avLst/>
-          </a:prstGeom>
-          <a:noFill/>
-        </p:spPr>
-        <p:txBody>
-          <a:bodyPr wrap="square">
-            <a:spAutoFit/>
-          </a:bodyPr>
-          <a:lstStyle/>
-          <a:p>
-            <a:pPr algn="l">
-              <a:defRPr sz="1300" b="0">
-                <a:solidFill>
-                  <a:srgbClr val="1F2328"/>
-                </a:solidFill>
-              </a:defRPr>
-            </a:pPr>
-            <a:r>
-              <a:t>☐  Google tokeninfo probado</a:t>
+              <a:t>☐  Prueba manual OK</a:t>
             </a:r>
           </a:p>
         </p:txBody>
